--- a/CodeForge_AI_Tech4Hack_Buildathon2.pptx
+++ b/CodeForge_AI_Tech4Hack_Buildathon2.pptx
@@ -3182,7 +3182,7 @@
         </p:nvSpPr>
         <p:spPr>
           <a:xfrm>
-            <a:off x="384048" y="566928"/>
+            <a:off x="384048" y="548640"/>
             <a:ext cx="6400800" cy="685800"/>
           </a:xfrm>
           <a:prstGeom prst="rect">
@@ -3197,7 +3197,7 @@
           <a:lstStyle/>
           <a:p>
             <a:r>
-              <a:rPr sz="4400" b="1">
+              <a:rPr sz="4600" b="1">
                 <a:solidFill>
                   <a:srgbClr val="111827"/>
                 </a:solidFill>
@@ -3216,7 +3216,7 @@
         </p:nvSpPr>
         <p:spPr>
           <a:xfrm>
-            <a:off x="384048" y="1298448"/>
+            <a:off x="384048" y="1280160"/>
             <a:ext cx="8229600" cy="256032"/>
           </a:xfrm>
           <a:prstGeom prst="rect">
@@ -3231,7 +3231,7 @@
           <a:lstStyle/>
           <a:p>
             <a:r>
-              <a:rPr sz="1150">
+              <a:rPr sz="1200">
                 <a:solidFill>
                   <a:srgbClr val="111827"/>
                 </a:solidFill>
@@ -3250,7 +3250,7 @@
         </p:nvSpPr>
         <p:spPr>
           <a:xfrm>
-            <a:off x="384048" y="1591056"/>
+            <a:off x="384048" y="1572768"/>
             <a:ext cx="8385048" cy="20116"/>
           </a:xfrm>
           <a:prstGeom prst="rect">
@@ -3293,8 +3293,8 @@
         </p:nvSpPr>
         <p:spPr>
           <a:xfrm>
-            <a:off x="384048" y="1645920"/>
-            <a:ext cx="8385048" cy="3364992"/>
+            <a:off x="384048" y="1627632"/>
+            <a:ext cx="8385048" cy="3383280"/>
           </a:xfrm>
           <a:prstGeom prst="rect">
             <a:avLst/>
@@ -3336,8 +3336,8 @@
         </p:nvSpPr>
         <p:spPr>
           <a:xfrm>
-            <a:off x="530352" y="1719072"/>
-            <a:ext cx="3931920" cy="3218688"/>
+            <a:off x="530352" y="1700784"/>
+            <a:ext cx="3931920" cy="3236976"/>
           </a:xfrm>
           <a:prstGeom prst="rect">
             <a:avLst/>
@@ -3351,7 +3351,7 @@
           <a:lstStyle/>
           <a:p>
             <a:r>
-              <a:rPr sz="1050">
+              <a:rPr sz="1100">
                 <a:solidFill>
                   <a:srgbClr val="B45309"/>
                 </a:solidFill>
@@ -3363,11 +3363,11 @@
           <a:p>
             <a:pPr algn="l">
               <a:spcBef>
-                <a:spcPts val="200"/>
-              </a:spcBef>
-            </a:pPr>
-            <a:r>
-              <a:rPr sz="2700" b="1">
+                <a:spcPts val="300"/>
+              </a:spcBef>
+            </a:pPr>
+            <a:r>
+              <a:rPr sz="2800" b="1">
                 <a:solidFill>
                   <a:srgbClr val="111827"/>
                 </a:solidFill>
@@ -3379,11 +3379,11 @@
           <a:p>
             <a:pPr algn="l">
               <a:spcBef>
-                <a:spcPts val="800"/>
-              </a:spcBef>
-            </a:pPr>
-            <a:r>
-              <a:rPr sz="1050">
+                <a:spcPts val="1000"/>
+              </a:spcBef>
+            </a:pPr>
+            <a:r>
+              <a:rPr sz="1100">
                 <a:solidFill>
                   <a:srgbClr val="B45309"/>
                 </a:solidFill>
@@ -3392,7 +3392,7 @@
               <a:t>TEAM ID: </a:t>
             </a:r>
             <a:r>
-              <a:rPr sz="1150" b="1">
+              <a:rPr sz="1200" b="1">
                 <a:solidFill>
                   <a:srgbClr val="111827"/>
                 </a:solidFill>
@@ -3404,11 +3404,11 @@
           <a:p>
             <a:pPr algn="l">
               <a:spcBef>
-                <a:spcPts val="1200"/>
-              </a:spcBef>
-            </a:pPr>
-            <a:r>
-              <a:rPr sz="1050">
+                <a:spcPts val="1400"/>
+              </a:spcBef>
+            </a:pPr>
+            <a:r>
+              <a:rPr sz="1100">
                 <a:solidFill>
                   <a:srgbClr val="B45309"/>
                 </a:solidFill>
@@ -3420,7 +3420,39 @@
           <a:p>
             <a:pPr algn="l">
               <a:spcBef>
-                <a:spcPts val="200"/>
+                <a:spcPts val="300"/>
+              </a:spcBef>
+            </a:pPr>
+            <a:r>
+              <a:rPr sz="1400" b="1">
+                <a:solidFill>
+                  <a:srgbClr val="111827"/>
+                </a:solidFill>
+                <a:latin typeface="Calibri"/>
+              </a:rPr>
+              <a:t>ABES Engineering College, Ghaziabad</a:t>
+            </a:r>
+          </a:p>
+          <a:p>
+            <a:pPr algn="l">
+              <a:spcBef>
+                <a:spcPts val="1400"/>
+              </a:spcBef>
+            </a:pPr>
+            <a:r>
+              <a:rPr sz="1100">
+                <a:solidFill>
+                  <a:srgbClr val="B45309"/>
+                </a:solidFill>
+                <a:latin typeface="Lexend Medium"/>
+              </a:rPr>
+              <a:t>HACKATHON EVENT &amp; TRACK</a:t>
+            </a:r>
+          </a:p>
+          <a:p>
+            <a:pPr algn="l">
+              <a:spcBef>
+                <a:spcPts val="300"/>
               </a:spcBef>
             </a:pPr>
             <a:r>
@@ -3430,65 +3462,33 @@
                 </a:solidFill>
                 <a:latin typeface="Calibri"/>
               </a:rPr>
-              <a:t>ABES Engineering College, Ghaziabad</a:t>
-            </a:r>
-          </a:p>
-          <a:p>
-            <a:pPr algn="l">
-              <a:spcBef>
-                <a:spcPts val="1200"/>
-              </a:spcBef>
-            </a:pPr>
-            <a:r>
-              <a:rPr sz="1050">
+              <a:t>Tech4Hack Buildathon 2 — Competitive Coding Track</a:t>
+            </a:r>
+          </a:p>
+          <a:p>
+            <a:pPr algn="l">
+              <a:spcBef>
+                <a:spcPts val="1400"/>
+              </a:spcBef>
+            </a:pPr>
+            <a:r>
+              <a:rPr sz="1100">
                 <a:solidFill>
                   <a:srgbClr val="B45309"/>
                 </a:solidFill>
                 <a:latin typeface="Lexend Medium"/>
               </a:rPr>
-              <a:t>HACKATHON EVENT</a:t>
-            </a:r>
-          </a:p>
-          <a:p>
-            <a:pPr algn="l">
-              <a:spcBef>
-                <a:spcPts val="200"/>
-              </a:spcBef>
-            </a:pPr>
-            <a:r>
-              <a:rPr sz="1300" b="1">
-                <a:solidFill>
-                  <a:srgbClr val="111827"/>
-                </a:solidFill>
-                <a:latin typeface="Calibri"/>
-              </a:rPr>
-              <a:t>Tech4Hack Buildathon 2 — National Level</a:t>
-            </a:r>
-          </a:p>
-          <a:p>
-            <a:pPr algn="l">
-              <a:spcBef>
-                <a:spcPts val="1200"/>
-              </a:spcBef>
-            </a:pPr>
-            <a:r>
-              <a:rPr sz="1050">
-                <a:solidFill>
-                  <a:srgbClr val="B45309"/>
-                </a:solidFill>
-                <a:latin typeface="Lexend Medium"/>
-              </a:rPr>
-              <a:t>LIVE DEPLOYMENT URL</a:t>
-            </a:r>
-          </a:p>
-          <a:p>
-            <a:pPr algn="l">
-              <a:spcBef>
-                <a:spcPts val="200"/>
-              </a:spcBef>
-            </a:pPr>
-            <a:r>
-              <a:rPr sz="1200" b="1">
+              <a:t>LIVE PLATFORM DEPLOYMENT</a:t>
+            </a:r>
+          </a:p>
+          <a:p>
+            <a:pPr algn="l">
+              <a:spcBef>
+                <a:spcPts val="300"/>
+              </a:spcBef>
+            </a:pPr>
+            <a:r>
+              <a:rPr sz="1250" b="1">
                 <a:solidFill>
                   <a:srgbClr val="1E2761"/>
                 </a:solidFill>
@@ -3507,8 +3507,8 @@
         </p:nvSpPr>
         <p:spPr>
           <a:xfrm>
-            <a:off x="4736592" y="1719072"/>
-            <a:ext cx="3886200" cy="3218688"/>
+            <a:off x="4736592" y="1700784"/>
+            <a:ext cx="3886200" cy="3236976"/>
           </a:xfrm>
           <a:prstGeom prst="rect">
             <a:avLst/>
@@ -3522,7 +3522,7 @@
           <a:lstStyle/>
           <a:p>
             <a:r>
-              <a:rPr sz="1050">
+              <a:rPr sz="1100">
                 <a:solidFill>
                   <a:srgbClr val="B45309"/>
                 </a:solidFill>
@@ -3534,11 +3534,11 @@
           <a:p>
             <a:pPr algn="l">
               <a:spcBef>
-                <a:spcPts val="600"/>
-              </a:spcBef>
-            </a:pPr>
-            <a:r>
-              <a:rPr sz="1200">
+                <a:spcPts val="700"/>
+              </a:spcBef>
+            </a:pPr>
+            <a:r>
+              <a:rPr sz="1300">
                 <a:solidFill>
                   <a:srgbClr val="B45309"/>
                 </a:solidFill>
@@ -3547,7 +3547,7 @@
               <a:t>•  </a:t>
             </a:r>
             <a:r>
-              <a:rPr sz="1300" b="1">
+              <a:rPr sz="1350" b="1">
                 <a:solidFill>
                   <a:srgbClr val="111827"/>
                 </a:solidFill>
@@ -3556,7 +3556,7 @@
               <a:t>Sparsh Singh</a:t>
             </a:r>
             <a:r>
-              <a:rPr sz="950">
+              <a:rPr sz="1000">
                 <a:solidFill>
                   <a:srgbClr val="475569"/>
                 </a:solidFill>
@@ -3569,11 +3569,11 @@
           <a:p>
             <a:pPr algn="l">
               <a:spcBef>
-                <a:spcPts val="600"/>
-              </a:spcBef>
-            </a:pPr>
-            <a:r>
-              <a:rPr sz="1200">
+                <a:spcPts val="700"/>
+              </a:spcBef>
+            </a:pPr>
+            <a:r>
+              <a:rPr sz="1300">
                 <a:solidFill>
                   <a:srgbClr val="B45309"/>
                 </a:solidFill>
@@ -3582,7 +3582,7 @@
               <a:t>•  </a:t>
             </a:r>
             <a:r>
-              <a:rPr sz="1300" b="1">
+              <a:rPr sz="1350" b="1">
                 <a:solidFill>
                   <a:srgbClr val="111827"/>
                 </a:solidFill>
@@ -3591,7 +3591,7 @@
               <a:t>Shashwat Rastogi</a:t>
             </a:r>
             <a:r>
-              <a:rPr sz="950">
+              <a:rPr sz="1000">
                 <a:solidFill>
                   <a:srgbClr val="475569"/>
                 </a:solidFill>
@@ -3604,11 +3604,11 @@
           <a:p>
             <a:pPr algn="l">
               <a:spcBef>
-                <a:spcPts val="600"/>
-              </a:spcBef>
-            </a:pPr>
-            <a:r>
-              <a:rPr sz="1200">
+                <a:spcPts val="700"/>
+              </a:spcBef>
+            </a:pPr>
+            <a:r>
+              <a:rPr sz="1300">
                 <a:solidFill>
                   <a:srgbClr val="B45309"/>
                 </a:solidFill>
@@ -3617,7 +3617,7 @@
               <a:t>•  </a:t>
             </a:r>
             <a:r>
-              <a:rPr sz="1300" b="1">
+              <a:rPr sz="1350" b="1">
                 <a:solidFill>
                   <a:srgbClr val="111827"/>
                 </a:solidFill>
@@ -3626,7 +3626,7 @@
               <a:t>Sumit Singh</a:t>
             </a:r>
             <a:r>
-              <a:rPr sz="950">
+              <a:rPr sz="1000">
                 <a:solidFill>
                   <a:srgbClr val="475569"/>
                 </a:solidFill>
@@ -3639,11 +3639,11 @@
           <a:p>
             <a:pPr algn="l">
               <a:spcBef>
-                <a:spcPts val="600"/>
-              </a:spcBef>
-            </a:pPr>
-            <a:r>
-              <a:rPr sz="1200">
+                <a:spcPts val="700"/>
+              </a:spcBef>
+            </a:pPr>
+            <a:r>
+              <a:rPr sz="1300">
                 <a:solidFill>
                   <a:srgbClr val="B45309"/>
                 </a:solidFill>
@@ -3652,7 +3652,7 @@
               <a:t>•  </a:t>
             </a:r>
             <a:r>
-              <a:rPr sz="1300" b="1">
+              <a:rPr sz="1350" b="1">
                 <a:solidFill>
                   <a:srgbClr val="111827"/>
                 </a:solidFill>
@@ -3661,7 +3661,7 @@
               <a:t>Sudiksha Singh</a:t>
             </a:r>
             <a:r>
-              <a:rPr sz="950">
+              <a:rPr sz="1000">
                 <a:solidFill>
                   <a:srgbClr val="475569"/>
                 </a:solidFill>
@@ -3674,27 +3674,27 @@
           <a:p>
             <a:pPr algn="l">
               <a:spcBef>
-                <a:spcPts val="1200"/>
-              </a:spcBef>
-            </a:pPr>
-            <a:r>
-              <a:rPr sz="1050">
+                <a:spcPts val="1400"/>
+              </a:spcBef>
+            </a:pPr>
+            <a:r>
+              <a:rPr sz="1100">
                 <a:solidFill>
                   <a:srgbClr val="B45309"/>
                 </a:solidFill>
                 <a:latin typeface="Lexend Medium"/>
               </a:rPr>
-              <a:t>OPEN SOURCE REPOSITORY</a:t>
-            </a:r>
-          </a:p>
-          <a:p>
-            <a:pPr algn="l">
-              <a:spcBef>
-                <a:spcPts val="200"/>
-              </a:spcBef>
-            </a:pPr>
-            <a:r>
-              <a:rPr sz="1150" b="1">
+              <a:t>OPEN SOURCE GITHUB REPOSITORY</a:t>
+            </a:r>
+          </a:p>
+          <a:p>
+            <a:pPr algn="l">
+              <a:spcBef>
+                <a:spcPts val="300"/>
+              </a:spcBef>
+            </a:pPr>
+            <a:r>
+              <a:rPr sz="1200" b="1">
                 <a:solidFill>
                   <a:srgbClr val="1E2761"/>
                 </a:solidFill>
@@ -3777,7 +3777,7 @@
         </p:nvSpPr>
         <p:spPr>
           <a:xfrm>
-            <a:off x="384048" y="73152"/>
+            <a:off x="384048" y="54864"/>
             <a:ext cx="8385048" cy="384048"/>
           </a:xfrm>
           <a:prstGeom prst="rect">
@@ -3811,8 +3811,8 @@
         </p:nvSpPr>
         <p:spPr>
           <a:xfrm>
-            <a:off x="384048" y="457200"/>
-            <a:ext cx="8385048" cy="237744"/>
+            <a:off x="384048" y="438912"/>
+            <a:ext cx="8385048" cy="219456"/>
           </a:xfrm>
           <a:prstGeom prst="rect">
             <a:avLst/>
@@ -3845,7 +3845,7 @@
         </p:nvSpPr>
         <p:spPr>
           <a:xfrm>
-            <a:off x="384048" y="694944"/>
+            <a:off x="384048" y="676656"/>
             <a:ext cx="8385048" cy="20116"/>
           </a:xfrm>
           <a:prstGeom prst="rect">
@@ -3888,8 +3888,8 @@
         </p:nvSpPr>
         <p:spPr>
           <a:xfrm>
-            <a:off x="384048" y="731520"/>
-            <a:ext cx="4160520" cy="4041648"/>
+            <a:off x="384048" y="713232"/>
+            <a:ext cx="4160520" cy="4069080"/>
           </a:xfrm>
           <a:prstGeom prst="rect">
             <a:avLst/>
@@ -3931,8 +3931,8 @@
         </p:nvSpPr>
         <p:spPr>
           <a:xfrm>
-            <a:off x="475488" y="768096"/>
-            <a:ext cx="3977639" cy="3968496"/>
+            <a:off x="475488" y="749808"/>
+            <a:ext cx="3977639" cy="3995928"/>
           </a:xfrm>
           <a:prstGeom prst="rect">
             <a:avLst/>
@@ -3957,12 +3957,15 @@
           </a:p>
           <a:p>
             <a:pPr algn="l">
-              <a:spcBef>
-                <a:spcPts val="600"/>
-              </a:spcBef>
-            </a:pPr>
-            <a:r>
-              <a:rPr sz="1000" b="1">
+              <a:lnSpc>
+                <a:spcPts val="1150"/>
+              </a:lnSpc>
+              <a:spcBef>
+                <a:spcPts val="850"/>
+              </a:spcBef>
+            </a:pPr>
+            <a:r>
+              <a:rPr sz="919" b="1">
                 <a:solidFill>
                   <a:srgbClr val="F2A93B"/>
                 </a:solidFill>
@@ -3971,7 +3974,7 @@
               <a:t>▸ </a:t>
             </a:r>
             <a:r>
-              <a:rPr sz="1000" b="1">
+              <a:rPr sz="919" b="1">
                 <a:solidFill>
                   <a:srgbClr val="FFFFFF"/>
                 </a:solidFill>
@@ -3980,7 +3983,7 @@
               <a:t>28M+ Global Developers — </a:t>
             </a:r>
             <a:r>
-              <a:rPr sz="900">
+              <a:rPr sz="860">
                 <a:solidFill>
                   <a:srgbClr val="CBD5E1"/>
                 </a:solidFill>
@@ -3991,12 +3994,15 @@
           </a:p>
           <a:p>
             <a:pPr algn="l">
-              <a:spcBef>
-                <a:spcPts val="600"/>
-              </a:spcBef>
-            </a:pPr>
-            <a:r>
-              <a:rPr sz="1000" b="1">
+              <a:lnSpc>
+                <a:spcPts val="1150"/>
+              </a:lnSpc>
+              <a:spcBef>
+                <a:spcPts val="850"/>
+              </a:spcBef>
+            </a:pPr>
+            <a:r>
+              <a:rPr sz="919" b="1">
                 <a:solidFill>
                   <a:srgbClr val="F2A93B"/>
                 </a:solidFill>
@@ -4005,7 +4011,7 @@
               <a:t>▸ </a:t>
             </a:r>
             <a:r>
-              <a:rPr sz="1000" b="1">
+              <a:rPr sz="919" b="1">
                 <a:solidFill>
                   <a:srgbClr val="FFFFFF"/>
                 </a:solidFill>
@@ -4014,7 +4020,7 @@
               <a:t>5+ Disconnected Tools — </a:t>
             </a:r>
             <a:r>
-              <a:rPr sz="900">
+              <a:rPr sz="860">
                 <a:solidFill>
                   <a:srgbClr val="CBD5E1"/>
                 </a:solidFill>
@@ -4025,12 +4031,15 @@
           </a:p>
           <a:p>
             <a:pPr algn="l">
-              <a:spcBef>
-                <a:spcPts val="600"/>
-              </a:spcBef>
-            </a:pPr>
-            <a:r>
-              <a:rPr sz="1000" b="1">
+              <a:lnSpc>
+                <a:spcPts val="1150"/>
+              </a:lnSpc>
+              <a:spcBef>
+                <a:spcPts val="850"/>
+              </a:spcBef>
+            </a:pPr>
+            <a:r>
+              <a:rPr sz="919" b="1">
                 <a:solidFill>
                   <a:srgbClr val="F2A93B"/>
                 </a:solidFill>
@@ -4039,7 +4048,7 @@
               <a:t>▸ </a:t>
             </a:r>
             <a:r>
-              <a:rPr sz="1000" b="1">
+              <a:rPr sz="919" b="1">
                 <a:solidFill>
                   <a:srgbClr val="FFFFFF"/>
                 </a:solidFill>
@@ -4048,7 +4057,7 @@
               <a:t>$15,000+ Average Cost — </a:t>
             </a:r>
             <a:r>
-              <a:rPr sz="900">
+              <a:rPr sz="860">
                 <a:solidFill>
                   <a:srgbClr val="CBD5E1"/>
                 </a:solidFill>
@@ -4059,12 +4068,15 @@
           </a:p>
           <a:p>
             <a:pPr algn="l">
-              <a:spcBef>
-                <a:spcPts val="600"/>
-              </a:spcBef>
-            </a:pPr>
-            <a:r>
-              <a:rPr sz="1000" b="1">
+              <a:lnSpc>
+                <a:spcPts val="1150"/>
+              </a:lnSpc>
+              <a:spcBef>
+                <a:spcPts val="850"/>
+              </a:spcBef>
+            </a:pPr>
+            <a:r>
+              <a:rPr sz="919" b="1">
                 <a:solidFill>
                   <a:srgbClr val="F2A93B"/>
                 </a:solidFill>
@@ -4073,7 +4085,7 @@
               <a:t>▸ </a:t>
             </a:r>
             <a:r>
-              <a:rPr sz="1000" b="1">
+              <a:rPr sz="919" b="1">
                 <a:solidFill>
                   <a:srgbClr val="FFFFFF"/>
                 </a:solidFill>
@@ -4082,7 +4094,7 @@
               <a:t>74% CS Graduates — </a:t>
             </a:r>
             <a:r>
-              <a:rPr sz="900">
+              <a:rPr sz="860">
                 <a:solidFill>
                   <a:srgbClr val="CBD5E1"/>
                 </a:solidFill>
@@ -4093,12 +4105,15 @@
           </a:p>
           <a:p>
             <a:pPr algn="l">
-              <a:spcBef>
-                <a:spcPts val="600"/>
-              </a:spcBef>
-            </a:pPr>
-            <a:r>
-              <a:rPr sz="1000" b="1">
+              <a:lnSpc>
+                <a:spcPts val="1150"/>
+              </a:lnSpc>
+              <a:spcBef>
+                <a:spcPts val="850"/>
+              </a:spcBef>
+            </a:pPr>
+            <a:r>
+              <a:rPr sz="919" b="1">
                 <a:solidFill>
                   <a:srgbClr val="F2A93B"/>
                 </a:solidFill>
@@ -4107,7 +4122,7 @@
               <a:t>▸ </a:t>
             </a:r>
             <a:r>
-              <a:rPr sz="1000" b="1">
+              <a:rPr sz="919" b="1">
                 <a:solidFill>
                   <a:srgbClr val="FFFFFF"/>
                 </a:solidFill>
@@ -4116,23 +4131,26 @@
               <a:t>0 Unified Platforms — </a:t>
             </a:r>
             <a:r>
-              <a:rPr sz="900">
+              <a:rPr sz="860">
                 <a:solidFill>
                   <a:srgbClr val="CBD5E1"/>
                 </a:solidFill>
                 <a:latin typeface="Roboto"/>
               </a:rPr>
-              <a:t>currently integrate DSA practice, real-time code execution, 3-tier Socratic AI coaching, and ELO-rated contests.</a:t>
-            </a:r>
-          </a:p>
-          <a:p>
-            <a:pPr algn="l">
-              <a:spcBef>
-                <a:spcPts val="600"/>
-              </a:spcBef>
-            </a:pPr>
-            <a:r>
-              <a:rPr sz="1000" b="1">
+              <a:t>currently integrate 400+ DSA problems, real-time code execution, 3-tier Socratic AI coaching, and ELO-rated contests.</a:t>
+            </a:r>
+          </a:p>
+          <a:p>
+            <a:pPr algn="l">
+              <a:lnSpc>
+                <a:spcPts val="1150"/>
+              </a:lnSpc>
+              <a:spcBef>
+                <a:spcPts val="850"/>
+              </a:spcBef>
+            </a:pPr>
+            <a:r>
+              <a:rPr sz="919" b="1">
                 <a:solidFill>
                   <a:srgbClr val="F2A93B"/>
                 </a:solidFill>
@@ -4141,7 +4159,7 @@
               <a:t>▸ </a:t>
             </a:r>
             <a:r>
-              <a:rPr sz="1000" b="1">
+              <a:rPr sz="919" b="1">
                 <a:solidFill>
                   <a:srgbClr val="FFFFFF"/>
                 </a:solidFill>
@@ -4150,7 +4168,7 @@
               <a:t>3–6 Months Wasted — </a:t>
             </a:r>
             <a:r>
-              <a:rPr sz="900">
+              <a:rPr sz="860">
                 <a:solidFill>
                   <a:srgbClr val="CBD5E1"/>
                 </a:solidFill>
@@ -4161,12 +4179,15 @@
           </a:p>
           <a:p>
             <a:pPr algn="l">
-              <a:spcBef>
-                <a:spcPts val="600"/>
-              </a:spcBef>
-            </a:pPr>
-            <a:r>
-              <a:rPr sz="1000" b="1">
+              <a:lnSpc>
+                <a:spcPts val="1150"/>
+              </a:lnSpc>
+              <a:spcBef>
+                <a:spcPts val="850"/>
+              </a:spcBef>
+            </a:pPr>
+            <a:r>
+              <a:rPr sz="919" b="1">
                 <a:solidFill>
                   <a:srgbClr val="F2A93B"/>
                 </a:solidFill>
@@ -4175,7 +4196,7 @@
               <a:t>▸ </a:t>
             </a:r>
             <a:r>
-              <a:rPr sz="1000" b="1">
+              <a:rPr sz="919" b="1">
                 <a:solidFill>
                   <a:srgbClr val="FFFFFF"/>
                 </a:solidFill>
@@ -4184,7 +4205,7 @@
               <a:t>40% Abandonment Rate — </a:t>
             </a:r>
             <a:r>
-              <a:rPr sz="900">
+              <a:rPr sz="860">
                 <a:solidFill>
                   <a:srgbClr val="CBD5E1"/>
                 </a:solidFill>
@@ -4195,12 +4216,15 @@
           </a:p>
           <a:p>
             <a:pPr algn="l">
-              <a:spcBef>
-                <a:spcPts val="600"/>
-              </a:spcBef>
-            </a:pPr>
-            <a:r>
-              <a:rPr sz="1000" b="1">
+              <a:lnSpc>
+                <a:spcPts val="1150"/>
+              </a:lnSpc>
+              <a:spcBef>
+                <a:spcPts val="850"/>
+              </a:spcBef>
+            </a:pPr>
+            <a:r>
+              <a:rPr sz="919" b="1">
                 <a:solidFill>
                   <a:srgbClr val="F2A93B"/>
                 </a:solidFill>
@@ -4209,7 +4233,7 @@
               <a:t>▸ </a:t>
             </a:r>
             <a:r>
-              <a:rPr sz="1000" b="1">
+              <a:rPr sz="919" b="1">
                 <a:solidFill>
                   <a:srgbClr val="FFFFFF"/>
                 </a:solidFill>
@@ -4218,13 +4242,13 @@
               <a:t>Severe Dev Burnout — </a:t>
             </a:r>
             <a:r>
-              <a:rPr sz="900">
+              <a:rPr sz="860">
                 <a:solidFill>
                   <a:srgbClr val="CBD5E1"/>
                 </a:solidFill>
                 <a:latin typeface="Roboto"/>
               </a:rPr>
-              <a:t>caused by grinding 500+ problems blindly without personalized feedback on code quality, style or complexity.</a:t>
+              <a:t>caused by grinding 400+ problems blindly without personalized feedback on code quality, style or complexity.</a:t>
             </a:r>
           </a:p>
         </p:txBody>
@@ -4237,8 +4261,8 @@
         </p:nvSpPr>
         <p:spPr>
           <a:xfrm>
-            <a:off x="4754880" y="731520"/>
-            <a:ext cx="3995928" cy="237744"/>
+            <a:off x="4754880" y="713232"/>
+            <a:ext cx="3995928" cy="219456"/>
           </a:xfrm>
           <a:prstGeom prst="rect">
             <a:avLst/>
@@ -4271,8 +4295,8 @@
         </p:nvSpPr>
         <p:spPr>
           <a:xfrm>
-            <a:off x="4754880" y="987552"/>
-            <a:ext cx="3995928" cy="1234440"/>
+            <a:off x="4754880" y="932688"/>
+            <a:ext cx="3995928" cy="1261872"/>
           </a:xfrm>
           <a:prstGeom prst="rect">
             <a:avLst/>
@@ -4316,8 +4340,8 @@
         </p:nvSpPr>
         <p:spPr>
           <a:xfrm>
-            <a:off x="4809744" y="1024128"/>
-            <a:ext cx="3886200" cy="1161288"/>
+            <a:off x="4809744" y="969264"/>
+            <a:ext cx="3886200" cy="1188720"/>
           </a:xfrm>
           <a:prstGeom prst="rect">
             <a:avLst/>
@@ -4331,7 +4355,7 @@
           <a:lstStyle/>
           <a:p>
             <a:r>
-              <a:rPr sz="1050" b="1">
+              <a:rPr sz="980" b="1">
                 <a:solidFill>
                   <a:srgbClr val="1E2761"/>
                 </a:solidFill>
@@ -4342,28 +4366,34 @@
           </a:p>
           <a:p>
             <a:pPr algn="l">
-              <a:spcBef>
-                <a:spcPts val="250"/>
-              </a:spcBef>
-            </a:pPr>
-            <a:r>
-              <a:rPr sz="840">
+              <a:lnSpc>
+                <a:spcPts val="1000"/>
+              </a:lnSpc>
+              <a:spcBef>
+                <a:spcPts val="350"/>
+              </a:spcBef>
+            </a:pPr>
+            <a:r>
+              <a:rPr sz="780">
                 <a:solidFill>
                   <a:srgbClr val="475569"/>
                 </a:solidFill>
                 <a:latin typeface="Inter"/>
               </a:rPr>
-              <a:t>• Static problem sets without interactive AI coaching or guided step-by-step explanation</a:t>
-            </a:r>
-          </a:p>
-          <a:p>
-            <a:pPr algn="l">
-              <a:spcBef>
-                <a:spcPts val="250"/>
-              </a:spcBef>
-            </a:pPr>
-            <a:r>
-              <a:rPr sz="840">
+              <a:t>• Static problem sets without interactive AI coaching or step-by-step guidance</a:t>
+            </a:r>
+          </a:p>
+          <a:p>
+            <a:pPr algn="l">
+              <a:lnSpc>
+                <a:spcPts val="1000"/>
+              </a:lnSpc>
+              <a:spcBef>
+                <a:spcPts val="350"/>
+              </a:spcBef>
+            </a:pPr>
+            <a:r>
+              <a:rPr sz="780">
                 <a:solidFill>
                   <a:srgbClr val="475569"/>
                 </a:solidFill>
@@ -4374,12 +4404,15 @@
           </a:p>
           <a:p>
             <a:pPr algn="l">
-              <a:spcBef>
-                <a:spcPts val="250"/>
-              </a:spcBef>
-            </a:pPr>
-            <a:r>
-              <a:rPr sz="840">
+              <a:lnSpc>
+                <a:spcPts val="1000"/>
+              </a:lnSpc>
+              <a:spcBef>
+                <a:spcPts val="350"/>
+              </a:spcBef>
+            </a:pPr>
+            <a:r>
+              <a:rPr sz="780">
                 <a:solidFill>
                   <a:srgbClr val="475569"/>
                 </a:solidFill>
@@ -4390,12 +4423,15 @@
           </a:p>
           <a:p>
             <a:pPr algn="l">
-              <a:spcBef>
-                <a:spcPts val="250"/>
-              </a:spcBef>
-            </a:pPr>
-            <a:r>
-              <a:rPr sz="840">
+              <a:lnSpc>
+                <a:spcPts val="1000"/>
+              </a:lnSpc>
+              <a:spcBef>
+                <a:spcPts val="350"/>
+              </a:spcBef>
+            </a:pPr>
+            <a:r>
+              <a:rPr sz="780">
                 <a:solidFill>
                   <a:srgbClr val="475569"/>
                 </a:solidFill>
@@ -4406,34 +4442,21 @@
           </a:p>
           <a:p>
             <a:pPr algn="l">
-              <a:spcBef>
-                <a:spcPts val="250"/>
-              </a:spcBef>
-            </a:pPr>
-            <a:r>
-              <a:rPr sz="840">
+              <a:lnSpc>
+                <a:spcPts val="1000"/>
+              </a:lnSpc>
+              <a:spcBef>
+                <a:spcPts val="350"/>
+              </a:spcBef>
+            </a:pPr>
+            <a:r>
+              <a:rPr sz="780">
                 <a:solidFill>
                   <a:srgbClr val="475569"/>
                 </a:solidFill>
                 <a:latin typeface="Inter"/>
               </a:rPr>
               <a:t>• Lacks code complexity analysis, anti-pattern detection, or architectural review</a:t>
-            </a:r>
-          </a:p>
-          <a:p>
-            <a:pPr algn="l">
-              <a:spcBef>
-                <a:spcPts val="250"/>
-              </a:spcBef>
-            </a:pPr>
-            <a:r>
-              <a:rPr sz="840">
-                <a:solidFill>
-                  <a:srgbClr val="475569"/>
-                </a:solidFill>
-                <a:latin typeface="Inter"/>
-              </a:rPr>
-              <a:t>• Rigid problem descriptions without personalized adaptivity or learning paths</a:t>
             </a:r>
           </a:p>
         </p:txBody>
@@ -4446,8 +4469,8 @@
         </p:nvSpPr>
         <p:spPr>
           <a:xfrm>
-            <a:off x="4754880" y="2258568"/>
-            <a:ext cx="3995928" cy="1234440"/>
+            <a:off x="4754880" y="2231136"/>
+            <a:ext cx="3995928" cy="1261872"/>
           </a:xfrm>
           <a:prstGeom prst="rect">
             <a:avLst/>
@@ -4491,8 +4514,8 @@
         </p:nvSpPr>
         <p:spPr>
           <a:xfrm>
-            <a:off x="4809744" y="2295144"/>
-            <a:ext cx="3886200" cy="1161288"/>
+            <a:off x="4809744" y="2267712"/>
+            <a:ext cx="3886200" cy="1188720"/>
           </a:xfrm>
           <a:prstGeom prst="rect">
             <a:avLst/>
@@ -4506,7 +4529,7 @@
           <a:lstStyle/>
           <a:p>
             <a:r>
-              <a:rPr sz="1050" b="1">
+              <a:rPr sz="980" b="1">
                 <a:solidFill>
                   <a:srgbClr val="1E2761"/>
                 </a:solidFill>
@@ -4517,12 +4540,15 @@
           </a:p>
           <a:p>
             <a:pPr algn="l">
-              <a:spcBef>
-                <a:spcPts val="250"/>
-              </a:spcBef>
-            </a:pPr>
-            <a:r>
-              <a:rPr sz="840">
+              <a:lnSpc>
+                <a:spcPts val="1000"/>
+              </a:lnSpc>
+              <a:spcBef>
+                <a:spcPts val="350"/>
+              </a:spcBef>
+            </a:pPr>
+            <a:r>
+              <a:rPr sz="780">
                 <a:solidFill>
                   <a:srgbClr val="475569"/>
                 </a:solidFill>
@@ -4533,12 +4559,15 @@
           </a:p>
           <a:p>
             <a:pPr algn="l">
-              <a:spcBef>
-                <a:spcPts val="250"/>
-              </a:spcBef>
-            </a:pPr>
-            <a:r>
-              <a:rPr sz="840">
+              <a:lnSpc>
+                <a:spcPts val="1000"/>
+              </a:lnSpc>
+              <a:spcBef>
+                <a:spcPts val="350"/>
+              </a:spcBef>
+            </a:pPr>
+            <a:r>
+              <a:rPr sz="780">
                 <a:solidFill>
                   <a:srgbClr val="475569"/>
                 </a:solidFill>
@@ -4549,12 +4578,15 @@
           </a:p>
           <a:p>
             <a:pPr algn="l">
-              <a:spcBef>
-                <a:spcPts val="250"/>
-              </a:spcBef>
-            </a:pPr>
-            <a:r>
-              <a:rPr sz="840">
+              <a:lnSpc>
+                <a:spcPts val="1000"/>
+              </a:lnSpc>
+              <a:spcBef>
+                <a:spcPts val="350"/>
+              </a:spcBef>
+            </a:pPr>
+            <a:r>
+              <a:rPr sz="780">
                 <a:solidFill>
                   <a:srgbClr val="475569"/>
                 </a:solidFill>
@@ -4565,12 +4597,15 @@
           </a:p>
           <a:p>
             <a:pPr algn="l">
-              <a:spcBef>
-                <a:spcPts val="250"/>
-              </a:spcBef>
-            </a:pPr>
-            <a:r>
-              <a:rPr sz="840">
+              <a:lnSpc>
+                <a:spcPts val="1000"/>
+              </a:lnSpc>
+              <a:spcBef>
+                <a:spcPts val="350"/>
+              </a:spcBef>
+            </a:pPr>
+            <a:r>
+              <a:rPr sz="780">
                 <a:solidFill>
                   <a:srgbClr val="475569"/>
                 </a:solidFill>
@@ -4581,34 +4616,21 @@
           </a:p>
           <a:p>
             <a:pPr algn="l">
-              <a:spcBef>
-                <a:spcPts val="250"/>
-              </a:spcBef>
-            </a:pPr>
-            <a:r>
-              <a:rPr sz="840">
+              <a:lnSpc>
+                <a:spcPts val="1000"/>
+              </a:lnSpc>
+              <a:spcBef>
+                <a:spcPts val="350"/>
+              </a:spcBef>
+            </a:pPr>
+            <a:r>
+              <a:rPr sz="780">
                 <a:solidFill>
                   <a:srgbClr val="475569"/>
                 </a:solidFill>
                 <a:latin typeface="Inter"/>
               </a:rPr>
               <a:t>• Cannot conduct structured multi-turn technical interviews or system design sessions</a:t>
-            </a:r>
-          </a:p>
-          <a:p>
-            <a:pPr algn="l">
-              <a:spcBef>
-                <a:spcPts val="250"/>
-              </a:spcBef>
-            </a:pPr>
-            <a:r>
-              <a:rPr sz="840">
-                <a:solidFill>
-                  <a:srgbClr val="475569"/>
-                </a:solidFill>
-                <a:latin typeface="Inter"/>
-              </a:rPr>
-              <a:t>• Lacks company-specific problem archives, tagging, or candidate readiness scoring</a:t>
             </a:r>
           </a:p>
         </p:txBody>
@@ -4622,7 +4644,7 @@
         <p:spPr>
           <a:xfrm>
             <a:off x="4754880" y="3529584"/>
-            <a:ext cx="3995928" cy="1234440"/>
+            <a:ext cx="3995928" cy="1261872"/>
           </a:xfrm>
           <a:prstGeom prst="rect">
             <a:avLst/>
@@ -4667,7 +4689,7 @@
         <p:spPr>
           <a:xfrm>
             <a:off x="4809744" y="3566160"/>
-            <a:ext cx="3886200" cy="1161288"/>
+            <a:ext cx="3886200" cy="1188720"/>
           </a:xfrm>
           <a:prstGeom prst="rect">
             <a:avLst/>
@@ -4681,7 +4703,7 @@
           <a:lstStyle/>
           <a:p>
             <a:r>
-              <a:rPr sz="1050" b="1">
+              <a:rPr sz="980" b="1">
                 <a:solidFill>
                   <a:srgbClr val="1E2761"/>
                 </a:solidFill>
@@ -4692,12 +4714,15 @@
           </a:p>
           <a:p>
             <a:pPr algn="l">
-              <a:spcBef>
-                <a:spcPts val="250"/>
-              </a:spcBef>
-            </a:pPr>
-            <a:r>
-              <a:rPr sz="840">
+              <a:lnSpc>
+                <a:spcPts val="1000"/>
+              </a:lnSpc>
+              <a:spcBef>
+                <a:spcPts val="350"/>
+              </a:spcBef>
+            </a:pPr>
+            <a:r>
+              <a:rPr sz="780">
                 <a:solidFill>
                   <a:srgbClr val="475569"/>
                 </a:solidFill>
@@ -4708,12 +4733,15 @@
           </a:p>
           <a:p>
             <a:pPr algn="l">
-              <a:spcBef>
-                <a:spcPts val="250"/>
-              </a:spcBef>
-            </a:pPr>
-            <a:r>
-              <a:rPr sz="840">
+              <a:lnSpc>
+                <a:spcPts val="1000"/>
+              </a:lnSpc>
+              <a:spcBef>
+                <a:spcPts val="350"/>
+              </a:spcBef>
+            </a:pPr>
+            <a:r>
+              <a:rPr sz="780">
                 <a:solidFill>
                   <a:srgbClr val="475569"/>
                 </a:solidFill>
@@ -4724,12 +4752,15 @@
           </a:p>
           <a:p>
             <a:pPr algn="l">
-              <a:spcBef>
-                <a:spcPts val="250"/>
-              </a:spcBef>
-            </a:pPr>
-            <a:r>
-              <a:rPr sz="840">
+              <a:lnSpc>
+                <a:spcPts val="1000"/>
+              </a:lnSpc>
+              <a:spcBef>
+                <a:spcPts val="350"/>
+              </a:spcBef>
+            </a:pPr>
+            <a:r>
+              <a:rPr sz="780">
                 <a:solidFill>
                   <a:srgbClr val="475569"/>
                 </a:solidFill>
@@ -4740,12 +4771,15 @@
           </a:p>
           <a:p>
             <a:pPr algn="l">
-              <a:spcBef>
-                <a:spcPts val="250"/>
-              </a:spcBef>
-            </a:pPr>
-            <a:r>
-              <a:rPr sz="840">
+              <a:lnSpc>
+                <a:spcPts val="1000"/>
+              </a:lnSpc>
+              <a:spcBef>
+                <a:spcPts val="350"/>
+              </a:spcBef>
+            </a:pPr>
+            <a:r>
+              <a:rPr sz="780">
                 <a:solidFill>
                   <a:srgbClr val="475569"/>
                 </a:solidFill>
@@ -4756,34 +4790,21 @@
           </a:p>
           <a:p>
             <a:pPr algn="l">
-              <a:spcBef>
-                <a:spcPts val="250"/>
-              </a:spcBef>
-            </a:pPr>
-            <a:r>
-              <a:rPr sz="840">
+              <a:lnSpc>
+                <a:spcPts val="1000"/>
+              </a:lnSpc>
+              <a:spcBef>
+                <a:spcPts val="350"/>
+              </a:spcBef>
+            </a:pPr>
+            <a:r>
+              <a:rPr sz="780">
                 <a:solidFill>
                   <a:srgbClr val="475569"/>
                 </a:solidFill>
                 <a:latin typeface="Inter"/>
               </a:rPr>
               <a:t>• Lacks gamified competitive coding rankings or standardized ELO rating systems</a:t>
-            </a:r>
-          </a:p>
-          <a:p>
-            <a:pPr algn="l">
-              <a:spcBef>
-                <a:spcPts val="250"/>
-              </a:spcBef>
-            </a:pPr>
-            <a:r>
-              <a:rPr sz="840">
-                <a:solidFill>
-                  <a:srgbClr val="475569"/>
-                </a:solidFill>
-                <a:latin typeface="Inter"/>
-              </a:rPr>
-              <a:t>• Non-standardized curriculum that quickly becomes outdated as tech stacks evolve</a:t>
             </a:r>
           </a:p>
         </p:txBody>
@@ -4855,13 +4876,13 @@
           <a:p>
             <a:pPr algn="ctr"/>
             <a:r>
-              <a:rPr sz="1050" b="1">
+              <a:rPr sz="1000" b="1">
                 <a:solidFill>
                   <a:srgbClr val="F2A93B"/>
                 </a:solidFill>
                 <a:latin typeface="Spectral Medium"/>
               </a:rPr>
-              <a:t>💡 CodeForge AI is the ONLY platform unifying DSA practice + AI coaching + ELO contests + mock interviews — 100% FREE.</a:t>
+              <a:t>💡 CodeForge AI is the ONLY platform unifying 400+ DSA problems + AI coaching + ELO contests + mock interviews — 100% FREE.</a:t>
             </a:r>
           </a:p>
         </p:txBody>
@@ -4938,7 +4959,7 @@
         </p:nvSpPr>
         <p:spPr>
           <a:xfrm>
-            <a:off x="384048" y="73152"/>
+            <a:off x="384048" y="54864"/>
             <a:ext cx="8385048" cy="384048"/>
           </a:xfrm>
           <a:prstGeom prst="rect">
@@ -4972,7 +4993,7 @@
         </p:nvSpPr>
         <p:spPr>
           <a:xfrm>
-            <a:off x="384048" y="438912"/>
+            <a:off x="384048" y="420624"/>
             <a:ext cx="8385048" cy="20116"/>
           </a:xfrm>
           <a:prstGeom prst="rect">
@@ -5015,7 +5036,7 @@
         </p:nvSpPr>
         <p:spPr>
           <a:xfrm>
-            <a:off x="384048" y="475488"/>
+            <a:off x="384048" y="457200"/>
             <a:ext cx="8385048" cy="877824"/>
           </a:xfrm>
           <a:prstGeom prst="rect">
@@ -5058,7 +5079,7 @@
         </p:nvSpPr>
         <p:spPr>
           <a:xfrm>
-            <a:off x="475488" y="512064"/>
+            <a:off x="475488" y="493776"/>
             <a:ext cx="8202168" cy="804672"/>
           </a:xfrm>
           <a:prstGeom prst="rect">
@@ -5073,29 +5094,68 @@
           <a:lstStyle/>
           <a:p>
             <a:r>
-              <a:rPr sz="1350" b="1">
+              <a:rPr sz="1400" b="1">
+                <a:solidFill>
+                  <a:srgbClr val="FFFFFF"/>
+                </a:solidFill>
+                <a:latin typeface="Cambria"/>
+              </a:rPr>
+              <a:t>CodeForge AI — Powered by </a:t>
+            </a:r>
+            <a:r>
+              <a:rPr sz="1500" b="1">
                 <a:solidFill>
                   <a:srgbClr val="F2A93B"/>
                 </a:solidFill>
+                <a:latin typeface="Lexend"/>
+              </a:rPr>
+              <a:t>400+ DSA PROBLEMS </a:t>
+            </a:r>
+            <a:r>
+              <a:rPr sz="1400" b="1">
+                <a:solidFill>
+                  <a:srgbClr val="FFFFFF"/>
+                </a:solidFill>
                 <a:latin typeface="Cambria"/>
               </a:rPr>
-              <a:t>CodeForge AI — The All-In-One Ecosystem for Developers</a:t>
-            </a:r>
-          </a:p>
-          <a:p>
-            <a:pPr algn="l">
-              <a:spcBef>
-                <a:spcPts val="300"/>
-              </a:spcBef>
-            </a:pPr>
+              <a:t>&amp; Advanced AI Engine</a:t>
+            </a:r>
+          </a:p>
+          <a:p>
+            <a:pPr algn="l">
+              <a:lnSpc>
+                <a:spcPts val="1350"/>
+              </a:lnSpc>
+              <a:spcBef>
+                <a:spcPts val="400"/>
+              </a:spcBef>
+            </a:pPr>
+            <a:r>
+              <a:rPr sz="1100" b="1">
+                <a:solidFill>
+                  <a:srgbClr val="93C5FD"/>
+                </a:solidFill>
+                <a:latin typeface="Cambria"/>
+              </a:rPr>
+              <a:t>Transforming Passive Practice into Active Skill Mastery. </a:t>
+            </a:r>
+            <a:r>
+              <a:rPr sz="1019">
+                <a:solidFill>
+                  <a:srgbClr val="CBD5E1"/>
+                </a:solidFill>
+                <a:latin typeface="Calibri"/>
+              </a:rPr>
+              <a:t>CodeForge AI bridges the gap between problem-solving and industry readiness with a seeded library of </a:t>
+            </a:r>
             <a:r>
               <a:rPr sz="1050" b="1">
                 <a:solidFill>
-                  <a:srgbClr val="93C5FD"/>
-                </a:solidFill>
-                <a:latin typeface="Cambria"/>
-              </a:rPr>
-              <a:t>Transforming Passive Practice into Active Skill Mastery. </a:t>
+                  <a:srgbClr val="F2A93B"/>
+                </a:solidFill>
+                <a:latin typeface="Lexend"/>
+              </a:rPr>
+              <a:t>400+ LeetCode DSA Problems</a:t>
             </a:r>
             <a:r>
               <a:rPr sz="1019">
@@ -5104,7 +5164,7 @@
                 </a:solidFill>
                 <a:latin typeface="Calibri"/>
               </a:rPr>
-              <a:t>CodeForge AI bridges the gap between problem-solving and industry readiness. It runs production-grade code execution via Piston API, delivers 3-tier Socratic AI tutoring, evaluates full system design architectures, conducts realistic mock interviews with hiring verdicts, and gamifies growth via ELO-rated competitive contests.</a:t>
+              <a:t>. It runs production code execution via Piston API, 3-tier Socratic AI tutoring, system design evaluation, mock interviews, and ELO contests.</a:t>
             </a:r>
           </a:p>
         </p:txBody>
@@ -5117,8 +5177,8 @@
         </p:nvSpPr>
         <p:spPr>
           <a:xfrm>
-            <a:off x="384048" y="1389888"/>
-            <a:ext cx="4160520" cy="3675887"/>
+            <a:off x="384048" y="1371600"/>
+            <a:ext cx="4160520" cy="3694176"/>
           </a:xfrm>
           <a:prstGeom prst="rect">
             <a:avLst/>
@@ -5160,8 +5220,8 @@
         </p:nvSpPr>
         <p:spPr>
           <a:xfrm>
-            <a:off x="475488" y="1426464"/>
-            <a:ext cx="3977639" cy="3602736"/>
+            <a:off x="475488" y="1408176"/>
+            <a:ext cx="3977639" cy="3621024"/>
           </a:xfrm>
           <a:prstGeom prst="rect">
             <a:avLst/>
@@ -5175,7 +5235,7 @@
           <a:lstStyle/>
           <a:p>
             <a:r>
-              <a:rPr sz="1350" b="1">
+              <a:rPr sz="1400" b="1">
                 <a:solidFill>
                   <a:srgbClr val="F2A93B"/>
                 </a:solidFill>
@@ -5186,8 +5246,11 @@
           </a:p>
           <a:p>
             <a:pPr algn="l">
-              <a:spcBef>
-                <a:spcPts val="500"/>
+              <a:lnSpc>
+                <a:spcPts val="1200"/>
+              </a:lnSpc>
+              <a:spcBef>
+                <a:spcPts val="750"/>
               </a:spcBef>
             </a:pPr>
             <a:r>
@@ -5200,19 +5263,49 @@
               <a:t>[01] </a:t>
             </a:r>
             <a:r>
-              <a:rPr sz="900">
+              <a:rPr sz="900" b="1">
+                <a:solidFill>
+                  <a:srgbClr val="FFFFFF"/>
+                </a:solidFill>
+                <a:latin typeface="Roboto SemiBold"/>
+              </a:rPr>
+              <a:t>Problem Selection: </a:t>
+            </a:r>
+            <a:r>
+              <a:rPr sz="880">
                 <a:solidFill>
                   <a:srgbClr val="CBD5E1"/>
                 </a:solidFill>
                 <a:latin typeface="Roboto"/>
               </a:rPr>
-              <a:t>Problem Selection: Choose from 52+ curated DSA problems categorized by topic, company tag (Google, Meta, Amazon) and 6 difficulty levels.</a:t>
-            </a:r>
-          </a:p>
-          <a:p>
-            <a:pPr algn="l">
-              <a:spcBef>
-                <a:spcPts val="500"/>
+              <a:t>Choose from </a:t>
+            </a:r>
+            <a:r>
+              <a:rPr sz="900" b="1">
+                <a:solidFill>
+                  <a:srgbClr val="F2A93B"/>
+                </a:solidFill>
+                <a:latin typeface="Lexend"/>
+              </a:rPr>
+              <a:t>400+ LeetCode DSA problems</a:t>
+            </a:r>
+            <a:r>
+              <a:rPr sz="880">
+                <a:solidFill>
+                  <a:srgbClr val="CBD5E1"/>
+                </a:solidFill>
+                <a:latin typeface="Roboto"/>
+              </a:rPr>
+              <a:t> categorized by topic, company tag (Google, Meta, Amazon) and 6 difficulty levels.</a:t>
+            </a:r>
+          </a:p>
+          <a:p>
+            <a:pPr algn="l">
+              <a:lnSpc>
+                <a:spcPts val="1200"/>
+              </a:lnSpc>
+              <a:spcBef>
+                <a:spcPts val="750"/>
               </a:spcBef>
             </a:pPr>
             <a:r>
@@ -5225,19 +5318,49 @@
               <a:t>[02] </a:t>
             </a:r>
             <a:r>
-              <a:rPr sz="900">
+              <a:rPr sz="900" b="1">
+                <a:solidFill>
+                  <a:srgbClr val="FFFFFF"/>
+                </a:solidFill>
+                <a:latin typeface="Roboto SemiBold"/>
+              </a:rPr>
+              <a:t>Monaco Code Editor: </a:t>
+            </a:r>
+            <a:r>
+              <a:rPr sz="880">
                 <a:solidFill>
                   <a:srgbClr val="CBD5E1"/>
                 </a:solidFill>
                 <a:latin typeface="Roboto"/>
               </a:rPr>
-              <a:t>Monaco Code Editor: Write solutions in a VS Code-grade editor supporting Python, C++, Java, JS, Go, Rust, and PHP with syntax checks.</a:t>
-            </a:r>
-          </a:p>
-          <a:p>
-            <a:pPr algn="l">
-              <a:spcBef>
-                <a:spcPts val="500"/>
+              <a:t>Write solutions in a VS Code-grade editor supporting </a:t>
+            </a:r>
+            <a:r>
+              <a:rPr sz="900" b="1">
+                <a:solidFill>
+                  <a:srgbClr val="F2A93B"/>
+                </a:solidFill>
+                <a:latin typeface="Lexend"/>
+              </a:rPr>
+              <a:t>7 Programming Languages</a:t>
+            </a:r>
+            <a:r>
+              <a:rPr sz="880">
+                <a:solidFill>
+                  <a:srgbClr val="CBD5E1"/>
+                </a:solidFill>
+                <a:latin typeface="Roboto"/>
+              </a:rPr>
+              <a:t> (Python, C++, Java, JS, Go, Rust, PHP).</a:t>
+            </a:r>
+          </a:p>
+          <a:p>
+            <a:pPr algn="l">
+              <a:lnSpc>
+                <a:spcPts val="1200"/>
+              </a:lnSpc>
+              <a:spcBef>
+                <a:spcPts val="750"/>
               </a:spcBef>
             </a:pPr>
             <a:r>
@@ -5250,19 +5373,31 @@
               <a:t>[03] </a:t>
             </a:r>
             <a:r>
-              <a:rPr sz="900">
+              <a:rPr sz="900" b="1">
+                <a:solidFill>
+                  <a:srgbClr val="FFFFFF"/>
+                </a:solidFill>
+                <a:latin typeface="Roboto SemiBold"/>
+              </a:rPr>
+              <a:t>Piston API Execution: </a:t>
+            </a:r>
+            <a:r>
+              <a:rPr sz="880">
                 <a:solidFill>
                   <a:srgbClr val="CBD5E1"/>
                 </a:solidFill>
                 <a:latin typeface="Roboto"/>
               </a:rPr>
-              <a:t>Piston API Execution: Code is compiled &amp; run instantly in isolated Docker containers with real-time test case verdicts and execution times.</a:t>
-            </a:r>
-          </a:p>
-          <a:p>
-            <a:pPr algn="l">
-              <a:spcBef>
-                <a:spcPts val="500"/>
+              <a:t>Code is compiled &amp; run instantly in isolated Docker containers with real-time test case verdicts and execution times.</a:t>
+            </a:r>
+          </a:p>
+          <a:p>
+            <a:pPr algn="l">
+              <a:lnSpc>
+                <a:spcPts val="1200"/>
+              </a:lnSpc>
+              <a:spcBef>
+                <a:spcPts val="750"/>
               </a:spcBef>
             </a:pPr>
             <a:r>
@@ -5275,19 +5410,31 @@
               <a:t>[04] </a:t>
             </a:r>
             <a:r>
-              <a:rPr sz="900">
+              <a:rPr sz="900" b="1">
+                <a:solidFill>
+                  <a:srgbClr val="FFFFFF"/>
+                </a:solidFill>
+                <a:latin typeface="Roboto SemiBold"/>
+              </a:rPr>
+              <a:t>AI Code Audit: </a:t>
+            </a:r>
+            <a:r>
+              <a:rPr sz="880">
                 <a:solidFill>
                   <a:srgbClr val="CBD5E1"/>
                 </a:solidFill>
                 <a:latin typeface="Roboto"/>
               </a:rPr>
-              <a:t>AI Code Audit: gpt-5.6-sol analyzes your code for O(N) time/space complexity, memory footprint, edge-case flaws, and anti-patterns.</a:t>
-            </a:r>
-          </a:p>
-          <a:p>
-            <a:pPr algn="l">
-              <a:spcBef>
-                <a:spcPts val="500"/>
+              <a:t>gpt-5.6-sol analyzes your code for O(N) time/space complexity, memory footprint, edge-case flaws, and anti-patterns.</a:t>
+            </a:r>
+          </a:p>
+          <a:p>
+            <a:pPr algn="l">
+              <a:lnSpc>
+                <a:spcPts val="1200"/>
+              </a:lnSpc>
+              <a:spcBef>
+                <a:spcPts val="750"/>
               </a:spcBef>
             </a:pPr>
             <a:r>
@@ -5300,19 +5447,31 @@
               <a:t>[05] </a:t>
             </a:r>
             <a:r>
-              <a:rPr sz="900">
+              <a:rPr sz="900" b="1">
+                <a:solidFill>
+                  <a:srgbClr val="FFFFFF"/>
+                </a:solidFill>
+                <a:latin typeface="Roboto SemiBold"/>
+              </a:rPr>
+              <a:t>3-Tier Socratic Hints: </a:t>
+            </a:r>
+            <a:r>
+              <a:rPr sz="880">
                 <a:solidFill>
                   <a:srgbClr val="CBD5E1"/>
                 </a:solidFill>
                 <a:latin typeface="Roboto"/>
               </a:rPr>
-              <a:t>3-Tier Socratic Hints: Get progressive nudges (1: Conceptual Approach, 2: Algorithmic Logic, 3: Pseudo-code) without spoiling solutions.</a:t>
-            </a:r>
-          </a:p>
-          <a:p>
-            <a:pPr algn="l">
-              <a:spcBef>
-                <a:spcPts val="500"/>
+              <a:t>Get progressive nudges (1: Conceptual Approach, 2: Algorithmic Logic, 3: Pseudo-code) without spoiling solutions.</a:t>
+            </a:r>
+          </a:p>
+          <a:p>
+            <a:pPr algn="l">
+              <a:lnSpc>
+                <a:spcPts val="1200"/>
+              </a:lnSpc>
+              <a:spcBef>
+                <a:spcPts val="750"/>
               </a:spcBef>
             </a:pPr>
             <a:r>
@@ -5325,19 +5484,31 @@
               <a:t>[06] </a:t>
             </a:r>
             <a:r>
-              <a:rPr sz="900">
+              <a:rPr sz="900" b="1">
+                <a:solidFill>
+                  <a:srgbClr val="FFFFFF"/>
+                </a:solidFill>
+                <a:latin typeface="Roboto SemiBold"/>
+              </a:rPr>
+              <a:t>AI Mock Interviews: </a:t>
+            </a:r>
+            <a:r>
+              <a:rPr sz="880">
                 <a:solidFill>
                   <a:srgbClr val="CBD5E1"/>
                 </a:solidFill>
                 <a:latin typeface="Roboto"/>
               </a:rPr>
-              <a:t>AI Mock Interviews: Participate in multi-turn voice/text technical interviews with structured Hire / Strong Hire / No Hire evaluation rubrics.</a:t>
-            </a:r>
-          </a:p>
-          <a:p>
-            <a:pPr algn="l">
-              <a:spcBef>
-                <a:spcPts val="500"/>
+              <a:t>Participate in multi-turn voice/text technical interviews with structured Hire / Strong Hire / No Hire evaluation rubrics.</a:t>
+            </a:r>
+          </a:p>
+          <a:p>
+            <a:pPr algn="l">
+              <a:lnSpc>
+                <a:spcPts val="1200"/>
+              </a:lnSpc>
+              <a:spcBef>
+                <a:spcPts val="750"/>
               </a:spcBef>
             </a:pPr>
             <a:r>
@@ -5350,19 +5521,31 @@
               <a:t>[07] </a:t>
             </a:r>
             <a:r>
-              <a:rPr sz="900">
+              <a:rPr sz="900" b="1">
+                <a:solidFill>
+                  <a:srgbClr val="FFFFFF"/>
+                </a:solidFill>
+                <a:latin typeface="Roboto SemiBold"/>
+              </a:rPr>
+              <a:t>System Design Evaluator: </a:t>
+            </a:r>
+            <a:r>
+              <a:rPr sz="880">
                 <a:solidFill>
                   <a:srgbClr val="CBD5E1"/>
                 </a:solidFill>
                 <a:latin typeface="Roboto"/>
               </a:rPr>
-              <a:t>System Design Evaluator: Draft cloud system architectures and receive instant AI analysis on scalability bottlenecks and trade-offs.</a:t>
-            </a:r>
-          </a:p>
-          <a:p>
-            <a:pPr algn="l">
-              <a:spcBef>
-                <a:spcPts val="500"/>
+              <a:t>Draft cloud system architectures and receive instant AI analysis on scalability bottlenecks and trade-offs.</a:t>
+            </a:r>
+          </a:p>
+          <a:p>
+            <a:pPr algn="l">
+              <a:lnSpc>
+                <a:spcPts val="1200"/>
+              </a:lnSpc>
+              <a:spcBef>
+                <a:spcPts val="750"/>
               </a:spcBef>
             </a:pPr>
             <a:r>
@@ -5375,13 +5558,22 @@
               <a:t>[08] </a:t>
             </a:r>
             <a:r>
-              <a:rPr sz="900">
+              <a:rPr sz="900" b="1">
+                <a:solidFill>
+                  <a:srgbClr val="FFFFFF"/>
+                </a:solidFill>
+                <a:latin typeface="Roboto SemiBold"/>
+              </a:rPr>
+              <a:t>ELO Rated Contests: </a:t>
+            </a:r>
+            <a:r>
+              <a:rPr sz="880">
                 <a:solidFill>
                   <a:srgbClr val="CBD5E1"/>
                 </a:solidFill>
                 <a:latin typeface="Roboto"/>
               </a:rPr>
-              <a:t>ELO Rated Contests: Join live timed coding battles, climb Codeforces-style global leaderboards (800–3500 rating), and track progress.</a:t>
+              <a:t>Join live timed coding battles, climb Codeforces-style global leaderboards (800–3500 rating), and track progress.</a:t>
             </a:r>
           </a:p>
         </p:txBody>
@@ -5394,8 +5586,8 @@
         </p:nvSpPr>
         <p:spPr>
           <a:xfrm>
-            <a:off x="4727448" y="1389888"/>
-            <a:ext cx="4032504" cy="3675887"/>
+            <a:off x="4727448" y="1371600"/>
+            <a:ext cx="4032504" cy="3694176"/>
           </a:xfrm>
           <a:prstGeom prst="rect">
             <a:avLst/>
@@ -5437,8 +5629,8 @@
         </p:nvSpPr>
         <p:spPr>
           <a:xfrm>
-            <a:off x="4800600" y="1426464"/>
-            <a:ext cx="3886200" cy="3602736"/>
+            <a:off x="4800600" y="1408176"/>
+            <a:ext cx="3886200" cy="3621024"/>
           </a:xfrm>
           <a:prstGeom prst="rect">
             <a:avLst/>
@@ -5452,7 +5644,7 @@
           <a:lstStyle/>
           <a:p>
             <a:r>
-              <a:rPr sz="1350" b="1">
+              <a:rPr sz="1400" b="1">
                 <a:solidFill>
                   <a:srgbClr val="1E2761"/>
                 </a:solidFill>
@@ -5463,8 +5655,11 @@
           </a:p>
           <a:p>
             <a:pPr algn="l">
-              <a:spcBef>
-                <a:spcPts val="500"/>
+              <a:lnSpc>
+                <a:spcPts val="1200"/>
+              </a:lnSpc>
+              <a:spcBef>
+                <a:spcPts val="750"/>
               </a:spcBef>
             </a:pPr>
             <a:r>
@@ -5479,26 +5674,66 @@
             <a:r>
               <a:rPr sz="950" b="1">
                 <a:solidFill>
+                  <a:srgbClr val="FF0000"/>
+                </a:solidFill>
+                <a:latin typeface="Lexend"/>
+              </a:rPr>
+              <a:t>400+ Curated DSA Problems: </a:t>
+            </a:r>
+            <a:r>
+              <a:rPr sz="880">
+                <a:solidFill>
+                  <a:srgbClr val="475569"/>
+                </a:solidFill>
+                <a:latin typeface="Roboto"/>
+              </a:rPr>
+              <a:t>Full LeetCode problem bank covering Arrays, Trees, DP, Graphs, Backtracking, Tries &amp; Greedy algorithms with test suites.</a:t>
+            </a:r>
+          </a:p>
+          <a:p>
+            <a:pPr algn="l">
+              <a:lnSpc>
+                <a:spcPts val="1200"/>
+              </a:lnSpc>
+              <a:spcBef>
+                <a:spcPts val="750"/>
+              </a:spcBef>
+            </a:pPr>
+            <a:r>
+              <a:rPr sz="919" b="1">
+                <a:solidFill>
+                  <a:srgbClr val="1E2761"/>
+                </a:solidFill>
+                <a:latin typeface="Roboto"/>
+              </a:rPr>
+              <a:t>► </a:t>
+            </a:r>
+            <a:r>
+              <a:rPr sz="919" b="1">
+                <a:solidFill>
                   <a:srgbClr val="111827"/>
                 </a:solidFill>
                 <a:latin typeface="Roboto SemiBold"/>
               </a:rPr>
-              <a:t>52+ Curated DSA Problems: </a:t>
-            </a:r>
-            <a:r>
-              <a:rPr sz="900">
-                <a:solidFill>
-                  <a:srgbClr val="475569"/>
-                </a:solidFill>
-                <a:latin typeface="Roboto"/>
-              </a:rPr>
-              <a:t>Covering Arrays, Trees, Dynamic Programming, Graphs, Backtracking, Tries &amp; Greedy algorithms with full test suites.</a:t>
-            </a:r>
-          </a:p>
-          <a:p>
-            <a:pPr algn="l">
-              <a:spcBef>
-                <a:spcPts val="500"/>
+              <a:t>7 Programming Languages: </a:t>
+            </a:r>
+            <a:r>
+              <a:rPr sz="880">
+                <a:solidFill>
+                  <a:srgbClr val="475569"/>
+                </a:solidFill>
+                <a:latin typeface="Roboto"/>
+              </a:rPr>
+              <a:t>Full compilation &amp; execution for Python, C++, Java, JavaScript, Go, Rust &amp; PHP via high-speed Piston API backend.</a:t>
+            </a:r>
+          </a:p>
+          <a:p>
+            <a:pPr algn="l">
+              <a:lnSpc>
+                <a:spcPts val="1200"/>
+              </a:lnSpc>
+              <a:spcBef>
+                <a:spcPts val="750"/>
               </a:spcBef>
             </a:pPr>
             <a:r>
@@ -5511,28 +5746,31 @@
               <a:t>► </a:t>
             </a:r>
             <a:r>
-              <a:rPr sz="950" b="1">
+              <a:rPr sz="919" b="1">
                 <a:solidFill>
                   <a:srgbClr val="111827"/>
                 </a:solidFill>
                 <a:latin typeface="Roboto SemiBold"/>
               </a:rPr>
-              <a:t>7 Programming Languages: </a:t>
-            </a:r>
-            <a:r>
-              <a:rPr sz="900">
-                <a:solidFill>
-                  <a:srgbClr val="475569"/>
-                </a:solidFill>
-                <a:latin typeface="Roboto"/>
-              </a:rPr>
-              <a:t>Full compilation &amp; execution for Python, C++, Java, JavaScript, Go, Rust &amp; PHP via high-speed Piston API backend.</a:t>
-            </a:r>
-          </a:p>
-          <a:p>
-            <a:pPr algn="l">
-              <a:spcBef>
-                <a:spcPts val="500"/>
+              <a:t>3-Tier Socratic AI Tutor: </a:t>
+            </a:r>
+            <a:r>
+              <a:rPr sz="880">
+                <a:solidFill>
+                  <a:srgbClr val="475569"/>
+                </a:solidFill>
+                <a:latin typeface="Roboto"/>
+              </a:rPr>
+              <a:t>Context-aware guidance powered by gpt-5.4-mini that prompts critical thinking instead of dumping answers.</a:t>
+            </a:r>
+          </a:p>
+          <a:p>
+            <a:pPr algn="l">
+              <a:lnSpc>
+                <a:spcPts val="1200"/>
+              </a:lnSpc>
+              <a:spcBef>
+                <a:spcPts val="750"/>
               </a:spcBef>
             </a:pPr>
             <a:r>
@@ -5545,28 +5783,31 @@
               <a:t>► </a:t>
             </a:r>
             <a:r>
-              <a:rPr sz="950" b="1">
+              <a:rPr sz="919" b="1">
                 <a:solidFill>
                   <a:srgbClr val="111827"/>
                 </a:solidFill>
                 <a:latin typeface="Roboto SemiBold"/>
               </a:rPr>
-              <a:t>3-Tier Socratic AI Tutor: </a:t>
-            </a:r>
-            <a:r>
-              <a:rPr sz="900">
-                <a:solidFill>
-                  <a:srgbClr val="475569"/>
-                </a:solidFill>
-                <a:latin typeface="Roboto"/>
-              </a:rPr>
-              <a:t>Context-aware guidance powered by gpt-5.4-mini that prompts critical thinking instead of dumping answers.</a:t>
-            </a:r>
-          </a:p>
-          <a:p>
-            <a:pPr algn="l">
-              <a:spcBef>
-                <a:spcPts val="500"/>
+              <a:t>8 Company Problem Banks: </a:t>
+            </a:r>
+            <a:r>
+              <a:rPr sz="880">
+                <a:solidFill>
+                  <a:srgbClr val="475569"/>
+                </a:solidFill>
+                <a:latin typeface="Roboto"/>
+              </a:rPr>
+              <a:t>Targeted interview questions directly from Google, Amazon, Meta, Microsoft, Apple, Netflix, Uber &amp; Flipkart archives.</a:t>
+            </a:r>
+          </a:p>
+          <a:p>
+            <a:pPr algn="l">
+              <a:lnSpc>
+                <a:spcPts val="1200"/>
+              </a:lnSpc>
+              <a:spcBef>
+                <a:spcPts val="750"/>
               </a:spcBef>
             </a:pPr>
             <a:r>
@@ -5579,28 +5820,31 @@
               <a:t>► </a:t>
             </a:r>
             <a:r>
-              <a:rPr sz="950" b="1">
+              <a:rPr sz="919" b="1">
                 <a:solidFill>
                   <a:srgbClr val="111827"/>
                 </a:solidFill>
                 <a:latin typeface="Roboto SemiBold"/>
               </a:rPr>
-              <a:t>8 Company Problem Banks: </a:t>
-            </a:r>
-            <a:r>
-              <a:rPr sz="900">
-                <a:solidFill>
-                  <a:srgbClr val="475569"/>
-                </a:solidFill>
-                <a:latin typeface="Roboto"/>
-              </a:rPr>
-              <a:t>Targeted interview questions directly from Google, Amazon, Meta, Microsoft, Apple, Netflix, Uber &amp; Flipkart archives.</a:t>
-            </a:r>
-          </a:p>
-          <a:p>
-            <a:pPr algn="l">
-              <a:spcBef>
-                <a:spcPts val="500"/>
+              <a:t>ELO Rating (800 – 3500): </a:t>
+            </a:r>
+            <a:r>
+              <a:rPr sz="880">
+                <a:solidFill>
+                  <a:srgbClr val="475569"/>
+                </a:solidFill>
+                <a:latin typeface="Roboto"/>
+              </a:rPr>
+              <a:t>Standardized competitive chess/Codeforces rating algorithm updating dynamically after every contest submission.</a:t>
+            </a:r>
+          </a:p>
+          <a:p>
+            <a:pPr algn="l">
+              <a:lnSpc>
+                <a:spcPts val="1200"/>
+              </a:lnSpc>
+              <a:spcBef>
+                <a:spcPts val="750"/>
               </a:spcBef>
             </a:pPr>
             <a:r>
@@ -5613,28 +5857,31 @@
               <a:t>► </a:t>
             </a:r>
             <a:r>
-              <a:rPr sz="950" b="1">
+              <a:rPr sz="919" b="1">
                 <a:solidFill>
                   <a:srgbClr val="111827"/>
                 </a:solidFill>
                 <a:latin typeface="Roboto SemiBold"/>
               </a:rPr>
-              <a:t>ELO Rating (800 – 3500): </a:t>
-            </a:r>
-            <a:r>
-              <a:rPr sz="900">
-                <a:solidFill>
-                  <a:srgbClr val="475569"/>
-                </a:solidFill>
-                <a:latin typeface="Roboto"/>
-              </a:rPr>
-              <a:t>Standardized competitive chess/Codeforces rating algorithm updating dynamically after every contest submission.</a:t>
-            </a:r>
-          </a:p>
-          <a:p>
-            <a:pPr algn="l">
-              <a:spcBef>
-                <a:spcPts val="500"/>
+              <a:t>AI Mock Interview Engine: </a:t>
+            </a:r>
+            <a:r>
+              <a:rPr sz="880">
+                <a:solidFill>
+                  <a:srgbClr val="475569"/>
+                </a:solidFill>
+                <a:latin typeface="Roboto"/>
+              </a:rPr>
+              <a:t>Simulates real interviewer behavior, evaluates communication clarity, code correctness &amp; structural approach.</a:t>
+            </a:r>
+          </a:p>
+          <a:p>
+            <a:pPr algn="l">
+              <a:lnSpc>
+                <a:spcPts val="1200"/>
+              </a:lnSpc>
+              <a:spcBef>
+                <a:spcPts val="750"/>
               </a:spcBef>
             </a:pPr>
             <a:r>
@@ -5647,28 +5894,31 @@
               <a:t>► </a:t>
             </a:r>
             <a:r>
-              <a:rPr sz="950" b="1">
+              <a:rPr sz="919" b="1">
                 <a:solidFill>
                   <a:srgbClr val="111827"/>
                 </a:solidFill>
                 <a:latin typeface="Roboto SemiBold"/>
               </a:rPr>
-              <a:t>AI Mock Interview Engine: </a:t>
-            </a:r>
-            <a:r>
-              <a:rPr sz="900">
-                <a:solidFill>
-                  <a:srgbClr val="475569"/>
-                </a:solidFill>
-                <a:latin typeface="Roboto"/>
-              </a:rPr>
-              <a:t>Simulates real interviewer behavior, evaluates communication clarity, code correctness &amp; structural approach.</a:t>
-            </a:r>
-          </a:p>
-          <a:p>
-            <a:pPr algn="l">
-              <a:spcBef>
-                <a:spcPts val="500"/>
+              <a:t>System Design Evaluation: </a:t>
+            </a:r>
+            <a:r>
+              <a:rPr sz="880">
+                <a:solidFill>
+                  <a:srgbClr val="475569"/>
+                </a:solidFill>
+                <a:latin typeface="Roboto"/>
+              </a:rPr>
+              <a:t>Automated rubric-based scoring for distributed system design, caching strategies, load balancing &amp; database sharding.</a:t>
+            </a:r>
+          </a:p>
+          <a:p>
+            <a:pPr algn="l">
+              <a:lnSpc>
+                <a:spcPts val="1200"/>
+              </a:lnSpc>
+              <a:spcBef>
+                <a:spcPts val="750"/>
               </a:spcBef>
             </a:pPr>
             <a:r>
@@ -5681,50 +5931,16 @@
               <a:t>► </a:t>
             </a:r>
             <a:r>
-              <a:rPr sz="950" b="1">
+              <a:rPr sz="919" b="1">
                 <a:solidFill>
                   <a:srgbClr val="111827"/>
                 </a:solidFill>
                 <a:latin typeface="Roboto SemiBold"/>
               </a:rPr>
-              <a:t>System Design Evaluation: </a:t>
-            </a:r>
-            <a:r>
-              <a:rPr sz="900">
-                <a:solidFill>
-                  <a:srgbClr val="475569"/>
-                </a:solidFill>
-                <a:latin typeface="Roboto"/>
-              </a:rPr>
-              <a:t>Automated rubric-based scoring for distributed system design, caching strategies, load balancing &amp; database sharding.</a:t>
-            </a:r>
-          </a:p>
-          <a:p>
-            <a:pPr algn="l">
-              <a:spcBef>
-                <a:spcPts val="500"/>
-              </a:spcBef>
-            </a:pPr>
-            <a:r>
-              <a:rPr sz="919" b="1">
-                <a:solidFill>
-                  <a:srgbClr val="1E2761"/>
-                </a:solidFill>
-                <a:latin typeface="Roboto"/>
-              </a:rPr>
-              <a:t>► </a:t>
-            </a:r>
-            <a:r>
-              <a:rPr sz="950" b="1">
-                <a:solidFill>
-                  <a:srgbClr val="111827"/>
-                </a:solidFill>
-                <a:latin typeface="Roboto SemiBold"/>
-              </a:rPr>
               <a:t>100% Free &amp; Open Source: </a:t>
             </a:r>
             <a:r>
-              <a:rPr sz="900">
+              <a:rPr sz="880">
                 <a:solidFill>
                   <a:srgbClr val="475569"/>
                 </a:solidFill>
@@ -5859,7 +6075,7 @@
           <a:noFill/>
         </p:spPr>
         <p:txBody>
-          <a:bodyPr wrap="square" lIns="54864" rIns="54864" tIns="27432" bIns="27432">
+          <a:bodyPr wrap="square" lIns="54864" rIns="54864" tIns="36576" bIns="36576">
             <a:spAutoFit/>
           </a:bodyPr>
           <a:lstStyle/>
@@ -5893,13 +6109,13 @@
           <a:noFill/>
         </p:spPr>
         <p:txBody>
-          <a:bodyPr wrap="square" lIns="54864" rIns="54864" tIns="27432" bIns="27432">
+          <a:bodyPr wrap="square" lIns="54864" rIns="54864" tIns="36576" bIns="36576">
             <a:spAutoFit/>
           </a:bodyPr>
           <a:lstStyle/>
           <a:p>
             <a:r>
-              <a:rPr sz="1000">
+              <a:rPr sz="1050">
                 <a:solidFill>
                   <a:srgbClr val="1E2761"/>
                 </a:solidFill>
@@ -5908,7 +6124,7 @@
               <a:t>System Architecture — </a:t>
             </a:r>
             <a:r>
-              <a:rPr sz="900">
+              <a:rPr sz="950">
                 <a:solidFill>
                   <a:srgbClr val="475569"/>
                 </a:solidFill>
@@ -5970,8 +6186,8 @@
         </p:nvSpPr>
         <p:spPr>
           <a:xfrm>
-            <a:off x="384048" y="640080"/>
-            <a:ext cx="8385048" cy="402336"/>
+            <a:off x="384048" y="621792"/>
+            <a:ext cx="8385048" cy="384048"/>
           </a:xfrm>
           <a:prstGeom prst="rect">
             <a:avLst/>
@@ -6013,8 +6229,8 @@
         </p:nvSpPr>
         <p:spPr>
           <a:xfrm>
-            <a:off x="457200" y="658368"/>
-            <a:ext cx="8229600" cy="365760"/>
+            <a:off x="457200" y="640080"/>
+            <a:ext cx="8229600" cy="347472"/>
           </a:xfrm>
           <a:prstGeom prst="rect">
             <a:avLst/>
@@ -6022,20 +6238,38 @@
           <a:noFill/>
         </p:spPr>
         <p:txBody>
-          <a:bodyPr wrap="square" lIns="54864" rIns="54864" tIns="27432" bIns="27432">
+          <a:bodyPr wrap="square" lIns="54864" rIns="54864" tIns="36576" bIns="36576">
             <a:spAutoFit/>
           </a:bodyPr>
           <a:lstStyle/>
           <a:p>
             <a:pPr algn="ctr"/>
             <a:r>
-              <a:rPr sz="819" b="1">
+              <a:rPr sz="850">
+                <a:solidFill>
+                  <a:srgbClr val="FFFFFF"/>
+                </a:solidFill>
+                <a:latin typeface="Inter"/>
+              </a:rPr>
+              <a:t>User Auth (JWT)  →  Problem Selection (</a:t>
+            </a:r>
+            <a:r>
+              <a:rPr sz="950" b="1">
                 <a:solidFill>
                   <a:srgbClr val="F2A93B"/>
                 </a:solidFill>
+                <a:latin typeface="Lexend"/>
+              </a:rPr>
+              <a:t>400+ DSA</a:t>
+            </a:r>
+            <a:r>
+              <a:rPr sz="850" b="1">
+                <a:solidFill>
+                  <a:srgbClr val="F2A93B"/>
+                </a:solidFill>
                 <a:latin typeface="Inter"/>
               </a:rPr>
-              <a:t>User Auth (JWT)  →  Problem Selection (52+ DSA)  →  Monaco Editor  →  Piston API Execute  →  AI Analysis (gpt-5.6-sol)  →  ELO Dashboard</a:t>
+              <a:t>)  →  Monaco Editor  →  Piston API Execute  →  AI Analysis (gpt-5.6-sol)  →  ELO Dashboard</a:t>
             </a:r>
           </a:p>
         </p:txBody>
@@ -6048,7 +6282,7 @@
         </p:nvSpPr>
         <p:spPr>
           <a:xfrm>
-            <a:off x="384048" y="1078992"/>
+            <a:off x="384048" y="1051560"/>
             <a:ext cx="4572000" cy="164592"/>
           </a:xfrm>
           <a:prstGeom prst="rect">
@@ -6057,7 +6291,7 @@
           <a:noFill/>
         </p:spPr>
         <p:txBody>
-          <a:bodyPr wrap="square" lIns="54864" rIns="54864" tIns="27432" bIns="27432">
+          <a:bodyPr wrap="square" lIns="54864" rIns="54864" tIns="36576" bIns="36576">
             <a:spAutoFit/>
           </a:bodyPr>
           <a:lstStyle/>
@@ -6082,8 +6316,8 @@
         </p:nvSpPr>
         <p:spPr>
           <a:xfrm>
-            <a:off x="384048" y="1261872"/>
-            <a:ext cx="1984248" cy="1280160"/>
+            <a:off x="384048" y="1225296"/>
+            <a:ext cx="1984248" cy="1371600"/>
           </a:xfrm>
           <a:prstGeom prst="rect">
             <a:avLst/>
@@ -6127,8 +6361,8 @@
         </p:nvSpPr>
         <p:spPr>
           <a:xfrm>
-            <a:off x="438912" y="1280160"/>
-            <a:ext cx="1892807" cy="1243584"/>
+            <a:off x="429768" y="1243584"/>
+            <a:ext cx="1911095" cy="1335024"/>
           </a:xfrm>
           <a:prstGeom prst="rect">
             <a:avLst/>
@@ -6136,13 +6370,13 @@
           <a:noFill/>
         </p:spPr>
         <p:txBody>
-          <a:bodyPr wrap="square" lIns="54864" rIns="54864" tIns="27432" bIns="27432">
+          <a:bodyPr wrap="square" lIns="54864" rIns="54864" tIns="36576" bIns="36576">
             <a:spAutoFit/>
           </a:bodyPr>
           <a:lstStyle/>
           <a:p>
             <a:r>
-              <a:rPr sz="880" b="1">
+              <a:rPr sz="860" b="1">
                 <a:solidFill>
                   <a:srgbClr val="1E2761"/>
                 </a:solidFill>
@@ -6153,82 +6387,78 @@
           </a:p>
           <a:p>
             <a:pPr algn="l">
-              <a:spcBef>
-                <a:spcPts val="180"/>
-              </a:spcBef>
-            </a:pPr>
-            <a:r>
-              <a:rPr sz="780">
+              <a:lnSpc>
+                <a:spcPts val="980"/>
+              </a:lnSpc>
+              <a:spcBef>
+                <a:spcPts val="250"/>
+              </a:spcBef>
+            </a:pPr>
+            <a:r>
+              <a:rPr sz="750">
                 <a:solidFill>
                   <a:srgbClr val="475569"/>
                 </a:solidFill>
                 <a:latin typeface="Inter"/>
               </a:rPr>
-              <a:t>• React 18 Server Components for page speed &amp; SEO</a:t>
-            </a:r>
-          </a:p>
-          <a:p>
-            <a:pPr algn="l">
-              <a:spcBef>
-                <a:spcPts val="180"/>
-              </a:spcBef>
-            </a:pPr>
-            <a:r>
-              <a:rPr sz="780">
+              <a:t>• React 18 Server Components for high speed &amp; SEO</a:t>
+            </a:r>
+          </a:p>
+          <a:p>
+            <a:pPr algn="l">
+              <a:lnSpc>
+                <a:spcPts val="980"/>
+              </a:lnSpc>
+              <a:spcBef>
+                <a:spcPts val="250"/>
+              </a:spcBef>
+            </a:pPr>
+            <a:r>
+              <a:rPr sz="750">
                 <a:solidFill>
                   <a:srgbClr val="475569"/>
                 </a:solidFill>
                 <a:latin typeface="Inter"/>
               </a:rPr>
-              <a:t>• Server Actions for secure form &amp; API handling</a:t>
-            </a:r>
-          </a:p>
-          <a:p>
-            <a:pPr algn="l">
-              <a:spcBef>
-                <a:spcPts val="180"/>
-              </a:spcBef>
-            </a:pPr>
-            <a:r>
-              <a:rPr sz="780">
+              <a:t>• Server Actions handling secure form &amp; API data</a:t>
+            </a:r>
+          </a:p>
+          <a:p>
+            <a:pPr algn="l">
+              <a:lnSpc>
+                <a:spcPts val="980"/>
+              </a:lnSpc>
+              <a:spcBef>
+                <a:spcPts val="250"/>
+              </a:spcBef>
+            </a:pPr>
+            <a:r>
+              <a:rPr sz="750">
                 <a:solidFill>
                   <a:srgbClr val="475569"/>
                 </a:solidFill>
                 <a:latin typeface="Inter"/>
               </a:rPr>
-              <a:t>• Dynamic API Routes handling execution &amp; AI</a:t>
-            </a:r>
-          </a:p>
-          <a:p>
-            <a:pPr algn="l">
-              <a:spcBef>
-                <a:spcPts val="180"/>
-              </a:spcBef>
-            </a:pPr>
-            <a:r>
-              <a:rPr sz="780">
+              <a:t>• Dynamic API Routes handling execution &amp; AI audits</a:t>
+            </a:r>
+          </a:p>
+          <a:p>
+            <a:pPr algn="l">
+              <a:lnSpc>
+                <a:spcPts val="980"/>
+              </a:lnSpc>
+              <a:spcBef>
+                <a:spcPts val="250"/>
+              </a:spcBef>
+            </a:pPr>
+            <a:r>
+              <a:rPr sz="750">
                 <a:solidFill>
                   <a:srgbClr val="475569"/>
                 </a:solidFill>
                 <a:latin typeface="Inter"/>
               </a:rPr>
               <a:t>• Tailwind CSS &amp; Lucide Icons for responsive UI</a:t>
-            </a:r>
-          </a:p>
-          <a:p>
-            <a:pPr algn="l">
-              <a:spcBef>
-                <a:spcPts val="180"/>
-              </a:spcBef>
-            </a:pPr>
-            <a:r>
-              <a:rPr sz="780">
-                <a:solidFill>
-                  <a:srgbClr val="475569"/>
-                </a:solidFill>
-                <a:latin typeface="Inter"/>
-              </a:rPr>
-              <a:t>• Optimized asset loading with zero client bloat</a:t>
             </a:r>
           </a:p>
         </p:txBody>
@@ -6241,8 +6471,8 @@
         </p:nvSpPr>
         <p:spPr>
           <a:xfrm>
-            <a:off x="2487168" y="1261872"/>
-            <a:ext cx="1984248" cy="1280160"/>
+            <a:off x="2487168" y="1225296"/>
+            <a:ext cx="1984248" cy="1371600"/>
           </a:xfrm>
           <a:prstGeom prst="rect">
             <a:avLst/>
@@ -6286,8 +6516,8 @@
         </p:nvSpPr>
         <p:spPr>
           <a:xfrm>
-            <a:off x="2542032" y="1280160"/>
-            <a:ext cx="1892807" cy="1243584"/>
+            <a:off x="2532887" y="1243584"/>
+            <a:ext cx="1911095" cy="1335024"/>
           </a:xfrm>
           <a:prstGeom prst="rect">
             <a:avLst/>
@@ -6295,13 +6525,13 @@
           <a:noFill/>
         </p:spPr>
         <p:txBody>
-          <a:bodyPr wrap="square" lIns="54864" rIns="54864" tIns="27432" bIns="27432">
+          <a:bodyPr wrap="square" lIns="54864" rIns="54864" tIns="36576" bIns="36576">
             <a:spAutoFit/>
           </a:bodyPr>
           <a:lstStyle/>
           <a:p>
             <a:r>
-              <a:rPr sz="880" b="1">
+              <a:rPr sz="860" b="1">
                 <a:solidFill>
                   <a:srgbClr val="1E2761"/>
                 </a:solidFill>
@@ -6312,12 +6542,15 @@
           </a:p>
           <a:p>
             <a:pPr algn="l">
-              <a:spcBef>
-                <a:spcPts val="180"/>
-              </a:spcBef>
-            </a:pPr>
-            <a:r>
-              <a:rPr sz="780">
+              <a:lnSpc>
+                <a:spcPts val="980"/>
+              </a:lnSpc>
+              <a:spcBef>
+                <a:spcPts val="250"/>
+              </a:spcBef>
+            </a:pPr>
+            <a:r>
+              <a:rPr sz="750">
                 <a:solidFill>
                   <a:srgbClr val="475569"/>
                 </a:solidFill>
@@ -6328,28 +6561,34 @@
           </a:p>
           <a:p>
             <a:pPr algn="l">
-              <a:spcBef>
-                <a:spcPts val="180"/>
-              </a:spcBef>
-            </a:pPr>
-            <a:r>
-              <a:rPr sz="780">
+              <a:lnSpc>
+                <a:spcPts val="980"/>
+              </a:lnSpc>
+              <a:spcBef>
+                <a:spcPts val="250"/>
+              </a:spcBef>
+            </a:pPr>
+            <a:r>
+              <a:rPr sz="750">
                 <a:solidFill>
                   <a:srgbClr val="475569"/>
                 </a:solidFill>
                 <a:latin typeface="Inter"/>
               </a:rPr>
-              <a:t>• Schema: Users, Problems, Submissions, Contests</a:t>
-            </a:r>
-          </a:p>
-          <a:p>
-            <a:pPr algn="l">
-              <a:spcBef>
-                <a:spcPts val="180"/>
-              </a:spcBef>
-            </a:pPr>
-            <a:r>
-              <a:rPr sz="780">
+              <a:t>• Schema: Users, 400+ Problems, Submissions</a:t>
+            </a:r>
+          </a:p>
+          <a:p>
+            <a:pPr algn="l">
+              <a:lnSpc>
+                <a:spcPts val="980"/>
+              </a:lnSpc>
+              <a:spcBef>
+                <a:spcPts val="250"/>
+              </a:spcBef>
+            </a:pPr>
+            <a:r>
+              <a:rPr sz="750">
                 <a:solidFill>
                   <a:srgbClr val="475569"/>
                 </a:solidFill>
@@ -6360,34 +6599,21 @@
           </a:p>
           <a:p>
             <a:pPr algn="l">
-              <a:spcBef>
-                <a:spcPts val="180"/>
-              </a:spcBef>
-            </a:pPr>
-            <a:r>
-              <a:rPr sz="780">
+              <a:lnSpc>
+                <a:spcPts val="980"/>
+              </a:lnSpc>
+              <a:spcBef>
+                <a:spcPts val="250"/>
+              </a:spcBef>
+            </a:pPr>
+            <a:r>
+              <a:rPr sz="750">
                 <a:solidFill>
                   <a:srgbClr val="475569"/>
                 </a:solidFill>
                 <a:latin typeface="Inter"/>
               </a:rPr>
-              <a:t>• SQLite for dev; PostgreSQL for prod deploy</a:t>
-            </a:r>
-          </a:p>
-          <a:p>
-            <a:pPr algn="l">
-              <a:spcBef>
-                <a:spcPts val="180"/>
-              </a:spcBef>
-            </a:pPr>
-            <a:r>
-              <a:rPr sz="780">
-                <a:solidFill>
-                  <a:srgbClr val="475569"/>
-                </a:solidFill>
-                <a:latin typeface="Inter"/>
-              </a:rPr>
-              <a:t>• Prisma migrations for smooth schema updates</a:t>
+              <a:t>• SQLite for dev; PostgreSQL for production deploy</a:t>
             </a:r>
           </a:p>
         </p:txBody>
@@ -6400,8 +6626,8 @@
         </p:nvSpPr>
         <p:spPr>
           <a:xfrm>
-            <a:off x="4590288" y="1261872"/>
-            <a:ext cx="1984248" cy="1280160"/>
+            <a:off x="4590288" y="1225296"/>
+            <a:ext cx="1984248" cy="1371600"/>
           </a:xfrm>
           <a:prstGeom prst="rect">
             <a:avLst/>
@@ -6445,8 +6671,8 @@
         </p:nvSpPr>
         <p:spPr>
           <a:xfrm>
-            <a:off x="4645151" y="1280160"/>
-            <a:ext cx="1892807" cy="1243584"/>
+            <a:off x="4636007" y="1243584"/>
+            <a:ext cx="1911095" cy="1335024"/>
           </a:xfrm>
           <a:prstGeom prst="rect">
             <a:avLst/>
@@ -6454,13 +6680,13 @@
           <a:noFill/>
         </p:spPr>
         <p:txBody>
-          <a:bodyPr wrap="square" lIns="54864" rIns="54864" tIns="27432" bIns="27432">
+          <a:bodyPr wrap="square" lIns="54864" rIns="54864" tIns="36576" bIns="36576">
             <a:spAutoFit/>
           </a:bodyPr>
           <a:lstStyle/>
           <a:p>
             <a:r>
-              <a:rPr sz="880" b="1">
+              <a:rPr sz="860" b="1">
                 <a:solidFill>
                   <a:srgbClr val="1E2761"/>
                 </a:solidFill>
@@ -6471,28 +6697,34 @@
           </a:p>
           <a:p>
             <a:pPr algn="l">
-              <a:spcBef>
-                <a:spcPts val="180"/>
-              </a:spcBef>
-            </a:pPr>
-            <a:r>
-              <a:rPr sz="780">
+              <a:lnSpc>
+                <a:spcPts val="980"/>
+              </a:lnSpc>
+              <a:spcBef>
+                <a:spcPts val="250"/>
+              </a:spcBef>
+            </a:pPr>
+            <a:r>
+              <a:rPr sz="750">
                 <a:solidFill>
                   <a:srgbClr val="475569"/>
                 </a:solidFill>
                 <a:latin typeface="Inter"/>
               </a:rPr>
-              <a:t>• High-performance sandbox for compilation</a:t>
-            </a:r>
-          </a:p>
-          <a:p>
-            <a:pPr algn="l">
-              <a:spcBef>
-                <a:spcPts val="180"/>
-              </a:spcBef>
-            </a:pPr>
-            <a:r>
-              <a:rPr sz="780">
+              <a:t>• High-performance sandbox for code compilation</a:t>
+            </a:r>
+          </a:p>
+          <a:p>
+            <a:pPr algn="l">
+              <a:lnSpc>
+                <a:spcPts val="980"/>
+              </a:lnSpc>
+              <a:spcBef>
+                <a:spcPts val="250"/>
+              </a:spcBef>
+            </a:pPr>
+            <a:r>
+              <a:rPr sz="750">
                 <a:solidFill>
                   <a:srgbClr val="475569"/>
                 </a:solidFill>
@@ -6503,12 +6735,15 @@
           </a:p>
           <a:p>
             <a:pPr algn="l">
-              <a:spcBef>
-                <a:spcPts val="180"/>
-              </a:spcBef>
-            </a:pPr>
-            <a:r>
-              <a:rPr sz="780">
+              <a:lnSpc>
+                <a:spcPts val="980"/>
+              </a:lnSpc>
+              <a:spcBef>
+                <a:spcPts val="250"/>
+              </a:spcBef>
+            </a:pPr>
+            <a:r>
+              <a:rPr sz="750">
                 <a:solidFill>
                   <a:srgbClr val="475569"/>
                 </a:solidFill>
@@ -6519,34 +6754,21 @@
           </a:p>
           <a:p>
             <a:pPr algn="l">
-              <a:spcBef>
-                <a:spcPts val="180"/>
-              </a:spcBef>
-            </a:pPr>
-            <a:r>
-              <a:rPr sz="780">
+              <a:lnSpc>
+                <a:spcPts val="980"/>
+              </a:lnSpc>
+              <a:spcBef>
+                <a:spcPts val="250"/>
+              </a:spcBef>
+            </a:pPr>
+            <a:r>
+              <a:rPr sz="750">
                 <a:solidFill>
                   <a:srgbClr val="475569"/>
                 </a:solidFill>
                 <a:latin typeface="Inter"/>
               </a:rPr>
-              <a:t>• Handles concurrent code execution requests</a:t>
-            </a:r>
-          </a:p>
-          <a:p>
-            <a:pPr algn="l">
-              <a:spcBef>
-                <a:spcPts val="180"/>
-              </a:spcBef>
-            </a:pPr>
-            <a:r>
-              <a:rPr sz="780">
-                <a:solidFill>
-                  <a:srgbClr val="475569"/>
-                </a:solidFill>
-                <a:latin typeface="Inter"/>
-              </a:rPr>
-              <a:t>• Resource limits preventing loops or leaks</a:t>
+              <a:t>• Handles multi-tenant concurrent execution runs</a:t>
             </a:r>
           </a:p>
         </p:txBody>
@@ -6559,8 +6781,8 @@
         </p:nvSpPr>
         <p:spPr>
           <a:xfrm>
-            <a:off x="6693407" y="1261872"/>
-            <a:ext cx="1984248" cy="1280160"/>
+            <a:off x="6693407" y="1225296"/>
+            <a:ext cx="1984248" cy="1371600"/>
           </a:xfrm>
           <a:prstGeom prst="rect">
             <a:avLst/>
@@ -6604,8 +6826,8 @@
         </p:nvSpPr>
         <p:spPr>
           <a:xfrm>
-            <a:off x="6748271" y="1280160"/>
-            <a:ext cx="1892807" cy="1243584"/>
+            <a:off x="6739127" y="1243584"/>
+            <a:ext cx="1911095" cy="1335024"/>
           </a:xfrm>
           <a:prstGeom prst="rect">
             <a:avLst/>
@@ -6613,13 +6835,13 @@
           <a:noFill/>
         </p:spPr>
         <p:txBody>
-          <a:bodyPr wrap="square" lIns="54864" rIns="54864" tIns="27432" bIns="27432">
+          <a:bodyPr wrap="square" lIns="54864" rIns="54864" tIns="36576" bIns="36576">
             <a:spAutoFit/>
           </a:bodyPr>
           <a:lstStyle/>
           <a:p>
             <a:r>
-              <a:rPr sz="880" b="1">
+              <a:rPr sz="860" b="1">
                 <a:solidFill>
                   <a:srgbClr val="1E2761"/>
                 </a:solidFill>
@@ -6630,28 +6852,34 @@
           </a:p>
           <a:p>
             <a:pPr algn="l">
-              <a:spcBef>
-                <a:spcPts val="180"/>
-              </a:spcBef>
-            </a:pPr>
-            <a:r>
-              <a:rPr sz="780">
+              <a:lnSpc>
+                <a:spcPts val="980"/>
+              </a:lnSpc>
+              <a:spcBef>
+                <a:spcPts val="250"/>
+              </a:spcBef>
+            </a:pPr>
+            <a:r>
+              <a:rPr sz="750">
                 <a:solidFill>
                   <a:srgbClr val="475569"/>
                 </a:solidFill>
                 <a:latin typeface="Inter"/>
               </a:rPr>
-              <a:t>• gpt-5.6-sol: deep code review &amp; O(N) audit</a:t>
-            </a:r>
-          </a:p>
-          <a:p>
-            <a:pPr algn="l">
-              <a:spcBef>
-                <a:spcPts val="180"/>
-              </a:spcBef>
-            </a:pPr>
-            <a:r>
-              <a:rPr sz="780">
+              <a:t>• gpt-5.6-sol: deep code review &amp; O(N) complexity audit</a:t>
+            </a:r>
+          </a:p>
+          <a:p>
+            <a:pPr algn="l">
+              <a:lnSpc>
+                <a:spcPts val="980"/>
+              </a:lnSpc>
+              <a:spcBef>
+                <a:spcPts val="250"/>
+              </a:spcBef>
+            </a:pPr>
+            <a:r>
+              <a:rPr sz="750">
                 <a:solidFill>
                   <a:srgbClr val="475569"/>
                 </a:solidFill>
@@ -6662,12 +6890,15 @@
           </a:p>
           <a:p>
             <a:pPr algn="l">
-              <a:spcBef>
-                <a:spcPts val="180"/>
-              </a:spcBef>
-            </a:pPr>
-            <a:r>
-              <a:rPr sz="780">
+              <a:lnSpc>
+                <a:spcPts val="980"/>
+              </a:lnSpc>
+              <a:spcBef>
+                <a:spcPts val="250"/>
+              </a:spcBef>
+            </a:pPr>
+            <a:r>
+              <a:rPr sz="750">
                 <a:solidFill>
                   <a:srgbClr val="475569"/>
                 </a:solidFill>
@@ -6678,34 +6909,21 @@
           </a:p>
           <a:p>
             <a:pPr algn="l">
-              <a:spcBef>
-                <a:spcPts val="180"/>
-              </a:spcBef>
-            </a:pPr>
-            <a:r>
-              <a:rPr sz="780">
+              <a:lnSpc>
+                <a:spcPts val="980"/>
+              </a:lnSpc>
+              <a:spcBef>
+                <a:spcPts val="250"/>
+              </a:spcBef>
+            </a:pPr>
+            <a:r>
+              <a:rPr sz="750">
                 <a:solidFill>
                   <a:srgbClr val="475569"/>
                 </a:solidFill>
                 <a:latin typeface="Inter"/>
               </a:rPr>
-              <a:t>• Zero per-call API cost — intelligent routing</a:t>
-            </a:r>
-          </a:p>
-          <a:p>
-            <a:pPr algn="l">
-              <a:spcBef>
-                <a:spcPts val="180"/>
-              </a:spcBef>
-            </a:pPr>
-            <a:r>
-              <a:rPr sz="780">
-                <a:solidFill>
-                  <a:srgbClr val="475569"/>
-                </a:solidFill>
-                <a:latin typeface="Inter"/>
-              </a:rPr>
-              <a:t>• Context-aware prompts tailored for DSA topics</a:t>
+              <a:t>• Zero per-call API cost via intelligent model routing</a:t>
             </a:r>
           </a:p>
         </p:txBody>
@@ -6718,7 +6936,7 @@
         </p:nvSpPr>
         <p:spPr>
           <a:xfrm>
-            <a:off x="384048" y="2578608"/>
+            <a:off x="384048" y="2651760"/>
             <a:ext cx="4572000" cy="164592"/>
           </a:xfrm>
           <a:prstGeom prst="rect">
@@ -6727,7 +6945,7 @@
           <a:noFill/>
         </p:spPr>
         <p:txBody>
-          <a:bodyPr wrap="square" lIns="54864" rIns="54864" tIns="27432" bIns="27432">
+          <a:bodyPr wrap="square" lIns="54864" rIns="54864" tIns="36576" bIns="36576">
             <a:spAutoFit/>
           </a:bodyPr>
           <a:lstStyle/>
@@ -6752,8 +6970,8 @@
         </p:nvSpPr>
         <p:spPr>
           <a:xfrm>
-            <a:off x="384048" y="2761488"/>
-            <a:ext cx="1984248" cy="1280160"/>
+            <a:off x="384048" y="2834640"/>
+            <a:ext cx="1984248" cy="1371600"/>
           </a:xfrm>
           <a:prstGeom prst="rect">
             <a:avLst/>
@@ -6797,8 +7015,8 @@
         </p:nvSpPr>
         <p:spPr>
           <a:xfrm>
-            <a:off x="438912" y="2779776"/>
-            <a:ext cx="1892807" cy="1243584"/>
+            <a:off x="429768" y="2852928"/>
+            <a:ext cx="1911095" cy="1335024"/>
           </a:xfrm>
           <a:prstGeom prst="rect">
             <a:avLst/>
@@ -6806,13 +7024,13 @@
           <a:noFill/>
         </p:spPr>
         <p:txBody>
-          <a:bodyPr wrap="square" lIns="54864" rIns="54864" tIns="27432" bIns="27432">
+          <a:bodyPr wrap="square" lIns="54864" rIns="54864" tIns="36576" bIns="36576">
             <a:spAutoFit/>
           </a:bodyPr>
           <a:lstStyle/>
           <a:p>
             <a:r>
-              <a:rPr sz="880" b="1">
+              <a:rPr sz="860" b="1">
                 <a:solidFill>
                   <a:srgbClr val="1E2761"/>
                 </a:solidFill>
@@ -6823,12 +7041,15 @@
           </a:p>
           <a:p>
             <a:pPr algn="l">
-              <a:spcBef>
-                <a:spcPts val="180"/>
-              </a:spcBef>
-            </a:pPr>
-            <a:r>
-              <a:rPr sz="780">
+              <a:lnSpc>
+                <a:spcPts val="980"/>
+              </a:lnSpc>
+              <a:spcBef>
+                <a:spcPts val="250"/>
+              </a:spcBef>
+            </a:pPr>
+            <a:r>
+              <a:rPr sz="750">
                 <a:solidFill>
                   <a:srgbClr val="475569"/>
                 </a:solidFill>
@@ -6839,66 +7060,59 @@
           </a:p>
           <a:p>
             <a:pPr algn="l">
-              <a:spcBef>
-                <a:spcPts val="180"/>
-              </a:spcBef>
-            </a:pPr>
-            <a:r>
-              <a:rPr sz="780">
+              <a:lnSpc>
+                <a:spcPts val="980"/>
+              </a:lnSpc>
+              <a:spcBef>
+                <a:spcPts val="250"/>
+              </a:spcBef>
+            </a:pPr>
+            <a:r>
+              <a:rPr sz="750">
                 <a:solidFill>
                   <a:srgbClr val="475569"/>
                 </a:solidFill>
                 <a:latin typeface="Inter"/>
               </a:rPr>
-              <a:t>• Autocomplete, auto-indent &amp; diagnostics</a:t>
-            </a:r>
-          </a:p>
-          <a:p>
-            <a:pPr algn="l">
-              <a:spcBef>
-                <a:spcPts val="180"/>
-              </a:spcBef>
-            </a:pPr>
-            <a:r>
-              <a:rPr sz="780">
+              <a:t>• Autocomplete, auto-indent &amp; diagnostic checks</a:t>
+            </a:r>
+          </a:p>
+          <a:p>
+            <a:pPr algn="l">
+              <a:lnSpc>
+                <a:spcPts val="980"/>
+              </a:lnSpc>
+              <a:spcBef>
+                <a:spcPts val="250"/>
+              </a:spcBef>
+            </a:pPr>
+            <a:r>
+              <a:rPr sz="750">
                 <a:solidFill>
                   <a:srgbClr val="475569"/>
                 </a:solidFill>
                 <a:latin typeface="Inter"/>
               </a:rPr>
-              <a:t>• Multi-language tab switching &amp; themes</a:t>
-            </a:r>
-          </a:p>
-          <a:p>
-            <a:pPr algn="l">
-              <a:spcBef>
-                <a:spcPts val="180"/>
-              </a:spcBef>
-            </a:pPr>
-            <a:r>
-              <a:rPr sz="780">
+              <a:t>• Multi-language tab switching &amp; custom themes</a:t>
+            </a:r>
+          </a:p>
+          <a:p>
+            <a:pPr algn="l">
+              <a:lnSpc>
+                <a:spcPts val="980"/>
+              </a:lnSpc>
+              <a:spcBef>
+                <a:spcPts val="250"/>
+              </a:spcBef>
+            </a:pPr>
+            <a:r>
+              <a:rPr sz="750">
                 <a:solidFill>
                   <a:srgbClr val="475569"/>
                 </a:solidFill>
                 <a:latin typeface="Inter"/>
               </a:rPr>
               <a:t>• Integrated split-pane view with problem &amp; tests</a:t>
-            </a:r>
-          </a:p>
-          <a:p>
-            <a:pPr algn="l">
-              <a:spcBef>
-                <a:spcPts val="180"/>
-              </a:spcBef>
-            </a:pPr>
-            <a:r>
-              <a:rPr sz="780">
-                <a:solidFill>
-                  <a:srgbClr val="475569"/>
-                </a:solidFill>
-                <a:latin typeface="Inter"/>
-              </a:rPr>
-              <a:t>• Keybinding support (Vim / Emacs / VS Code)</a:t>
             </a:r>
           </a:p>
         </p:txBody>
@@ -6911,8 +7125,8 @@
         </p:nvSpPr>
         <p:spPr>
           <a:xfrm>
-            <a:off x="2487168" y="2761488"/>
-            <a:ext cx="1984248" cy="1280160"/>
+            <a:off x="2487168" y="2834640"/>
+            <a:ext cx="1984248" cy="1371600"/>
           </a:xfrm>
           <a:prstGeom prst="rect">
             <a:avLst/>
@@ -6956,8 +7170,8 @@
         </p:nvSpPr>
         <p:spPr>
           <a:xfrm>
-            <a:off x="2542032" y="2779776"/>
-            <a:ext cx="1892807" cy="1243584"/>
+            <a:off x="2532887" y="2852928"/>
+            <a:ext cx="1911095" cy="1335024"/>
           </a:xfrm>
           <a:prstGeom prst="rect">
             <a:avLst/>
@@ -6965,13 +7179,13 @@
           <a:noFill/>
         </p:spPr>
         <p:txBody>
-          <a:bodyPr wrap="square" lIns="54864" rIns="54864" tIns="27432" bIns="27432">
+          <a:bodyPr wrap="square" lIns="54864" rIns="54864" tIns="36576" bIns="36576">
             <a:spAutoFit/>
           </a:bodyPr>
           <a:lstStyle/>
           <a:p>
             <a:r>
-              <a:rPr sz="880" b="1">
+              <a:rPr sz="860" b="1">
                 <a:solidFill>
                   <a:srgbClr val="1E2761"/>
                 </a:solidFill>
@@ -6982,28 +7196,34 @@
           </a:p>
           <a:p>
             <a:pPr algn="l">
-              <a:spcBef>
-                <a:spcPts val="180"/>
-              </a:spcBef>
-            </a:pPr>
-            <a:r>
-              <a:rPr sz="780">
+              <a:lnSpc>
+                <a:spcPts val="980"/>
+              </a:lnSpc>
+              <a:spcBef>
+                <a:spcPts val="250"/>
+              </a:spcBef>
+            </a:pPr>
+            <a:r>
+              <a:rPr sz="750">
                 <a:solidFill>
                   <a:srgbClr val="475569"/>
                 </a:solidFill>
                 <a:latin typeface="Inter"/>
               </a:rPr>
-              <a:t>• SQLite for rapid offline dev &amp; instant seeding</a:t>
-            </a:r>
-          </a:p>
-          <a:p>
-            <a:pPr algn="l">
-              <a:spcBef>
-                <a:spcPts val="180"/>
-              </a:spcBef>
-            </a:pPr>
-            <a:r>
-              <a:rPr sz="780">
+              <a:t>• SQLite for rapid offline dev &amp; instant DB seeding</a:t>
+            </a:r>
+          </a:p>
+          <a:p>
+            <a:pPr algn="l">
+              <a:lnSpc>
+                <a:spcPts val="980"/>
+              </a:lnSpc>
+              <a:spcBef>
+                <a:spcPts val="250"/>
+              </a:spcBef>
+            </a:pPr>
+            <a:r>
+              <a:rPr sz="750">
                 <a:solidFill>
                   <a:srgbClr val="475569"/>
                 </a:solidFill>
@@ -7014,50 +7234,40 @@
           </a:p>
           <a:p>
             <a:pPr algn="l">
-              <a:spcBef>
-                <a:spcPts val="180"/>
-              </a:spcBef>
-            </a:pPr>
-            <a:r>
-              <a:rPr sz="780">
+              <a:lnSpc>
+                <a:spcPts val="980"/>
+              </a:lnSpc>
+              <a:spcBef>
+                <a:spcPts val="250"/>
+              </a:spcBef>
+            </a:pPr>
+            <a:r>
+              <a:rPr sz="750">
                 <a:solidFill>
                   <a:srgbClr val="475569"/>
                 </a:solidFill>
                 <a:latin typeface="Inter"/>
               </a:rPr>
-              <a:t>• Indexed query routes for fast leaderboards</a:t>
-            </a:r>
-          </a:p>
-          <a:p>
-            <a:pPr algn="l">
-              <a:spcBef>
-                <a:spcPts val="180"/>
-              </a:spcBef>
-            </a:pPr>
-            <a:r>
-              <a:rPr sz="780">
+              <a:t>• Indexed query routes for fast live leaderboards</a:t>
+            </a:r>
+          </a:p>
+          <a:p>
+            <a:pPr algn="l">
+              <a:lnSpc>
+                <a:spcPts val="980"/>
+              </a:lnSpc>
+              <a:spcBef>
+                <a:spcPts val="250"/>
+              </a:spcBef>
+            </a:pPr>
+            <a:r>
+              <a:rPr sz="750">
                 <a:solidFill>
                   <a:srgbClr val="475569"/>
                 </a:solidFill>
                 <a:latin typeface="Inter"/>
               </a:rPr>
-              <a:t>• Relational integrity for contest analytics</a:t>
-            </a:r>
-          </a:p>
-          <a:p>
-            <a:pPr algn="l">
-              <a:spcBef>
-                <a:spcPts val="180"/>
-              </a:spcBef>
-            </a:pPr>
-            <a:r>
-              <a:rPr sz="780">
-                <a:solidFill>
-                  <a:srgbClr val="475569"/>
-                </a:solidFill>
-                <a:latin typeface="Inter"/>
-              </a:rPr>
-              <a:t>• Automated seed scripts populating 52+ DSA</a:t>
+              <a:t>• Seeding scripts loading 400+ LeetCode problems</a:t>
             </a:r>
           </a:p>
         </p:txBody>
@@ -7070,8 +7280,8 @@
         </p:nvSpPr>
         <p:spPr>
           <a:xfrm>
-            <a:off x="4590288" y="2761488"/>
-            <a:ext cx="1984248" cy="1280160"/>
+            <a:off x="4590288" y="2834640"/>
+            <a:ext cx="1984248" cy="1371600"/>
           </a:xfrm>
           <a:prstGeom prst="rect">
             <a:avLst/>
@@ -7115,8 +7325,8 @@
         </p:nvSpPr>
         <p:spPr>
           <a:xfrm>
-            <a:off x="4645151" y="2779776"/>
-            <a:ext cx="1892807" cy="1243584"/>
+            <a:off x="4636007" y="2852928"/>
+            <a:ext cx="1911095" cy="1335024"/>
           </a:xfrm>
           <a:prstGeom prst="rect">
             <a:avLst/>
@@ -7124,13 +7334,13 @@
           <a:noFill/>
         </p:spPr>
         <p:txBody>
-          <a:bodyPr wrap="square" lIns="54864" rIns="54864" tIns="27432" bIns="27432">
+          <a:bodyPr wrap="square" lIns="54864" rIns="54864" tIns="36576" bIns="36576">
             <a:spAutoFit/>
           </a:bodyPr>
           <a:lstStyle/>
           <a:p>
             <a:r>
-              <a:rPr sz="880" b="1">
+              <a:rPr sz="860" b="1">
                 <a:solidFill>
                   <a:srgbClr val="1E2761"/>
                 </a:solidFill>
@@ -7141,28 +7351,34 @@
           </a:p>
           <a:p>
             <a:pPr algn="l">
-              <a:spcBef>
-                <a:spcPts val="180"/>
-              </a:spcBef>
-            </a:pPr>
-            <a:r>
-              <a:rPr sz="780">
+              <a:lnSpc>
+                <a:spcPts val="980"/>
+              </a:lnSpc>
+              <a:spcBef>
+                <a:spcPts val="250"/>
+              </a:spcBef>
+            </a:pPr>
+            <a:r>
+              <a:rPr sz="750">
                 <a:solidFill>
                   <a:srgbClr val="475569"/>
                 </a:solidFill>
                 <a:latin typeface="Inter"/>
               </a:rPr>
-              <a:t>• Stateless JWT token auth in secure cookies</a:t>
-            </a:r>
-          </a:p>
-          <a:p>
-            <a:pPr algn="l">
-              <a:spcBef>
-                <a:spcPts val="180"/>
-              </a:spcBef>
-            </a:pPr>
-            <a:r>
-              <a:rPr sz="780">
+              <a:t>• Stateless JWT token auth stored in HTTP cookies</a:t>
+            </a:r>
+          </a:p>
+          <a:p>
+            <a:pPr algn="l">
+              <a:lnSpc>
+                <a:spcPts val="980"/>
+              </a:lnSpc>
+              <a:spcBef>
+                <a:spcPts val="250"/>
+              </a:spcBef>
+            </a:pPr>
+            <a:r>
+              <a:rPr sz="750">
                 <a:solidFill>
                   <a:srgbClr val="475569"/>
                 </a:solidFill>
@@ -7173,50 +7389,40 @@
           </a:p>
           <a:p>
             <a:pPr algn="l">
-              <a:spcBef>
-                <a:spcPts val="180"/>
-              </a:spcBef>
-            </a:pPr>
-            <a:r>
-              <a:rPr sz="780">
+              <a:lnSpc>
+                <a:spcPts val="980"/>
+              </a:lnSpc>
+              <a:spcBef>
+                <a:spcPts val="250"/>
+              </a:spcBef>
+            </a:pPr>
+            <a:r>
+              <a:rPr sz="750">
                 <a:solidFill>
                   <a:srgbClr val="475569"/>
                 </a:solidFill>
                 <a:latin typeface="Inter"/>
               </a:rPr>
-              <a:t>• Role-based access (User, Contestant, Admin)</a:t>
-            </a:r>
-          </a:p>
-          <a:p>
-            <a:pPr algn="l">
-              <a:spcBef>
-                <a:spcPts val="180"/>
-              </a:spcBef>
-            </a:pPr>
-            <a:r>
-              <a:rPr sz="780">
+              <a:t>• Role-based access control (User, Contestant, Admin)</a:t>
+            </a:r>
+          </a:p>
+          <a:p>
+            <a:pPr algn="l">
+              <a:lnSpc>
+                <a:spcPts val="980"/>
+              </a:lnSpc>
+              <a:spcBef>
+                <a:spcPts val="250"/>
+              </a:spcBef>
+            </a:pPr>
+            <a:r>
+              <a:rPr sz="750">
                 <a:solidFill>
                   <a:srgbClr val="475569"/>
                 </a:solidFill>
                 <a:latin typeface="Inter"/>
               </a:rPr>
               <a:t>• CORS policy &amp; API rate limiting protection</a:t>
-            </a:r>
-          </a:p>
-          <a:p>
-            <a:pPr algn="l">
-              <a:spcBef>
-                <a:spcPts val="180"/>
-              </a:spcBef>
-            </a:pPr>
-            <a:r>
-              <a:rPr sz="780">
-                <a:solidFill>
-                  <a:srgbClr val="475569"/>
-                </a:solidFill>
-                <a:latin typeface="Inter"/>
-              </a:rPr>
-              <a:t>• Environment secret protection across builds</a:t>
             </a:r>
           </a:p>
         </p:txBody>
@@ -7229,8 +7435,8 @@
         </p:nvSpPr>
         <p:spPr>
           <a:xfrm>
-            <a:off x="6693407" y="2761488"/>
-            <a:ext cx="1984248" cy="1280160"/>
+            <a:off x="6693407" y="2834640"/>
+            <a:ext cx="1984248" cy="1371600"/>
           </a:xfrm>
           <a:prstGeom prst="rect">
             <a:avLst/>
@@ -7274,8 +7480,8 @@
         </p:nvSpPr>
         <p:spPr>
           <a:xfrm>
-            <a:off x="6748271" y="2779776"/>
-            <a:ext cx="1892807" cy="1243584"/>
+            <a:off x="6739127" y="2852928"/>
+            <a:ext cx="1911095" cy="1335024"/>
           </a:xfrm>
           <a:prstGeom prst="rect">
             <a:avLst/>
@@ -7283,13 +7489,13 @@
           <a:noFill/>
         </p:spPr>
         <p:txBody>
-          <a:bodyPr wrap="square" lIns="54864" rIns="54864" tIns="27432" bIns="27432">
+          <a:bodyPr wrap="square" lIns="54864" rIns="54864" tIns="36576" bIns="36576">
             <a:spAutoFit/>
           </a:bodyPr>
           <a:lstStyle/>
           <a:p>
             <a:r>
-              <a:rPr sz="880" b="1">
+              <a:rPr sz="860" b="1">
                 <a:solidFill>
                   <a:srgbClr val="1E2761"/>
                 </a:solidFill>
@@ -7300,28 +7506,34 @@
           </a:p>
           <a:p>
             <a:pPr algn="l">
-              <a:spcBef>
-                <a:spcPts val="180"/>
-              </a:spcBef>
-            </a:pPr>
-            <a:r>
-              <a:rPr sz="780">
+              <a:lnSpc>
+                <a:spcPts val="980"/>
+              </a:lnSpc>
+              <a:spcBef>
+                <a:spcPts val="250"/>
+              </a:spcBef>
+            </a:pPr>
+            <a:r>
+              <a:rPr sz="750">
                 <a:solidFill>
                   <a:srgbClr val="475569"/>
                 </a:solidFill>
                 <a:latin typeface="Inter"/>
               </a:rPr>
-              <a:t>• Deployed live at hackathon2-olive-eight.vercel.app</a:t>
-            </a:r>
-          </a:p>
-          <a:p>
-            <a:pPr algn="l">
-              <a:spcBef>
-                <a:spcPts val="180"/>
-              </a:spcBef>
-            </a:pPr>
-            <a:r>
-              <a:rPr sz="780">
+              <a:t>• Live deployment at hackathon2-olive-eight.vercel.app</a:t>
+            </a:r>
+          </a:p>
+          <a:p>
+            <a:pPr algn="l">
+              <a:lnSpc>
+                <a:spcPts val="980"/>
+              </a:lnSpc>
+              <a:spcBef>
+                <a:spcPts val="250"/>
+              </a:spcBef>
+            </a:pPr>
+            <a:r>
+              <a:rPr sz="750">
                 <a:solidFill>
                   <a:srgbClr val="475569"/>
                 </a:solidFill>
@@ -7332,44 +7544,34 @@
           </a:p>
           <a:p>
             <a:pPr algn="l">
-              <a:spcBef>
-                <a:spcPts val="180"/>
-              </a:spcBef>
-            </a:pPr>
-            <a:r>
-              <a:rPr sz="780">
+              <a:lnSpc>
+                <a:spcPts val="980"/>
+              </a:lnSpc>
+              <a:spcBef>
+                <a:spcPts val="250"/>
+              </a:spcBef>
+            </a:pPr>
+            <a:r>
+              <a:rPr sz="750">
                 <a:solidFill>
                   <a:srgbClr val="475569"/>
                 </a:solidFill>
                 <a:latin typeface="Inter"/>
               </a:rPr>
-              <a:t>• Automated CI/CD pipeline per PR</a:t>
-            </a:r>
-          </a:p>
-          <a:p>
-            <a:pPr algn="l">
-              <a:spcBef>
-                <a:spcPts val="180"/>
-              </a:spcBef>
-            </a:pPr>
-            <a:r>
-              <a:rPr sz="780">
-                <a:solidFill>
-                  <a:srgbClr val="475569"/>
-                </a:solidFill>
-                <a:latin typeface="Inter"/>
-              </a:rPr>
-              <a:t>• Serverless function auto-scaling for spikes</a:t>
-            </a:r>
-          </a:p>
-          <a:p>
-            <a:pPr algn="l">
-              <a:spcBef>
-                <a:spcPts val="180"/>
-              </a:spcBef>
-            </a:pPr>
-            <a:r>
-              <a:rPr sz="780">
+              <a:t>• Automated CI/CD deployment pipeline per PR</a:t>
+            </a:r>
+          </a:p>
+          <a:p>
+            <a:pPr algn="l">
+              <a:lnSpc>
+                <a:spcPts val="980"/>
+              </a:lnSpc>
+              <a:spcBef>
+                <a:spcPts val="250"/>
+              </a:spcBef>
+            </a:pPr>
+            <a:r>
+              <a:rPr sz="750">
                 <a:solidFill>
                   <a:srgbClr val="475569"/>
                 </a:solidFill>
@@ -7388,7 +7590,7 @@
         </p:nvSpPr>
         <p:spPr>
           <a:xfrm>
-            <a:off x="384048" y="4462272"/>
+            <a:off x="384048" y="4443984"/>
             <a:ext cx="8385048" cy="548640"/>
           </a:xfrm>
           <a:prstGeom prst="rect">
@@ -7431,7 +7633,7 @@
         </p:nvSpPr>
         <p:spPr>
           <a:xfrm>
-            <a:off x="457200" y="4480560"/>
+            <a:off x="457200" y="4462272"/>
             <a:ext cx="8229600" cy="493776"/>
           </a:xfrm>
           <a:prstGeom prst="rect">
@@ -7440,7 +7642,7 @@
           <a:noFill/>
         </p:spPr>
         <p:txBody>
-          <a:bodyPr wrap="square" lIns="54864" rIns="54864" tIns="27432" bIns="27432">
+          <a:bodyPr wrap="square" lIns="54864" rIns="54864" tIns="36576" bIns="36576">
             <a:spAutoFit/>
           </a:bodyPr>
           <a:lstStyle/>
@@ -7591,7 +7793,7 @@
           <a:noFill/>
         </p:spPr>
         <p:txBody>
-          <a:bodyPr wrap="square" lIns="54864" rIns="54864" tIns="27432" bIns="27432">
+          <a:bodyPr wrap="square" lIns="54864" rIns="54864" tIns="36576" bIns="36576">
             <a:spAutoFit/>
           </a:bodyPr>
           <a:lstStyle/>
@@ -7625,7 +7827,7 @@
           <a:noFill/>
         </p:spPr>
         <p:txBody>
-          <a:bodyPr wrap="square" lIns="54864" rIns="54864" tIns="27432" bIns="27432">
+          <a:bodyPr wrap="square" lIns="54864" rIns="54864" tIns="36576" bIns="36576">
             <a:spAutoFit/>
           </a:bodyPr>
           <a:lstStyle/>
@@ -7637,7 +7839,7 @@
                 </a:solidFill>
                 <a:latin typeface="Inter"/>
               </a:rPr>
-              <a:t>Core AI capabilities, real-time code execution engine, ELO contest system &amp; interview preparation suite</a:t>
+              <a:t>Core AI capabilities, 400+ DSA Problem Bank, real-time execution &amp; interview preparation suite</a:t>
             </a:r>
           </a:p>
         </p:txBody>
@@ -7704,13 +7906,13 @@
           <a:noFill/>
         </p:spPr>
         <p:txBody>
-          <a:bodyPr wrap="square" lIns="54864" rIns="54864" tIns="27432" bIns="27432">
+          <a:bodyPr wrap="square" lIns="54864" rIns="54864" tIns="36576" bIns="36576">
             <a:spAutoFit/>
           </a:bodyPr>
           <a:lstStyle/>
           <a:p>
             <a:r>
-              <a:rPr sz="900">
+              <a:rPr sz="880">
                 <a:solidFill>
                   <a:srgbClr val="111827"/>
                 </a:solidFill>
@@ -7730,12 +7932,15 @@
           </a:p>
           <a:p>
             <a:pPr algn="l">
-              <a:spcBef>
-                <a:spcPts val="150"/>
-              </a:spcBef>
-            </a:pPr>
-            <a:r>
-              <a:rPr sz="760">
+              <a:lnSpc>
+                <a:spcPts val="1019"/>
+              </a:lnSpc>
+              <a:spcBef>
+                <a:spcPts val="250"/>
+              </a:spcBef>
+            </a:pPr>
+            <a:r>
+              <a:rPr sz="780">
                 <a:solidFill>
                   <a:srgbClr val="475569"/>
                 </a:solidFill>
@@ -7746,12 +7951,15 @@
           </a:p>
           <a:p>
             <a:pPr algn="l">
-              <a:spcBef>
-                <a:spcPts val="150"/>
-              </a:spcBef>
-            </a:pPr>
-            <a:r>
-              <a:rPr sz="760">
+              <a:lnSpc>
+                <a:spcPts val="1019"/>
+              </a:lnSpc>
+              <a:spcBef>
+                <a:spcPts val="250"/>
+              </a:spcBef>
+            </a:pPr>
+            <a:r>
+              <a:rPr sz="780">
                 <a:solidFill>
                   <a:srgbClr val="475569"/>
                 </a:solidFill>
@@ -7762,12 +7970,15 @@
           </a:p>
           <a:p>
             <a:pPr algn="l">
-              <a:spcBef>
-                <a:spcPts val="150"/>
-              </a:spcBef>
-            </a:pPr>
-            <a:r>
-              <a:rPr sz="760">
+              <a:lnSpc>
+                <a:spcPts val="1019"/>
+              </a:lnSpc>
+              <a:spcBef>
+                <a:spcPts val="250"/>
+              </a:spcBef>
+            </a:pPr>
+            <a:r>
+              <a:rPr sz="780">
                 <a:solidFill>
                   <a:srgbClr val="475569"/>
                 </a:solidFill>
@@ -7778,12 +7989,15 @@
           </a:p>
           <a:p>
             <a:pPr algn="l">
-              <a:spcBef>
-                <a:spcPts val="150"/>
-              </a:spcBef>
-            </a:pPr>
-            <a:r>
-              <a:rPr sz="760">
+              <a:lnSpc>
+                <a:spcPts val="1019"/>
+              </a:lnSpc>
+              <a:spcBef>
+                <a:spcPts val="250"/>
+              </a:spcBef>
+            </a:pPr>
+            <a:r>
+              <a:rPr sz="780">
                 <a:solidFill>
                   <a:srgbClr val="475569"/>
                 </a:solidFill>
@@ -7856,13 +8070,13 @@
           <a:noFill/>
         </p:spPr>
         <p:txBody>
-          <a:bodyPr wrap="square" lIns="54864" rIns="54864" tIns="27432" bIns="27432">
+          <a:bodyPr wrap="square" lIns="54864" rIns="54864" tIns="36576" bIns="36576">
             <a:spAutoFit/>
           </a:bodyPr>
           <a:lstStyle/>
           <a:p>
             <a:r>
-              <a:rPr sz="900">
+              <a:rPr sz="880">
                 <a:solidFill>
                   <a:srgbClr val="111827"/>
                 </a:solidFill>
@@ -7882,12 +8096,15 @@
           </a:p>
           <a:p>
             <a:pPr algn="l">
-              <a:spcBef>
-                <a:spcPts val="150"/>
-              </a:spcBef>
-            </a:pPr>
-            <a:r>
-              <a:rPr sz="760">
+              <a:lnSpc>
+                <a:spcPts val="1019"/>
+              </a:lnSpc>
+              <a:spcBef>
+                <a:spcPts val="250"/>
+              </a:spcBef>
+            </a:pPr>
+            <a:r>
+              <a:rPr sz="780">
                 <a:solidFill>
                   <a:srgbClr val="475569"/>
                 </a:solidFill>
@@ -7898,12 +8115,15 @@
           </a:p>
           <a:p>
             <a:pPr algn="l">
-              <a:spcBef>
-                <a:spcPts val="150"/>
-              </a:spcBef>
-            </a:pPr>
-            <a:r>
-              <a:rPr sz="760">
+              <a:lnSpc>
+                <a:spcPts val="1019"/>
+              </a:lnSpc>
+              <a:spcBef>
+                <a:spcPts val="250"/>
+              </a:spcBef>
+            </a:pPr>
+            <a:r>
+              <a:rPr sz="780">
                 <a:solidFill>
                   <a:srgbClr val="475569"/>
                 </a:solidFill>
@@ -7914,12 +8134,15 @@
           </a:p>
           <a:p>
             <a:pPr algn="l">
-              <a:spcBef>
-                <a:spcPts val="150"/>
-              </a:spcBef>
-            </a:pPr>
-            <a:r>
-              <a:rPr sz="760">
+              <a:lnSpc>
+                <a:spcPts val="1019"/>
+              </a:lnSpc>
+              <a:spcBef>
+                <a:spcPts val="250"/>
+              </a:spcBef>
+            </a:pPr>
+            <a:r>
+              <a:rPr sz="780">
                 <a:solidFill>
                   <a:srgbClr val="475569"/>
                 </a:solidFill>
@@ -7930,12 +8153,15 @@
           </a:p>
           <a:p>
             <a:pPr algn="l">
-              <a:spcBef>
-                <a:spcPts val="150"/>
-              </a:spcBef>
-            </a:pPr>
-            <a:r>
-              <a:rPr sz="760">
+              <a:lnSpc>
+                <a:spcPts val="1019"/>
+              </a:lnSpc>
+              <a:spcBef>
+                <a:spcPts val="250"/>
+              </a:spcBef>
+            </a:pPr>
+            <a:r>
+              <a:rPr sz="780">
                 <a:solidFill>
                   <a:srgbClr val="475569"/>
                 </a:solidFill>
@@ -8008,13 +8234,13 @@
           <a:noFill/>
         </p:spPr>
         <p:txBody>
-          <a:bodyPr wrap="square" lIns="54864" rIns="54864" tIns="27432" bIns="27432">
+          <a:bodyPr wrap="square" lIns="54864" rIns="54864" tIns="36576" bIns="36576">
             <a:spAutoFit/>
           </a:bodyPr>
           <a:lstStyle/>
           <a:p>
             <a:r>
-              <a:rPr sz="900">
+              <a:rPr sz="880">
                 <a:solidFill>
                   <a:srgbClr val="111827"/>
                 </a:solidFill>
@@ -8034,12 +8260,15 @@
           </a:p>
           <a:p>
             <a:pPr algn="l">
-              <a:spcBef>
-                <a:spcPts val="150"/>
-              </a:spcBef>
-            </a:pPr>
-            <a:r>
-              <a:rPr sz="760">
+              <a:lnSpc>
+                <a:spcPts val="1019"/>
+              </a:lnSpc>
+              <a:spcBef>
+                <a:spcPts val="250"/>
+              </a:spcBef>
+            </a:pPr>
+            <a:r>
+              <a:rPr sz="780">
                 <a:solidFill>
                   <a:srgbClr val="475569"/>
                 </a:solidFill>
@@ -8050,12 +8279,15 @@
           </a:p>
           <a:p>
             <a:pPr algn="l">
-              <a:spcBef>
-                <a:spcPts val="150"/>
-              </a:spcBef>
-            </a:pPr>
-            <a:r>
-              <a:rPr sz="760">
+              <a:lnSpc>
+                <a:spcPts val="1019"/>
+              </a:lnSpc>
+              <a:spcBef>
+                <a:spcPts val="250"/>
+              </a:spcBef>
+            </a:pPr>
+            <a:r>
+              <a:rPr sz="780">
                 <a:solidFill>
                   <a:srgbClr val="475569"/>
                 </a:solidFill>
@@ -8066,12 +8298,15 @@
           </a:p>
           <a:p>
             <a:pPr algn="l">
-              <a:spcBef>
-                <a:spcPts val="150"/>
-              </a:spcBef>
-            </a:pPr>
-            <a:r>
-              <a:rPr sz="760">
+              <a:lnSpc>
+                <a:spcPts val="1019"/>
+              </a:lnSpc>
+              <a:spcBef>
+                <a:spcPts val="250"/>
+              </a:spcBef>
+            </a:pPr>
+            <a:r>
+              <a:rPr sz="780">
                 <a:solidFill>
                   <a:srgbClr val="475569"/>
                 </a:solidFill>
@@ -8082,12 +8317,15 @@
           </a:p>
           <a:p>
             <a:pPr algn="l">
-              <a:spcBef>
-                <a:spcPts val="150"/>
-              </a:spcBef>
-            </a:pPr>
-            <a:r>
-              <a:rPr sz="760">
+              <a:lnSpc>
+                <a:spcPts val="1019"/>
+              </a:lnSpc>
+              <a:spcBef>
+                <a:spcPts val="250"/>
+              </a:spcBef>
+            </a:pPr>
+            <a:r>
+              <a:rPr sz="780">
                 <a:solidFill>
                   <a:srgbClr val="475569"/>
                 </a:solidFill>
@@ -8160,13 +8398,13 @@
           <a:noFill/>
         </p:spPr>
         <p:txBody>
-          <a:bodyPr wrap="square" lIns="54864" rIns="54864" tIns="27432" bIns="27432">
+          <a:bodyPr wrap="square" lIns="54864" rIns="54864" tIns="36576" bIns="36576">
             <a:spAutoFit/>
           </a:bodyPr>
           <a:lstStyle/>
           <a:p>
             <a:r>
-              <a:rPr sz="900">
+              <a:rPr sz="880">
                 <a:solidFill>
                   <a:srgbClr val="111827"/>
                 </a:solidFill>
@@ -8186,12 +8424,15 @@
           </a:p>
           <a:p>
             <a:pPr algn="l">
-              <a:spcBef>
-                <a:spcPts val="150"/>
-              </a:spcBef>
-            </a:pPr>
-            <a:r>
-              <a:rPr sz="760">
+              <a:lnSpc>
+                <a:spcPts val="1019"/>
+              </a:lnSpc>
+              <a:spcBef>
+                <a:spcPts val="250"/>
+              </a:spcBef>
+            </a:pPr>
+            <a:r>
+              <a:rPr sz="780">
                 <a:solidFill>
                   <a:srgbClr val="475569"/>
                 </a:solidFill>
@@ -8202,12 +8443,15 @@
           </a:p>
           <a:p>
             <a:pPr algn="l">
-              <a:spcBef>
-                <a:spcPts val="150"/>
-              </a:spcBef>
-            </a:pPr>
-            <a:r>
-              <a:rPr sz="760">
+              <a:lnSpc>
+                <a:spcPts val="1019"/>
+              </a:lnSpc>
+              <a:spcBef>
+                <a:spcPts val="250"/>
+              </a:spcBef>
+            </a:pPr>
+            <a:r>
+              <a:rPr sz="780">
                 <a:solidFill>
                   <a:srgbClr val="475569"/>
                 </a:solidFill>
@@ -8218,12 +8462,15 @@
           </a:p>
           <a:p>
             <a:pPr algn="l">
-              <a:spcBef>
-                <a:spcPts val="150"/>
-              </a:spcBef>
-            </a:pPr>
-            <a:r>
-              <a:rPr sz="760">
+              <a:lnSpc>
+                <a:spcPts val="1019"/>
+              </a:lnSpc>
+              <a:spcBef>
+                <a:spcPts val="250"/>
+              </a:spcBef>
+            </a:pPr>
+            <a:r>
+              <a:rPr sz="780">
                 <a:solidFill>
                   <a:srgbClr val="475569"/>
                 </a:solidFill>
@@ -8234,12 +8481,15 @@
           </a:p>
           <a:p>
             <a:pPr algn="l">
-              <a:spcBef>
-                <a:spcPts val="150"/>
-              </a:spcBef>
-            </a:pPr>
-            <a:r>
-              <a:rPr sz="760">
+              <a:lnSpc>
+                <a:spcPts val="1019"/>
+              </a:lnSpc>
+              <a:spcBef>
+                <a:spcPts val="250"/>
+              </a:spcBef>
+            </a:pPr>
+            <a:r>
+              <a:rPr sz="780">
                 <a:solidFill>
                   <a:srgbClr val="475569"/>
                 </a:solidFill>
@@ -8355,13 +8605,13 @@
           <a:noFill/>
         </p:spPr>
         <p:txBody>
-          <a:bodyPr wrap="square" lIns="54864" rIns="54864" tIns="27432" bIns="27432">
+          <a:bodyPr wrap="square" lIns="54864" rIns="54864" tIns="36576" bIns="36576">
             <a:spAutoFit/>
           </a:bodyPr>
           <a:lstStyle/>
           <a:p>
             <a:r>
-              <a:rPr sz="900">
+              <a:rPr sz="880">
                 <a:solidFill>
                   <a:srgbClr val="111827"/>
                 </a:solidFill>
@@ -8381,12 +8631,15 @@
           </a:p>
           <a:p>
             <a:pPr algn="l">
-              <a:spcBef>
-                <a:spcPts val="150"/>
-              </a:spcBef>
-            </a:pPr>
-            <a:r>
-              <a:rPr sz="760">
+              <a:lnSpc>
+                <a:spcPts val="1019"/>
+              </a:lnSpc>
+              <a:spcBef>
+                <a:spcPts val="250"/>
+              </a:spcBef>
+            </a:pPr>
+            <a:r>
+              <a:rPr sz="780">
                 <a:solidFill>
                   <a:srgbClr val="475569"/>
                 </a:solidFill>
@@ -8397,12 +8650,15 @@
           </a:p>
           <a:p>
             <a:pPr algn="l">
-              <a:spcBef>
-                <a:spcPts val="150"/>
-              </a:spcBef>
-            </a:pPr>
-            <a:r>
-              <a:rPr sz="760">
+              <a:lnSpc>
+                <a:spcPts val="1019"/>
+              </a:lnSpc>
+              <a:spcBef>
+                <a:spcPts val="250"/>
+              </a:spcBef>
+            </a:pPr>
+            <a:r>
+              <a:rPr sz="780">
                 <a:solidFill>
                   <a:srgbClr val="475569"/>
                 </a:solidFill>
@@ -8413,12 +8669,15 @@
           </a:p>
           <a:p>
             <a:pPr algn="l">
-              <a:spcBef>
-                <a:spcPts val="150"/>
-              </a:spcBef>
-            </a:pPr>
-            <a:r>
-              <a:rPr sz="760">
+              <a:lnSpc>
+                <a:spcPts val="1019"/>
+              </a:lnSpc>
+              <a:spcBef>
+                <a:spcPts val="250"/>
+              </a:spcBef>
+            </a:pPr>
+            <a:r>
+              <a:rPr sz="780">
                 <a:solidFill>
                   <a:srgbClr val="475569"/>
                 </a:solidFill>
@@ -8429,12 +8688,15 @@
           </a:p>
           <a:p>
             <a:pPr algn="l">
-              <a:spcBef>
-                <a:spcPts val="150"/>
-              </a:spcBef>
-            </a:pPr>
-            <a:r>
-              <a:rPr sz="760">
+              <a:lnSpc>
+                <a:spcPts val="1019"/>
+              </a:lnSpc>
+              <a:spcBef>
+                <a:spcPts val="250"/>
+              </a:spcBef>
+            </a:pPr>
+            <a:r>
+              <a:rPr sz="780">
                 <a:solidFill>
                   <a:srgbClr val="475569"/>
                 </a:solidFill>
@@ -8507,13 +8769,13 @@
           <a:noFill/>
         </p:spPr>
         <p:txBody>
-          <a:bodyPr wrap="square" lIns="54864" rIns="54864" tIns="27432" bIns="27432">
+          <a:bodyPr wrap="square" lIns="54864" rIns="54864" tIns="36576" bIns="36576">
             <a:spAutoFit/>
           </a:bodyPr>
           <a:lstStyle/>
           <a:p>
             <a:r>
-              <a:rPr sz="900">
+              <a:rPr sz="880">
                 <a:solidFill>
                   <a:srgbClr val="111827"/>
                 </a:solidFill>
@@ -8533,12 +8795,15 @@
           </a:p>
           <a:p>
             <a:pPr algn="l">
-              <a:spcBef>
-                <a:spcPts val="150"/>
-              </a:spcBef>
-            </a:pPr>
-            <a:r>
-              <a:rPr sz="760">
+              <a:lnSpc>
+                <a:spcPts val="1019"/>
+              </a:lnSpc>
+              <a:spcBef>
+                <a:spcPts val="250"/>
+              </a:spcBef>
+            </a:pPr>
+            <a:r>
+              <a:rPr sz="780">
                 <a:solidFill>
                   <a:srgbClr val="475569"/>
                 </a:solidFill>
@@ -8549,12 +8814,15 @@
           </a:p>
           <a:p>
             <a:pPr algn="l">
-              <a:spcBef>
-                <a:spcPts val="150"/>
-              </a:spcBef>
-            </a:pPr>
-            <a:r>
-              <a:rPr sz="760">
+              <a:lnSpc>
+                <a:spcPts val="1019"/>
+              </a:lnSpc>
+              <a:spcBef>
+                <a:spcPts val="250"/>
+              </a:spcBef>
+            </a:pPr>
+            <a:r>
+              <a:rPr sz="780">
                 <a:solidFill>
                   <a:srgbClr val="475569"/>
                 </a:solidFill>
@@ -8565,12 +8833,15 @@
           </a:p>
           <a:p>
             <a:pPr algn="l">
-              <a:spcBef>
-                <a:spcPts val="150"/>
-              </a:spcBef>
-            </a:pPr>
-            <a:r>
-              <a:rPr sz="760">
+              <a:lnSpc>
+                <a:spcPts val="1019"/>
+              </a:lnSpc>
+              <a:spcBef>
+                <a:spcPts val="250"/>
+              </a:spcBef>
+            </a:pPr>
+            <a:r>
+              <a:rPr sz="780">
                 <a:solidFill>
                   <a:srgbClr val="475569"/>
                 </a:solidFill>
@@ -8581,12 +8852,15 @@
           </a:p>
           <a:p>
             <a:pPr algn="l">
-              <a:spcBef>
-                <a:spcPts val="150"/>
-              </a:spcBef>
-            </a:pPr>
-            <a:r>
-              <a:rPr sz="760">
+              <a:lnSpc>
+                <a:spcPts val="1019"/>
+              </a:lnSpc>
+              <a:spcBef>
+                <a:spcPts val="250"/>
+              </a:spcBef>
+            </a:pPr>
+            <a:r>
+              <a:rPr sz="780">
                 <a:solidFill>
                   <a:srgbClr val="475569"/>
                 </a:solidFill>
@@ -8659,13 +8933,13 @@
           <a:noFill/>
         </p:spPr>
         <p:txBody>
-          <a:bodyPr wrap="square" lIns="54864" rIns="54864" tIns="27432" bIns="27432">
+          <a:bodyPr wrap="square" lIns="54864" rIns="54864" tIns="36576" bIns="36576">
             <a:spAutoFit/>
           </a:bodyPr>
           <a:lstStyle/>
           <a:p>
             <a:r>
-              <a:rPr sz="900">
+              <a:rPr sz="880">
                 <a:solidFill>
                   <a:srgbClr val="111827"/>
                 </a:solidFill>
@@ -8685,12 +8959,15 @@
           </a:p>
           <a:p>
             <a:pPr algn="l">
-              <a:spcBef>
-                <a:spcPts val="150"/>
-              </a:spcBef>
-            </a:pPr>
-            <a:r>
-              <a:rPr sz="760">
+              <a:lnSpc>
+                <a:spcPts val="1019"/>
+              </a:lnSpc>
+              <a:spcBef>
+                <a:spcPts val="250"/>
+              </a:spcBef>
+            </a:pPr>
+            <a:r>
+              <a:rPr sz="780">
                 <a:solidFill>
                   <a:srgbClr val="475569"/>
                 </a:solidFill>
@@ -8701,12 +8978,15 @@
           </a:p>
           <a:p>
             <a:pPr algn="l">
-              <a:spcBef>
-                <a:spcPts val="150"/>
-              </a:spcBef>
-            </a:pPr>
-            <a:r>
-              <a:rPr sz="760">
+              <a:lnSpc>
+                <a:spcPts val="1019"/>
+              </a:lnSpc>
+              <a:spcBef>
+                <a:spcPts val="250"/>
+              </a:spcBef>
+            </a:pPr>
+            <a:r>
+              <a:rPr sz="780">
                 <a:solidFill>
                   <a:srgbClr val="475569"/>
                 </a:solidFill>
@@ -8717,12 +8997,15 @@
           </a:p>
           <a:p>
             <a:pPr algn="l">
-              <a:spcBef>
-                <a:spcPts val="150"/>
-              </a:spcBef>
-            </a:pPr>
-            <a:r>
-              <a:rPr sz="760">
+              <a:lnSpc>
+                <a:spcPts val="1019"/>
+              </a:lnSpc>
+              <a:spcBef>
+                <a:spcPts val="250"/>
+              </a:spcBef>
+            </a:pPr>
+            <a:r>
+              <a:rPr sz="780">
                 <a:solidFill>
                   <a:srgbClr val="475569"/>
                 </a:solidFill>
@@ -8733,12 +9016,15 @@
           </a:p>
           <a:p>
             <a:pPr algn="l">
-              <a:spcBef>
-                <a:spcPts val="150"/>
-              </a:spcBef>
-            </a:pPr>
-            <a:r>
-              <a:rPr sz="760">
+              <a:lnSpc>
+                <a:spcPts val="1019"/>
+              </a:lnSpc>
+              <a:spcBef>
+                <a:spcPts val="250"/>
+              </a:spcBef>
+            </a:pPr>
+            <a:r>
+              <a:rPr sz="780">
                 <a:solidFill>
                   <a:srgbClr val="475569"/>
                 </a:solidFill>
@@ -8811,13 +9097,13 @@
           <a:noFill/>
         </p:spPr>
         <p:txBody>
-          <a:bodyPr wrap="square" lIns="54864" rIns="54864" tIns="27432" bIns="27432">
+          <a:bodyPr wrap="square" lIns="54864" rIns="54864" tIns="36576" bIns="36576">
             <a:spAutoFit/>
           </a:bodyPr>
           <a:lstStyle/>
           <a:p>
             <a:r>
-              <a:rPr sz="900">
+              <a:rPr sz="880">
                 <a:solidFill>
                   <a:srgbClr val="111827"/>
                 </a:solidFill>
@@ -8837,12 +9123,15 @@
           </a:p>
           <a:p>
             <a:pPr algn="l">
-              <a:spcBef>
-                <a:spcPts val="150"/>
-              </a:spcBef>
-            </a:pPr>
-            <a:r>
-              <a:rPr sz="760">
+              <a:lnSpc>
+                <a:spcPts val="1019"/>
+              </a:lnSpc>
+              <a:spcBef>
+                <a:spcPts val="250"/>
+              </a:spcBef>
+            </a:pPr>
+            <a:r>
+              <a:rPr sz="780">
                 <a:solidFill>
                   <a:srgbClr val="475569"/>
                 </a:solidFill>
@@ -8853,12 +9142,15 @@
           </a:p>
           <a:p>
             <a:pPr algn="l">
-              <a:spcBef>
-                <a:spcPts val="150"/>
-              </a:spcBef>
-            </a:pPr>
-            <a:r>
-              <a:rPr sz="760">
+              <a:lnSpc>
+                <a:spcPts val="1019"/>
+              </a:lnSpc>
+              <a:spcBef>
+                <a:spcPts val="250"/>
+              </a:spcBef>
+            </a:pPr>
+            <a:r>
+              <a:rPr sz="780">
                 <a:solidFill>
                   <a:srgbClr val="475569"/>
                 </a:solidFill>
@@ -8869,12 +9161,15 @@
           </a:p>
           <a:p>
             <a:pPr algn="l">
-              <a:spcBef>
-                <a:spcPts val="150"/>
-              </a:spcBef>
-            </a:pPr>
-            <a:r>
-              <a:rPr sz="760">
+              <a:lnSpc>
+                <a:spcPts val="1019"/>
+              </a:lnSpc>
+              <a:spcBef>
+                <a:spcPts val="250"/>
+              </a:spcBef>
+            </a:pPr>
+            <a:r>
+              <a:rPr sz="780">
                 <a:solidFill>
                   <a:srgbClr val="475569"/>
                 </a:solidFill>
@@ -8885,12 +9180,15 @@
           </a:p>
           <a:p>
             <a:pPr algn="l">
-              <a:spcBef>
-                <a:spcPts val="150"/>
-              </a:spcBef>
-            </a:pPr>
-            <a:r>
-              <a:rPr sz="760">
+              <a:lnSpc>
+                <a:spcPts val="1019"/>
+              </a:lnSpc>
+              <a:spcBef>
+                <a:spcPts val="250"/>
+              </a:spcBef>
+            </a:pPr>
+            <a:r>
+              <a:rPr sz="780">
                 <a:solidFill>
                   <a:srgbClr val="475569"/>
                 </a:solidFill>
@@ -9006,13 +9304,13 @@
           <a:noFill/>
         </p:spPr>
         <p:txBody>
-          <a:bodyPr wrap="square" lIns="54864" rIns="54864" tIns="27432" bIns="27432">
+          <a:bodyPr wrap="square" lIns="54864" rIns="54864" tIns="36576" bIns="36576">
             <a:spAutoFit/>
           </a:bodyPr>
           <a:lstStyle/>
           <a:p>
             <a:r>
-              <a:rPr sz="900">
+              <a:rPr sz="880">
                 <a:solidFill>
                   <a:srgbClr val="111827"/>
                 </a:solidFill>
@@ -9023,53 +9321,62 @@
             <a:r>
               <a:rPr sz="880" b="1">
                 <a:solidFill>
-                  <a:srgbClr val="1E2761"/>
-                </a:solidFill>
-                <a:latin typeface="Inter SemiBold"/>
-              </a:rPr>
-              <a:t>Curated Problem Bank</a:t>
-            </a:r>
-          </a:p>
-          <a:p>
-            <a:pPr algn="l">
-              <a:spcBef>
-                <a:spcPts val="150"/>
-              </a:spcBef>
-            </a:pPr>
-            <a:r>
-              <a:rPr sz="760">
+                  <a:srgbClr val="FF0000"/>
+                </a:solidFill>
+                <a:latin typeface="Lexend"/>
+              </a:rPr>
+              <a:t>400+ Problem Bank</a:t>
+            </a:r>
+          </a:p>
+          <a:p>
+            <a:pPr algn="l">
+              <a:lnSpc>
+                <a:spcPts val="1019"/>
+              </a:lnSpc>
+              <a:spcBef>
+                <a:spcPts val="250"/>
+              </a:spcBef>
+            </a:pPr>
+            <a:r>
+              <a:rPr sz="780">
                 <a:solidFill>
                   <a:srgbClr val="475569"/>
                 </a:solidFill>
                 <a:latin typeface="Inter"/>
               </a:rPr>
-              <a:t>• 52+ hand-crafted DSA problems (6 tiers)</a:t>
-            </a:r>
-          </a:p>
-          <a:p>
-            <a:pPr algn="l">
-              <a:spcBef>
-                <a:spcPts val="150"/>
-              </a:spcBef>
-            </a:pPr>
-            <a:r>
-              <a:rPr sz="760">
+              <a:t>• 400+ hand-crafted LeetCode DSA problems</a:t>
+            </a:r>
+          </a:p>
+          <a:p>
+            <a:pPr algn="l">
+              <a:lnSpc>
+                <a:spcPts val="1019"/>
+              </a:lnSpc>
+              <a:spcBef>
+                <a:spcPts val="250"/>
+              </a:spcBef>
+            </a:pPr>
+            <a:r>
+              <a:rPr sz="780">
                 <a:solidFill>
                   <a:srgbClr val="475569"/>
                 </a:solidFill>
                 <a:latin typeface="Inter"/>
               </a:rPr>
-              <a:t>• Easy, Medium, Hard, Expert, Master, Elite</a:t>
-            </a:r>
-          </a:p>
-          <a:p>
-            <a:pPr algn="l">
-              <a:spcBef>
-                <a:spcPts val="150"/>
-              </a:spcBef>
-            </a:pPr>
-            <a:r>
-              <a:rPr sz="760">
+              <a:t>• Categorized across 6 difficulty tiers</a:t>
+            </a:r>
+          </a:p>
+          <a:p>
+            <a:pPr algn="l">
+              <a:lnSpc>
+                <a:spcPts val="1019"/>
+              </a:lnSpc>
+              <a:spcBef>
+                <a:spcPts val="250"/>
+              </a:spcBef>
+            </a:pPr>
+            <a:r>
+              <a:rPr sz="780">
                 <a:solidFill>
                   <a:srgbClr val="475569"/>
                 </a:solidFill>
@@ -9080,12 +9387,15 @@
           </a:p>
           <a:p>
             <a:pPr algn="l">
-              <a:spcBef>
-                <a:spcPts val="150"/>
-              </a:spcBef>
-            </a:pPr>
-            <a:r>
-              <a:rPr sz="760">
+              <a:lnSpc>
+                <a:spcPts val="1019"/>
+              </a:lnSpc>
+              <a:spcBef>
+                <a:spcPts val="250"/>
+              </a:spcBef>
+            </a:pPr>
+            <a:r>
+              <a:rPr sz="780">
                 <a:solidFill>
                   <a:srgbClr val="475569"/>
                 </a:solidFill>
@@ -9158,13 +9468,13 @@
           <a:noFill/>
         </p:spPr>
         <p:txBody>
-          <a:bodyPr wrap="square" lIns="54864" rIns="54864" tIns="27432" bIns="27432">
+          <a:bodyPr wrap="square" lIns="54864" rIns="54864" tIns="36576" bIns="36576">
             <a:spAutoFit/>
           </a:bodyPr>
           <a:lstStyle/>
           <a:p>
             <a:r>
-              <a:rPr sz="900">
+              <a:rPr sz="880">
                 <a:solidFill>
                   <a:srgbClr val="111827"/>
                 </a:solidFill>
@@ -9184,12 +9494,15 @@
           </a:p>
           <a:p>
             <a:pPr algn="l">
-              <a:spcBef>
-                <a:spcPts val="150"/>
-              </a:spcBef>
-            </a:pPr>
-            <a:r>
-              <a:rPr sz="760">
+              <a:lnSpc>
+                <a:spcPts val="1019"/>
+              </a:lnSpc>
+              <a:spcBef>
+                <a:spcPts val="250"/>
+              </a:spcBef>
+            </a:pPr>
+            <a:r>
+              <a:rPr sz="780">
                 <a:solidFill>
                   <a:srgbClr val="475569"/>
                 </a:solidFill>
@@ -9200,12 +9513,15 @@
           </a:p>
           <a:p>
             <a:pPr algn="l">
-              <a:spcBef>
-                <a:spcPts val="150"/>
-              </a:spcBef>
-            </a:pPr>
-            <a:r>
-              <a:rPr sz="760">
+              <a:lnSpc>
+                <a:spcPts val="1019"/>
+              </a:lnSpc>
+              <a:spcBef>
+                <a:spcPts val="250"/>
+              </a:spcBef>
+            </a:pPr>
+            <a:r>
+              <a:rPr sz="780">
                 <a:solidFill>
                   <a:srgbClr val="475569"/>
                 </a:solidFill>
@@ -9216,12 +9532,15 @@
           </a:p>
           <a:p>
             <a:pPr algn="l">
-              <a:spcBef>
-                <a:spcPts val="150"/>
-              </a:spcBef>
-            </a:pPr>
-            <a:r>
-              <a:rPr sz="760">
+              <a:lnSpc>
+                <a:spcPts val="1019"/>
+              </a:lnSpc>
+              <a:spcBef>
+                <a:spcPts val="250"/>
+              </a:spcBef>
+            </a:pPr>
+            <a:r>
+              <a:rPr sz="780">
                 <a:solidFill>
                   <a:srgbClr val="475569"/>
                 </a:solidFill>
@@ -9232,12 +9551,15 @@
           </a:p>
           <a:p>
             <a:pPr algn="l">
-              <a:spcBef>
-                <a:spcPts val="150"/>
-              </a:spcBef>
-            </a:pPr>
-            <a:r>
-              <a:rPr sz="760">
+              <a:lnSpc>
+                <a:spcPts val="1019"/>
+              </a:lnSpc>
+              <a:spcBef>
+                <a:spcPts val="250"/>
+              </a:spcBef>
+            </a:pPr>
+            <a:r>
+              <a:rPr sz="780">
                 <a:solidFill>
                   <a:srgbClr val="475569"/>
                 </a:solidFill>
@@ -9310,13 +9632,13 @@
           <a:noFill/>
         </p:spPr>
         <p:txBody>
-          <a:bodyPr wrap="square" lIns="54864" rIns="54864" tIns="27432" bIns="27432">
+          <a:bodyPr wrap="square" lIns="54864" rIns="54864" tIns="36576" bIns="36576">
             <a:spAutoFit/>
           </a:bodyPr>
           <a:lstStyle/>
           <a:p>
             <a:r>
-              <a:rPr sz="900">
+              <a:rPr sz="880">
                 <a:solidFill>
                   <a:srgbClr val="111827"/>
                 </a:solidFill>
@@ -9336,12 +9658,15 @@
           </a:p>
           <a:p>
             <a:pPr algn="l">
-              <a:spcBef>
-                <a:spcPts val="150"/>
-              </a:spcBef>
-            </a:pPr>
-            <a:r>
-              <a:rPr sz="760">
+              <a:lnSpc>
+                <a:spcPts val="1019"/>
+              </a:lnSpc>
+              <a:spcBef>
+                <a:spcPts val="250"/>
+              </a:spcBef>
+            </a:pPr>
+            <a:r>
+              <a:rPr sz="780">
                 <a:solidFill>
                   <a:srgbClr val="475569"/>
                 </a:solidFill>
@@ -9352,12 +9677,15 @@
           </a:p>
           <a:p>
             <a:pPr algn="l">
-              <a:spcBef>
-                <a:spcPts val="150"/>
-              </a:spcBef>
-            </a:pPr>
-            <a:r>
-              <a:rPr sz="760">
+              <a:lnSpc>
+                <a:spcPts val="1019"/>
+              </a:lnSpc>
+              <a:spcBef>
+                <a:spcPts val="250"/>
+              </a:spcBef>
+            </a:pPr>
+            <a:r>
+              <a:rPr sz="780">
                 <a:solidFill>
                   <a:srgbClr val="475569"/>
                 </a:solidFill>
@@ -9368,12 +9696,15 @@
           </a:p>
           <a:p>
             <a:pPr algn="l">
-              <a:spcBef>
-                <a:spcPts val="150"/>
-              </a:spcBef>
-            </a:pPr>
-            <a:r>
-              <a:rPr sz="760">
+              <a:lnSpc>
+                <a:spcPts val="1019"/>
+              </a:lnSpc>
+              <a:spcBef>
+                <a:spcPts val="250"/>
+              </a:spcBef>
+            </a:pPr>
+            <a:r>
+              <a:rPr sz="780">
                 <a:solidFill>
                   <a:srgbClr val="475569"/>
                 </a:solidFill>
@@ -9384,12 +9715,15 @@
           </a:p>
           <a:p>
             <a:pPr algn="l">
-              <a:spcBef>
-                <a:spcPts val="150"/>
-              </a:spcBef>
-            </a:pPr>
-            <a:r>
-              <a:rPr sz="760">
+              <a:lnSpc>
+                <a:spcPts val="1019"/>
+              </a:lnSpc>
+              <a:spcBef>
+                <a:spcPts val="250"/>
+              </a:spcBef>
+            </a:pPr>
+            <a:r>
+              <a:rPr sz="780">
                 <a:solidFill>
                   <a:srgbClr val="475569"/>
                 </a:solidFill>
@@ -9462,13 +9796,13 @@
           <a:noFill/>
         </p:spPr>
         <p:txBody>
-          <a:bodyPr wrap="square" lIns="54864" rIns="54864" tIns="27432" bIns="27432">
+          <a:bodyPr wrap="square" lIns="54864" rIns="54864" tIns="36576" bIns="36576">
             <a:spAutoFit/>
           </a:bodyPr>
           <a:lstStyle/>
           <a:p>
             <a:r>
-              <a:rPr sz="900">
+              <a:rPr sz="880">
                 <a:solidFill>
                   <a:srgbClr val="111827"/>
                 </a:solidFill>
@@ -9488,12 +9822,15 @@
           </a:p>
           <a:p>
             <a:pPr algn="l">
-              <a:spcBef>
-                <a:spcPts val="150"/>
-              </a:spcBef>
-            </a:pPr>
-            <a:r>
-              <a:rPr sz="760">
+              <a:lnSpc>
+                <a:spcPts val="1019"/>
+              </a:lnSpc>
+              <a:spcBef>
+                <a:spcPts val="250"/>
+              </a:spcBef>
+            </a:pPr>
+            <a:r>
+              <a:rPr sz="780">
                 <a:solidFill>
                   <a:srgbClr val="475569"/>
                 </a:solidFill>
@@ -9504,12 +9841,15 @@
           </a:p>
           <a:p>
             <a:pPr algn="l">
-              <a:spcBef>
-                <a:spcPts val="150"/>
-              </a:spcBef>
-            </a:pPr>
-            <a:r>
-              <a:rPr sz="760">
+              <a:lnSpc>
+                <a:spcPts val="1019"/>
+              </a:lnSpc>
+              <a:spcBef>
+                <a:spcPts val="250"/>
+              </a:spcBef>
+            </a:pPr>
+            <a:r>
+              <a:rPr sz="780">
                 <a:solidFill>
                   <a:srgbClr val="475569"/>
                 </a:solidFill>
@@ -9520,12 +9860,15 @@
           </a:p>
           <a:p>
             <a:pPr algn="l">
-              <a:spcBef>
-                <a:spcPts val="150"/>
-              </a:spcBef>
-            </a:pPr>
-            <a:r>
-              <a:rPr sz="760">
+              <a:lnSpc>
+                <a:spcPts val="1019"/>
+              </a:lnSpc>
+              <a:spcBef>
+                <a:spcPts val="250"/>
+              </a:spcBef>
+            </a:pPr>
+            <a:r>
+              <a:rPr sz="780">
                 <a:solidFill>
                   <a:srgbClr val="475569"/>
                 </a:solidFill>
@@ -9536,12 +9879,15 @@
           </a:p>
           <a:p>
             <a:pPr algn="l">
-              <a:spcBef>
-                <a:spcPts val="150"/>
-              </a:spcBef>
-            </a:pPr>
-            <a:r>
-              <a:rPr sz="760">
+              <a:lnSpc>
+                <a:spcPts val="1019"/>
+              </a:lnSpc>
+              <a:spcBef>
+                <a:spcPts val="250"/>
+              </a:spcBef>
+            </a:pPr>
+            <a:r>
+              <a:rPr sz="780">
                 <a:solidFill>
                   <a:srgbClr val="475569"/>
                 </a:solidFill>
@@ -9838,7 +10184,7 @@
           <a:lstStyle/>
           <a:p>
             <a:r>
-              <a:rPr sz="650" b="1">
+              <a:rPr sz="700" b="1">
                 <a:solidFill>
                   <a:srgbClr val="B45309"/>
                 </a:solidFill>
@@ -9854,7 +10200,7 @@
               </a:spcBef>
             </a:pPr>
             <a:r>
-              <a:rPr sz="1050" b="1">
+              <a:rPr sz="1080" b="1">
                 <a:solidFill>
                   <a:srgbClr val="111827"/>
                 </a:solidFill>
@@ -9888,7 +10234,7 @@
           <a:lstStyle/>
           <a:p>
             <a:r>
-              <a:rPr sz="900" b="1">
+              <a:rPr sz="860" b="1">
                 <a:solidFill>
                   <a:srgbClr val="1E2761"/>
                 </a:solidFill>
@@ -9897,7 +10243,7 @@
               <a:t>• </a:t>
             </a:r>
             <a:r>
-              <a:rPr sz="900" b="1">
+              <a:rPr sz="860" b="1">
                 <a:solidFill>
                   <a:srgbClr val="111827"/>
                 </a:solidFill>
@@ -9906,7 +10252,7 @@
               <a:t>CS Students: </a:t>
             </a:r>
             <a:r>
-              <a:rPr sz="850">
+              <a:rPr sz="819">
                 <a:solidFill>
                   <a:srgbClr val="475569"/>
                 </a:solidFill>
@@ -9917,12 +10263,15 @@
           </a:p>
           <a:p>
             <a:pPr algn="l">
-              <a:spcBef>
-                <a:spcPts val="450"/>
-              </a:spcBef>
-            </a:pPr>
-            <a:r>
-              <a:rPr sz="900" b="1">
+              <a:lnSpc>
+                <a:spcPts val="1100"/>
+              </a:lnSpc>
+              <a:spcBef>
+                <a:spcPts val="650"/>
+              </a:spcBef>
+            </a:pPr>
+            <a:r>
+              <a:rPr sz="860" b="1">
                 <a:solidFill>
                   <a:srgbClr val="1E2761"/>
                 </a:solidFill>
@@ -9931,7 +10280,7 @@
               <a:t>• </a:t>
             </a:r>
             <a:r>
-              <a:rPr sz="900" b="1">
+              <a:rPr sz="860" b="1">
                 <a:solidFill>
                   <a:srgbClr val="111827"/>
                 </a:solidFill>
@@ -9940,7 +10289,7 @@
               <a:t>Self-Taught Devs: </a:t>
             </a:r>
             <a:r>
-              <a:rPr sz="850">
+              <a:rPr sz="819">
                 <a:solidFill>
                   <a:srgbClr val="475569"/>
                 </a:solidFill>
@@ -9951,12 +10300,15 @@
           </a:p>
           <a:p>
             <a:pPr algn="l">
-              <a:spcBef>
-                <a:spcPts val="450"/>
-              </a:spcBef>
-            </a:pPr>
-            <a:r>
-              <a:rPr sz="900" b="1">
+              <a:lnSpc>
+                <a:spcPts val="1100"/>
+              </a:lnSpc>
+              <a:spcBef>
+                <a:spcPts val="650"/>
+              </a:spcBef>
+            </a:pPr>
+            <a:r>
+              <a:rPr sz="860" b="1">
                 <a:solidFill>
                   <a:srgbClr val="1E2761"/>
                 </a:solidFill>
@@ -9965,7 +10317,7 @@
               <a:t>• </a:t>
             </a:r>
             <a:r>
-              <a:rPr sz="900" b="1">
+              <a:rPr sz="860" b="1">
                 <a:solidFill>
                   <a:srgbClr val="111827"/>
                 </a:solidFill>
@@ -9974,7 +10326,7 @@
               <a:t>Competitive Coders: </a:t>
             </a:r>
             <a:r>
-              <a:rPr sz="850">
+              <a:rPr sz="819">
                 <a:solidFill>
                   <a:srgbClr val="475569"/>
                 </a:solidFill>
@@ -9985,12 +10337,15 @@
           </a:p>
           <a:p>
             <a:pPr algn="l">
-              <a:spcBef>
-                <a:spcPts val="450"/>
-              </a:spcBef>
-            </a:pPr>
-            <a:r>
-              <a:rPr sz="900" b="1">
+              <a:lnSpc>
+                <a:spcPts val="1100"/>
+              </a:lnSpc>
+              <a:spcBef>
+                <a:spcPts val="650"/>
+              </a:spcBef>
+            </a:pPr>
+            <a:r>
+              <a:rPr sz="860" b="1">
                 <a:solidFill>
                   <a:srgbClr val="1E2761"/>
                 </a:solidFill>
@@ -9999,7 +10354,7 @@
               <a:t>• </a:t>
             </a:r>
             <a:r>
-              <a:rPr sz="900" b="1">
+              <a:rPr sz="860" b="1">
                 <a:solidFill>
                   <a:srgbClr val="111827"/>
                 </a:solidFill>
@@ -10008,7 +10363,7 @@
               <a:t>Job Seekers: </a:t>
             </a:r>
             <a:r>
-              <a:rPr sz="850">
+              <a:rPr sz="819">
                 <a:solidFill>
                   <a:srgbClr val="475569"/>
                 </a:solidFill>
@@ -10019,12 +10374,15 @@
           </a:p>
           <a:p>
             <a:pPr algn="l">
-              <a:spcBef>
-                <a:spcPts val="450"/>
-              </a:spcBef>
-            </a:pPr>
-            <a:r>
-              <a:rPr sz="900" b="1">
+              <a:lnSpc>
+                <a:spcPts val="1100"/>
+              </a:lnSpc>
+              <a:spcBef>
+                <a:spcPts val="650"/>
+              </a:spcBef>
+            </a:pPr>
+            <a:r>
+              <a:rPr sz="860" b="1">
                 <a:solidFill>
                   <a:srgbClr val="1E2761"/>
                 </a:solidFill>
@@ -10033,7 +10391,7 @@
               <a:t>• </a:t>
             </a:r>
             <a:r>
-              <a:rPr sz="900" b="1">
+              <a:rPr sz="860" b="1">
                 <a:solidFill>
                   <a:srgbClr val="111827"/>
                 </a:solidFill>
@@ -10042,23 +10400,26 @@
               <a:t>Educators &amp; Colleges: </a:t>
             </a:r>
             <a:r>
-              <a:rPr sz="850">
-                <a:solidFill>
-                  <a:srgbClr val="475569"/>
-                </a:solidFill>
-                <a:latin typeface="Roboto"/>
-              </a:rPr>
-              <a:t>using CodeForge AI problem banks to conduct automated coding assessments &amp; lab exams</a:t>
-            </a:r>
-          </a:p>
-          <a:p>
-            <a:pPr algn="l">
-              <a:spcBef>
-                <a:spcPts val="450"/>
-              </a:spcBef>
-            </a:pPr>
-            <a:r>
-              <a:rPr sz="900" b="1">
+              <a:rPr sz="819">
+                <a:solidFill>
+                  <a:srgbClr val="475569"/>
+                </a:solidFill>
+                <a:latin typeface="Roboto"/>
+              </a:rPr>
+              <a:t>using CodeForge AI 400+ problem banks to conduct automated coding assessments &amp; lab exams</a:t>
+            </a:r>
+          </a:p>
+          <a:p>
+            <a:pPr algn="l">
+              <a:lnSpc>
+                <a:spcPts val="1100"/>
+              </a:lnSpc>
+              <a:spcBef>
+                <a:spcPts val="650"/>
+              </a:spcBef>
+            </a:pPr>
+            <a:r>
+              <a:rPr sz="860" b="1">
                 <a:solidFill>
                   <a:srgbClr val="1E2761"/>
                 </a:solidFill>
@@ -10067,7 +10428,7 @@
               <a:t>• </a:t>
             </a:r>
             <a:r>
-              <a:rPr sz="900" b="1">
+              <a:rPr sz="860" b="1">
                 <a:solidFill>
                   <a:srgbClr val="111827"/>
                 </a:solidFill>
@@ -10076,7 +10437,7 @@
               <a:t>Working Engineers: </a:t>
             </a:r>
             <a:r>
-              <a:rPr sz="850">
+              <a:rPr sz="819">
                 <a:solidFill>
                   <a:srgbClr val="475569"/>
                 </a:solidFill>
@@ -10198,7 +10559,7 @@
           <a:lstStyle/>
           <a:p>
             <a:r>
-              <a:rPr sz="650" b="1">
+              <a:rPr sz="700" b="1">
                 <a:solidFill>
                   <a:srgbClr val="B45309"/>
                 </a:solidFill>
@@ -10214,7 +10575,7 @@
               </a:spcBef>
             </a:pPr>
             <a:r>
-              <a:rPr sz="1050" b="1">
+              <a:rPr sz="1080" b="1">
                 <a:solidFill>
                   <a:srgbClr val="111827"/>
                 </a:solidFill>
@@ -10248,7 +10609,7 @@
           <a:lstStyle/>
           <a:p>
             <a:r>
-              <a:rPr sz="900" b="1">
+              <a:rPr sz="860" b="1">
                 <a:solidFill>
                   <a:srgbClr val="1E2761"/>
                 </a:solidFill>
@@ -10257,7 +10618,7 @@
               <a:t>• </a:t>
             </a:r>
             <a:r>
-              <a:rPr sz="900" b="1">
+              <a:rPr sz="860" b="1">
                 <a:solidFill>
                   <a:srgbClr val="111827"/>
                 </a:solidFill>
@@ -10266,7 +10627,7 @@
               <a:t>3x Faster Problem Resolution: </a:t>
             </a:r>
             <a:r>
-              <a:rPr sz="850">
+              <a:rPr sz="819">
                 <a:solidFill>
                   <a:srgbClr val="475569"/>
                 </a:solidFill>
@@ -10277,12 +10638,15 @@
           </a:p>
           <a:p>
             <a:pPr algn="l">
-              <a:spcBef>
-                <a:spcPts val="450"/>
-              </a:spcBef>
-            </a:pPr>
-            <a:r>
-              <a:rPr sz="900" b="1">
+              <a:lnSpc>
+                <a:spcPts val="1100"/>
+              </a:lnSpc>
+              <a:spcBef>
+                <a:spcPts val="650"/>
+              </a:spcBef>
+            </a:pPr>
+            <a:r>
+              <a:rPr sz="860" b="1">
                 <a:solidFill>
                   <a:srgbClr val="1E2761"/>
                 </a:solidFill>
@@ -10291,7 +10655,7 @@
               <a:t>• </a:t>
             </a:r>
             <a:r>
-              <a:rPr sz="900" b="1">
+              <a:rPr sz="860" b="1">
                 <a:solidFill>
                   <a:srgbClr val="111827"/>
                 </a:solidFill>
@@ -10300,7 +10664,7 @@
               <a:t>85% Higher Confidence: </a:t>
             </a:r>
             <a:r>
-              <a:rPr sz="850">
+              <a:rPr sz="819">
                 <a:solidFill>
                   <a:srgbClr val="475569"/>
                 </a:solidFill>
@@ -10311,12 +10675,15 @@
           </a:p>
           <a:p>
             <a:pPr algn="l">
-              <a:spcBef>
-                <a:spcPts val="450"/>
-              </a:spcBef>
-            </a:pPr>
-            <a:r>
-              <a:rPr sz="900" b="1">
+              <a:lnSpc>
+                <a:spcPts val="1100"/>
+              </a:lnSpc>
+              <a:spcBef>
+                <a:spcPts val="650"/>
+              </a:spcBef>
+            </a:pPr>
+            <a:r>
+              <a:rPr sz="860" b="1">
                 <a:solidFill>
                   <a:srgbClr val="1E2761"/>
                 </a:solidFill>
@@ -10325,7 +10692,7 @@
               <a:t>• </a:t>
             </a:r>
             <a:r>
-              <a:rPr sz="900" b="1">
+              <a:rPr sz="860" b="1">
                 <a:solidFill>
                   <a:srgbClr val="111827"/>
                 </a:solidFill>
@@ -10334,7 +10701,7 @@
               <a:t>Zero Financial Barrier: </a:t>
             </a:r>
             <a:r>
-              <a:rPr sz="850">
+              <a:rPr sz="819">
                 <a:solidFill>
                   <a:srgbClr val="475569"/>
                 </a:solidFill>
@@ -10345,12 +10712,15 @@
           </a:p>
           <a:p>
             <a:pPr algn="l">
-              <a:spcBef>
-                <a:spcPts val="450"/>
-              </a:spcBef>
-            </a:pPr>
-            <a:r>
-              <a:rPr sz="900" b="1">
+              <a:lnSpc>
+                <a:spcPts val="1100"/>
+              </a:lnSpc>
+              <a:spcBef>
+                <a:spcPts val="650"/>
+              </a:spcBef>
+            </a:pPr>
+            <a:r>
+              <a:rPr sz="860" b="1">
                 <a:solidFill>
                   <a:srgbClr val="1E2761"/>
                 </a:solidFill>
@@ -10359,7 +10729,7 @@
               <a:t>• </a:t>
             </a:r>
             <a:r>
-              <a:rPr sz="900" b="1">
+              <a:rPr sz="860" b="1">
                 <a:solidFill>
                   <a:srgbClr val="111827"/>
                 </a:solidFill>
@@ -10368,7 +10738,7 @@
               <a:t>Quantified Skill Growth: </a:t>
             </a:r>
             <a:r>
-              <a:rPr sz="850">
+              <a:rPr sz="819">
                 <a:solidFill>
                   <a:srgbClr val="475569"/>
                 </a:solidFill>
@@ -10379,12 +10749,15 @@
           </a:p>
           <a:p>
             <a:pPr algn="l">
-              <a:spcBef>
-                <a:spcPts val="450"/>
-              </a:spcBef>
-            </a:pPr>
-            <a:r>
-              <a:rPr sz="900" b="1">
+              <a:lnSpc>
+                <a:spcPts val="1100"/>
+              </a:lnSpc>
+              <a:spcBef>
+                <a:spcPts val="650"/>
+              </a:spcBef>
+            </a:pPr>
+            <a:r>
+              <a:rPr sz="860" b="1">
                 <a:solidFill>
                   <a:srgbClr val="1E2761"/>
                 </a:solidFill>
@@ -10393,7 +10766,7 @@
               <a:t>• </a:t>
             </a:r>
             <a:r>
-              <a:rPr sz="900" b="1">
+              <a:rPr sz="860" b="1">
                 <a:solidFill>
                   <a:srgbClr val="111827"/>
                 </a:solidFill>
@@ -10402,7 +10775,7 @@
               <a:t>Context-Switching Eliminated: </a:t>
             </a:r>
             <a:r>
-              <a:rPr sz="850">
+              <a:rPr sz="819">
                 <a:solidFill>
                   <a:srgbClr val="475569"/>
                 </a:solidFill>
@@ -10413,12 +10786,15 @@
           </a:p>
           <a:p>
             <a:pPr algn="l">
-              <a:spcBef>
-                <a:spcPts val="450"/>
-              </a:spcBef>
-            </a:pPr>
-            <a:r>
-              <a:rPr sz="900" b="1">
+              <a:lnSpc>
+                <a:spcPts val="1100"/>
+              </a:lnSpc>
+              <a:spcBef>
+                <a:spcPts val="650"/>
+              </a:spcBef>
+            </a:pPr>
+            <a:r>
+              <a:rPr sz="860" b="1">
                 <a:solidFill>
                   <a:srgbClr val="1E2761"/>
                 </a:solidFill>
@@ -10427,7 +10803,7 @@
               <a:t>• </a:t>
             </a:r>
             <a:r>
-              <a:rPr sz="900" b="1">
+              <a:rPr sz="860" b="1">
                 <a:solidFill>
                   <a:srgbClr val="111827"/>
                 </a:solidFill>
@@ -10436,7 +10812,7 @@
               <a:t>Higher Placement Rates: </a:t>
             </a:r>
             <a:r>
-              <a:rPr sz="850">
+              <a:rPr sz="819">
                 <a:solidFill>
                   <a:srgbClr val="475569"/>
                 </a:solidFill>
@@ -10558,7 +10934,7 @@
           <a:lstStyle/>
           <a:p>
             <a:r>
-              <a:rPr sz="650" b="1">
+              <a:rPr sz="700" b="1">
                 <a:solidFill>
                   <a:srgbClr val="B45309"/>
                 </a:solidFill>
@@ -10574,7 +10950,7 @@
               </a:spcBef>
             </a:pPr>
             <a:r>
-              <a:rPr sz="1050" b="1">
+              <a:rPr sz="1080" b="1">
                 <a:solidFill>
                   <a:srgbClr val="111827"/>
                 </a:solidFill>
@@ -10608,7 +10984,7 @@
           <a:lstStyle/>
           <a:p>
             <a:r>
-              <a:rPr sz="900" b="1">
+              <a:rPr sz="860" b="1">
                 <a:solidFill>
                   <a:srgbClr val="1E2761"/>
                 </a:solidFill>
@@ -10617,7 +10993,7 @@
               <a:t>• </a:t>
             </a:r>
             <a:r>
-              <a:rPr sz="900" b="1">
+              <a:rPr sz="860" b="1">
                 <a:solidFill>
                   <a:srgbClr val="111827"/>
                 </a:solidFill>
@@ -10626,7 +11002,7 @@
               <a:t>Front-End Edge Deploy: </a:t>
             </a:r>
             <a:r>
-              <a:rPr sz="850">
+              <a:rPr sz="819">
                 <a:solidFill>
                   <a:srgbClr val="475569"/>
                 </a:solidFill>
@@ -10637,12 +11013,15 @@
           </a:p>
           <a:p>
             <a:pPr algn="l">
-              <a:spcBef>
-                <a:spcPts val="450"/>
-              </a:spcBef>
-            </a:pPr>
-            <a:r>
-              <a:rPr sz="900" b="1">
+              <a:lnSpc>
+                <a:spcPts val="1100"/>
+              </a:lnSpc>
+              <a:spcBef>
+                <a:spcPts val="650"/>
+              </a:spcBef>
+            </a:pPr>
+            <a:r>
+              <a:rPr sz="860" b="1">
                 <a:solidFill>
                   <a:srgbClr val="1E2761"/>
                 </a:solidFill>
@@ -10651,7 +11030,7 @@
               <a:t>• </a:t>
             </a:r>
             <a:r>
-              <a:rPr sz="900" b="1">
+              <a:rPr sz="860" b="1">
                 <a:solidFill>
                   <a:srgbClr val="111827"/>
                 </a:solidFill>
@@ -10660,7 +11039,7 @@
               <a:t>Stateless Back-End: </a:t>
             </a:r>
             <a:r>
-              <a:rPr sz="850">
+              <a:rPr sz="819">
                 <a:solidFill>
                   <a:srgbClr val="475569"/>
                 </a:solidFill>
@@ -10671,12 +11050,15 @@
           </a:p>
           <a:p>
             <a:pPr algn="l">
-              <a:spcBef>
-                <a:spcPts val="450"/>
-              </a:spcBef>
-            </a:pPr>
-            <a:r>
-              <a:rPr sz="900" b="1">
+              <a:lnSpc>
+                <a:spcPts val="1100"/>
+              </a:lnSpc>
+              <a:spcBef>
+                <a:spcPts val="650"/>
+              </a:spcBef>
+            </a:pPr>
+            <a:r>
+              <a:rPr sz="860" b="1">
                 <a:solidFill>
                   <a:srgbClr val="1E2761"/>
                 </a:solidFill>
@@ -10685,7 +11067,7 @@
               <a:t>• </a:t>
             </a:r>
             <a:r>
-              <a:rPr sz="900" b="1">
+              <a:rPr sz="860" b="1">
                 <a:solidFill>
                   <a:srgbClr val="111827"/>
                 </a:solidFill>
@@ -10694,7 +11076,7 @@
               <a:t>Isolated Execution: </a:t>
             </a:r>
             <a:r>
-              <a:rPr sz="850">
+              <a:rPr sz="819">
                 <a:solidFill>
                   <a:srgbClr val="475569"/>
                 </a:solidFill>
@@ -10705,12 +11087,15 @@
           </a:p>
           <a:p>
             <a:pPr algn="l">
-              <a:spcBef>
-                <a:spcPts val="450"/>
-              </a:spcBef>
-            </a:pPr>
-            <a:r>
-              <a:rPr sz="900" b="1">
+              <a:lnSpc>
+                <a:spcPts val="1100"/>
+              </a:lnSpc>
+              <a:spcBef>
+                <a:spcPts val="650"/>
+              </a:spcBef>
+            </a:pPr>
+            <a:r>
+              <a:rPr sz="860" b="1">
                 <a:solidFill>
                   <a:srgbClr val="1E2761"/>
                 </a:solidFill>
@@ -10719,7 +11104,7 @@
               <a:t>• </a:t>
             </a:r>
             <a:r>
-              <a:rPr sz="900" b="1">
+              <a:rPr sz="860" b="1">
                 <a:solidFill>
                   <a:srgbClr val="111827"/>
                 </a:solidFill>
@@ -10728,7 +11113,7 @@
               <a:t>Database Migration: </a:t>
             </a:r>
             <a:r>
-              <a:rPr sz="850">
+              <a:rPr sz="819">
                 <a:solidFill>
                   <a:srgbClr val="475569"/>
                 </a:solidFill>
@@ -10739,12 +11124,15 @@
           </a:p>
           <a:p>
             <a:pPr algn="l">
-              <a:spcBef>
-                <a:spcPts val="450"/>
-              </a:spcBef>
-            </a:pPr>
-            <a:r>
-              <a:rPr sz="900" b="1">
+              <a:lnSpc>
+                <a:spcPts val="1100"/>
+              </a:lnSpc>
+              <a:spcBef>
+                <a:spcPts val="650"/>
+              </a:spcBef>
+            </a:pPr>
+            <a:r>
+              <a:rPr sz="860" b="1">
                 <a:solidFill>
                   <a:srgbClr val="1E2761"/>
                 </a:solidFill>
@@ -10753,7 +11141,7 @@
               <a:t>• </a:t>
             </a:r>
             <a:r>
-              <a:rPr sz="900" b="1">
+              <a:rPr sz="860" b="1">
                 <a:solidFill>
                   <a:srgbClr val="111827"/>
                 </a:solidFill>
@@ -10762,7 +11150,7 @@
               <a:t>High Load Scalability: </a:t>
             </a:r>
             <a:r>
-              <a:rPr sz="850">
+              <a:rPr sz="819">
                 <a:solidFill>
                   <a:srgbClr val="475569"/>
                 </a:solidFill>
@@ -10773,12 +11161,15 @@
           </a:p>
           <a:p>
             <a:pPr algn="l">
-              <a:spcBef>
-                <a:spcPts val="450"/>
-              </a:spcBef>
-            </a:pPr>
-            <a:r>
-              <a:rPr sz="900" b="1">
+              <a:lnSpc>
+                <a:spcPts val="1100"/>
+              </a:lnSpc>
+              <a:spcBef>
+                <a:spcPts val="650"/>
+              </a:spcBef>
+            </a:pPr>
+            <a:r>
+              <a:rPr sz="860" b="1">
                 <a:solidFill>
                   <a:srgbClr val="1E2761"/>
                 </a:solidFill>
@@ -10787,7 +11178,7 @@
               <a:t>• </a:t>
             </a:r>
             <a:r>
-              <a:rPr sz="900" b="1">
+              <a:rPr sz="860" b="1">
                 <a:solidFill>
                   <a:srgbClr val="111827"/>
                 </a:solidFill>
@@ -10796,7 +11187,7 @@
               <a:t>Zero LLM Bottleneck: </a:t>
             </a:r>
             <a:r>
-              <a:rPr sz="850">
+              <a:rPr sz="819">
                 <a:solidFill>
                   <a:srgbClr val="475569"/>
                 </a:solidFill>
@@ -10918,7 +11309,7 @@
           <a:lstStyle/>
           <a:p>
             <a:r>
-              <a:rPr sz="650" b="1">
+              <a:rPr sz="700" b="1">
                 <a:solidFill>
                   <a:srgbClr val="B45309"/>
                 </a:solidFill>
@@ -10934,7 +11325,7 @@
               </a:spcBef>
             </a:pPr>
             <a:r>
-              <a:rPr sz="1050" b="1">
+              <a:rPr sz="1080" b="1">
                 <a:solidFill>
                   <a:srgbClr val="111827"/>
                 </a:solidFill>
@@ -10968,7 +11359,7 @@
           <a:lstStyle/>
           <a:p>
             <a:r>
-              <a:rPr sz="900" b="1">
+              <a:rPr sz="860" b="1">
                 <a:solidFill>
                   <a:srgbClr val="1E2761"/>
                 </a:solidFill>
@@ -10977,7 +11368,7 @@
               <a:t>• </a:t>
             </a:r>
             <a:r>
-              <a:rPr sz="900" b="1">
+              <a:rPr sz="860" b="1">
                 <a:solidFill>
                   <a:srgbClr val="111827"/>
                 </a:solidFill>
@@ -10986,7 +11377,7 @@
               <a:t>Production Live Today: </a:t>
             </a:r>
             <a:r>
-              <a:rPr sz="850">
+              <a:rPr sz="819">
                 <a:solidFill>
                   <a:srgbClr val="475569"/>
                 </a:solidFill>
@@ -10997,12 +11388,15 @@
           </a:p>
           <a:p>
             <a:pPr algn="l">
-              <a:spcBef>
-                <a:spcPts val="450"/>
-              </a:spcBef>
-            </a:pPr>
-            <a:r>
-              <a:rPr sz="900" b="1">
+              <a:lnSpc>
+                <a:spcPts val="1100"/>
+              </a:lnSpc>
+              <a:spcBef>
+                <a:spcPts val="650"/>
+              </a:spcBef>
+            </a:pPr>
+            <a:r>
+              <a:rPr sz="860" b="1">
                 <a:solidFill>
                   <a:srgbClr val="1E2761"/>
                 </a:solidFill>
@@ -11011,7 +11405,7 @@
               <a:t>• </a:t>
             </a:r>
             <a:r>
-              <a:rPr sz="900" b="1">
+              <a:rPr sz="860" b="1">
                 <a:solidFill>
                   <a:srgbClr val="111827"/>
                 </a:solidFill>
@@ -11020,7 +11414,7 @@
               <a:t>Zero AI API Expenses: </a:t>
             </a:r>
             <a:r>
-              <a:rPr sz="850">
+              <a:rPr sz="819">
                 <a:solidFill>
                   <a:srgbClr val="475569"/>
                 </a:solidFill>
@@ -11031,12 +11425,15 @@
           </a:p>
           <a:p>
             <a:pPr algn="l">
-              <a:spcBef>
-                <a:spcPts val="450"/>
-              </a:spcBef>
-            </a:pPr>
-            <a:r>
-              <a:rPr sz="900" b="1">
+              <a:lnSpc>
+                <a:spcPts val="1100"/>
+              </a:lnSpc>
+              <a:spcBef>
+                <a:spcPts val="650"/>
+              </a:spcBef>
+            </a:pPr>
+            <a:r>
+              <a:rPr sz="860" b="1">
                 <a:solidFill>
                   <a:srgbClr val="1E2761"/>
                 </a:solidFill>
@@ -11045,7 +11442,7 @@
               <a:t>• </a:t>
             </a:r>
             <a:r>
-              <a:rPr sz="900" b="1">
+              <a:rPr sz="860" b="1">
                 <a:solidFill>
                   <a:srgbClr val="111827"/>
                 </a:solidFill>
@@ -11054,7 +11451,7 @@
               <a:t>Ultra-Low Infrastructure: </a:t>
             </a:r>
             <a:r>
-              <a:rPr sz="850">
+              <a:rPr sz="819">
                 <a:solidFill>
                   <a:srgbClr val="475569"/>
                 </a:solidFill>
@@ -11065,12 +11462,15 @@
           </a:p>
           <a:p>
             <a:pPr algn="l">
-              <a:spcBef>
-                <a:spcPts val="450"/>
-              </a:spcBef>
-            </a:pPr>
-            <a:r>
-              <a:rPr sz="900" b="1">
+              <a:lnSpc>
+                <a:spcPts val="1100"/>
+              </a:lnSpc>
+              <a:spcBef>
+                <a:spcPts val="650"/>
+              </a:spcBef>
+            </a:pPr>
+            <a:r>
+              <a:rPr sz="860" b="1">
                 <a:solidFill>
                   <a:srgbClr val="1E2761"/>
                 </a:solidFill>
@@ -11079,7 +11479,7 @@
               <a:t>• </a:t>
             </a:r>
             <a:r>
-              <a:rPr sz="900" b="1">
+              <a:rPr sz="860" b="1">
                 <a:solidFill>
                   <a:srgbClr val="111827"/>
                 </a:solidFill>
@@ -11088,7 +11488,7 @@
               <a:t>Open Source Repository: </a:t>
             </a:r>
             <a:r>
-              <a:rPr sz="850">
+              <a:rPr sz="819">
                 <a:solidFill>
                   <a:srgbClr val="475569"/>
                 </a:solidFill>
@@ -11099,12 +11499,15 @@
           </a:p>
           <a:p>
             <a:pPr algn="l">
-              <a:spcBef>
-                <a:spcPts val="450"/>
-              </a:spcBef>
-            </a:pPr>
-            <a:r>
-              <a:rPr sz="900" b="1">
+              <a:lnSpc>
+                <a:spcPts val="1100"/>
+              </a:lnSpc>
+              <a:spcBef>
+                <a:spcPts val="650"/>
+              </a:spcBef>
+            </a:pPr>
+            <a:r>
+              <a:rPr sz="860" b="1">
                 <a:solidFill>
                   <a:srgbClr val="1E2761"/>
                 </a:solidFill>
@@ -11113,7 +11516,7 @@
               <a:t>• </a:t>
             </a:r>
             <a:r>
-              <a:rPr sz="900" b="1">
+              <a:rPr sz="860" b="1">
                 <a:solidFill>
                   <a:srgbClr val="111827"/>
                 </a:solidFill>
@@ -11122,7 +11525,7 @@
               <a:t>No Cloud Vendor Lock-In: </a:t>
             </a:r>
             <a:r>
-              <a:rPr sz="850">
+              <a:rPr sz="819">
                 <a:solidFill>
                   <a:srgbClr val="475569"/>
                 </a:solidFill>
@@ -11133,12 +11536,15 @@
           </a:p>
           <a:p>
             <a:pPr algn="l">
-              <a:spcBef>
-                <a:spcPts val="450"/>
-              </a:spcBef>
-            </a:pPr>
-            <a:r>
-              <a:rPr sz="900" b="1">
+              <a:lnSpc>
+                <a:spcPts val="1100"/>
+              </a:lnSpc>
+              <a:spcBef>
+                <a:spcPts val="650"/>
+              </a:spcBef>
+            </a:pPr>
+            <a:r>
+              <a:rPr sz="860" b="1">
                 <a:solidFill>
                   <a:srgbClr val="1E2761"/>
                 </a:solidFill>
@@ -11147,7 +11553,7 @@
               <a:t>• </a:t>
             </a:r>
             <a:r>
-              <a:rPr sz="900" b="1">
+              <a:rPr sz="860" b="1">
                 <a:solidFill>
                   <a:srgbClr val="111827"/>
                 </a:solidFill>
@@ -11156,7 +11562,7 @@
               <a:t>Comprehensive Test Suite: </a:t>
             </a:r>
             <a:r>
-              <a:rPr sz="850">
+              <a:rPr sz="819">
                 <a:solidFill>
                   <a:srgbClr val="475569"/>
                 </a:solidFill>
@@ -11265,6 +11671,9 @@
           </a:p>
           <a:p>
             <a:pPr algn="l">
+              <a:lnSpc>
+                <a:spcPts val="1250"/>
+              </a:lnSpc>
               <a:spcBef>
                 <a:spcPts val="300"/>
               </a:spcBef>
@@ -11276,7 +11685,25 @@
                 </a:solidFill>
                 <a:latin typeface="Spectral Medium"/>
               </a:rPr>
-              <a:t>CodeForge AI redefines competitive programming by combining production-grade code execution with AI coaching, mock interviews, system design evaluation, and ELO-rated contests — all in one free platform. Built in 48 hours. Fully deployed. Ready to scale.</a:t>
+              <a:t>CodeForge AI redefines competitive programming by combining a seeded bank of </a:t>
+            </a:r>
+            <a:r>
+              <a:rPr sz="1100" b="1">
+                <a:solidFill>
+                  <a:srgbClr val="FF0000"/>
+                </a:solidFill>
+                <a:latin typeface="Lexend"/>
+              </a:rPr>
+              <a:t>400+ LeetCode DSA Problems</a:t>
+            </a:r>
+            <a:r>
+              <a:rPr sz="1050">
+                <a:solidFill>
+                  <a:srgbClr val="475569"/>
+                </a:solidFill>
+                <a:latin typeface="Spectral Medium"/>
+              </a:rPr>
+              <a:t> with production-grade code execution, AI coaching, mock interviews, system design, and ELO-rated contests. Fully deployed. Ready to scale.</a:t>
             </a:r>
           </a:p>
         </p:txBody>
@@ -11435,7 +11862,7 @@
           <a:lstStyle/>
           <a:p>
             <a:r>
-              <a:rPr sz="1050" b="1">
+              <a:rPr sz="1080" b="1">
                 <a:solidFill>
                   <a:srgbClr val="FFFFFF"/>
                 </a:solidFill>
@@ -11469,7 +11896,7 @@
           <a:lstStyle/>
           <a:p>
             <a:r>
-              <a:rPr sz="800" b="1">
+              <a:rPr sz="819" b="1">
                 <a:solidFill>
                   <a:srgbClr val="F2A93B"/>
                 </a:solidFill>
@@ -11503,8 +11930,82 @@
           <a:lstStyle/>
           <a:p>
             <a:r>
+              <a:rPr sz="860" b="1">
+                <a:solidFill>
+                  <a:srgbClr val="F2A93B"/>
+                </a:solidFill>
+                <a:latin typeface="Roboto"/>
+              </a:rPr>
+              <a:t>▸ </a:t>
+            </a:r>
+            <a:r>
+              <a:rPr sz="860" b="1">
+                <a:solidFill>
+                  <a:srgbClr val="111827"/>
+                </a:solidFill>
+                <a:latin typeface="Roboto SemiBold"/>
+              </a:rPr>
+              <a:t>Instant Free Registration: </a:t>
+            </a:r>
+            <a:r>
+              <a:rPr sz="819">
+                <a:solidFill>
+                  <a:srgbClr val="475569"/>
+                </a:solidFill>
+                <a:latin typeface="Roboto"/>
+              </a:rPr>
+              <a:t>Create account in seconds — no credit card or subscription needed</a:t>
+            </a:r>
+          </a:p>
+          <a:p>
+            <a:pPr algn="l">
+              <a:lnSpc>
+                <a:spcPts val="1060"/>
+              </a:lnSpc>
+              <a:spcBef>
+                <a:spcPts val="400"/>
+              </a:spcBef>
+            </a:pPr>
+            <a:r>
+              <a:rPr sz="860" b="1">
+                <a:solidFill>
+                  <a:srgbClr val="F2A93B"/>
+                </a:solidFill>
+                <a:latin typeface="Roboto"/>
+              </a:rPr>
+              <a:t>▸ </a:t>
+            </a:r>
+            <a:r>
               <a:rPr sz="880" b="1">
                 <a:solidFill>
+                  <a:srgbClr val="FF0000"/>
+                </a:solidFill>
+                <a:latin typeface="Lexend"/>
+              </a:rPr>
+              <a:t>400+ DSA Problem Library: </a:t>
+            </a:r>
+            <a:r>
+              <a:rPr sz="819">
+                <a:solidFill>
+                  <a:srgbClr val="475569"/>
+                </a:solidFill>
+                <a:latin typeface="Roboto"/>
+              </a:rPr>
+              <a:t>Solve 400+ curated problems in Monaco Editor with Piston compilation</a:t>
+            </a:r>
+          </a:p>
+          <a:p>
+            <a:pPr algn="l">
+              <a:lnSpc>
+                <a:spcPts val="1060"/>
+              </a:lnSpc>
+              <a:spcBef>
+                <a:spcPts val="400"/>
+              </a:spcBef>
+            </a:pPr>
+            <a:r>
+              <a:rPr sz="860" b="1">
+                <a:solidFill>
                   <a:srgbClr val="F2A93B"/>
                 </a:solidFill>
                 <a:latin typeface="Roboto"/>
@@ -11512,32 +12013,35 @@
               <a:t>▸ </a:t>
             </a:r>
             <a:r>
-              <a:rPr sz="880" b="1">
+              <a:rPr sz="860" b="1">
                 <a:solidFill>
                   <a:srgbClr val="111827"/>
                 </a:solidFill>
                 <a:latin typeface="Roboto SemiBold"/>
               </a:rPr>
-              <a:t>Instant Free Registration: </a:t>
-            </a:r>
-            <a:r>
-              <a:rPr sz="840">
-                <a:solidFill>
-                  <a:srgbClr val="475569"/>
-                </a:solidFill>
-                <a:latin typeface="Roboto"/>
-              </a:rPr>
-              <a:t>Create account in seconds — no credit card or subscription needed</a:t>
-            </a:r>
-          </a:p>
-          <a:p>
-            <a:pPr algn="l">
-              <a:spcBef>
-                <a:spcPts val="450"/>
-              </a:spcBef>
-            </a:pPr>
-            <a:r>
-              <a:rPr sz="880" b="1">
+              <a:t>3-Tier Socratic AI Tutor: </a:t>
+            </a:r>
+            <a:r>
+              <a:rPr sz="819">
+                <a:solidFill>
+                  <a:srgbClr val="475569"/>
+                </a:solidFill>
+                <a:latin typeface="Roboto"/>
+              </a:rPr>
+              <a:t>Receive progressive hints (Approach → Algorithm → Code) without spoiling answers</a:t>
+            </a:r>
+          </a:p>
+          <a:p>
+            <a:pPr algn="l">
+              <a:lnSpc>
+                <a:spcPts val="1060"/>
+              </a:lnSpc>
+              <a:spcBef>
+                <a:spcPts val="400"/>
+              </a:spcBef>
+            </a:pPr>
+            <a:r>
+              <a:rPr sz="860" b="1">
                 <a:solidFill>
                   <a:srgbClr val="F2A93B"/>
                 </a:solidFill>
@@ -11546,32 +12050,35 @@
               <a:t>▸ </a:t>
             </a:r>
             <a:r>
-              <a:rPr sz="880" b="1">
+              <a:rPr sz="860" b="1">
                 <a:solidFill>
                   <a:srgbClr val="111827"/>
                 </a:solidFill>
                 <a:latin typeface="Roboto SemiBold"/>
               </a:rPr>
-              <a:t>52+ DSA Problem Library: </a:t>
-            </a:r>
-            <a:r>
-              <a:rPr sz="840">
-                <a:solidFill>
-                  <a:srgbClr val="475569"/>
-                </a:solidFill>
-                <a:latin typeface="Roboto"/>
-              </a:rPr>
-              <a:t>Solve curated problems in Monaco Editor with instant Piston API compilation</a:t>
-            </a:r>
-          </a:p>
-          <a:p>
-            <a:pPr algn="l">
-              <a:spcBef>
-                <a:spcPts val="450"/>
-              </a:spcBef>
-            </a:pPr>
-            <a:r>
-              <a:rPr sz="880" b="1">
+              <a:t>Live ELO Timed Contests: </a:t>
+            </a:r>
+            <a:r>
+              <a:rPr sz="819">
+                <a:solidFill>
+                  <a:srgbClr val="475569"/>
+                </a:solidFill>
+                <a:latin typeface="Roboto"/>
+              </a:rPr>
+              <a:t>Join rated coding competitions, submit solutions, and climb global leaderboards</a:t>
+            </a:r>
+          </a:p>
+          <a:p>
+            <a:pPr algn="l">
+              <a:lnSpc>
+                <a:spcPts val="1060"/>
+              </a:lnSpc>
+              <a:spcBef>
+                <a:spcPts val="400"/>
+              </a:spcBef>
+            </a:pPr>
+            <a:r>
+              <a:rPr sz="860" b="1">
                 <a:solidFill>
                   <a:srgbClr val="F2A93B"/>
                 </a:solidFill>
@@ -11580,32 +12087,35 @@
               <a:t>▸ </a:t>
             </a:r>
             <a:r>
-              <a:rPr sz="880" b="1">
+              <a:rPr sz="860" b="1">
                 <a:solidFill>
                   <a:srgbClr val="111827"/>
                 </a:solidFill>
                 <a:latin typeface="Roboto SemiBold"/>
               </a:rPr>
-              <a:t>3-Tier Socratic AI Tutor: </a:t>
-            </a:r>
-            <a:r>
-              <a:rPr sz="840">
-                <a:solidFill>
-                  <a:srgbClr val="475569"/>
-                </a:solidFill>
-                <a:latin typeface="Roboto"/>
-              </a:rPr>
-              <a:t>Receive progressive hints (Approach → Algorithm → Code) without spoiling answers</a:t>
-            </a:r>
-          </a:p>
-          <a:p>
-            <a:pPr algn="l">
-              <a:spcBef>
-                <a:spcPts val="450"/>
-              </a:spcBef>
-            </a:pPr>
-            <a:r>
-              <a:rPr sz="880" b="1">
+              <a:t>AI Mock Interview Suite: </a:t>
+            </a:r>
+            <a:r>
+              <a:rPr sz="819">
+                <a:solidFill>
+                  <a:srgbClr val="475569"/>
+                </a:solidFill>
+                <a:latin typeface="Roboto"/>
+              </a:rPr>
+              <a:t>Engage in technical interviews and receive structured Hire / Strong Hire verdicts</a:t>
+            </a:r>
+          </a:p>
+          <a:p>
+            <a:pPr algn="l">
+              <a:lnSpc>
+                <a:spcPts val="1060"/>
+              </a:lnSpc>
+              <a:spcBef>
+                <a:spcPts val="400"/>
+              </a:spcBef>
+            </a:pPr>
+            <a:r>
+              <a:rPr sz="860" b="1">
                 <a:solidFill>
                   <a:srgbClr val="F2A93B"/>
                 </a:solidFill>
@@ -11614,32 +12124,35 @@
               <a:t>▸ </a:t>
             </a:r>
             <a:r>
-              <a:rPr sz="880" b="1">
+              <a:rPr sz="860" b="1">
                 <a:solidFill>
                   <a:srgbClr val="111827"/>
                 </a:solidFill>
                 <a:latin typeface="Roboto SemiBold"/>
               </a:rPr>
-              <a:t>Live ELO Timed Contests: </a:t>
-            </a:r>
-            <a:r>
-              <a:rPr sz="840">
-                <a:solidFill>
-                  <a:srgbClr val="475569"/>
-                </a:solidFill>
-                <a:latin typeface="Roboto"/>
-              </a:rPr>
-              <a:t>Join rated coding competitions, submit solutions, and climb global leaderboards</a:t>
-            </a:r>
-          </a:p>
-          <a:p>
-            <a:pPr algn="l">
-              <a:spcBef>
-                <a:spcPts val="450"/>
-              </a:spcBef>
-            </a:pPr>
-            <a:r>
-              <a:rPr sz="880" b="1">
+              <a:t>System Design Evaluator: </a:t>
+            </a:r>
+            <a:r>
+              <a:rPr sz="819">
+                <a:solidFill>
+                  <a:srgbClr val="475569"/>
+                </a:solidFill>
+                <a:latin typeface="Roboto"/>
+              </a:rPr>
+              <a:t>Submit architecture designs for automated scaling &amp; tradeoff evaluation</a:t>
+            </a:r>
+          </a:p>
+          <a:p>
+            <a:pPr algn="l">
+              <a:lnSpc>
+                <a:spcPts val="1060"/>
+              </a:lnSpc>
+              <a:spcBef>
+                <a:spcPts val="400"/>
+              </a:spcBef>
+            </a:pPr>
+            <a:r>
+              <a:rPr sz="860" b="1">
                 <a:solidFill>
                   <a:srgbClr val="F2A93B"/>
                 </a:solidFill>
@@ -11648,84 +12161,16 @@
               <a:t>▸ </a:t>
             </a:r>
             <a:r>
-              <a:rPr sz="880" b="1">
+              <a:rPr sz="860" b="1">
                 <a:solidFill>
                   <a:srgbClr val="111827"/>
                 </a:solidFill>
                 <a:latin typeface="Roboto SemiBold"/>
               </a:rPr>
-              <a:t>AI Mock Interview Suite: </a:t>
-            </a:r>
-            <a:r>
-              <a:rPr sz="840">
-                <a:solidFill>
-                  <a:srgbClr val="475569"/>
-                </a:solidFill>
-                <a:latin typeface="Roboto"/>
-              </a:rPr>
-              <a:t>Engage in technical interviews and receive structured Hire / Strong Hire verdicts</a:t>
-            </a:r>
-          </a:p>
-          <a:p>
-            <a:pPr algn="l">
-              <a:spcBef>
-                <a:spcPts val="450"/>
-              </a:spcBef>
-            </a:pPr>
-            <a:r>
-              <a:rPr sz="880" b="1">
-                <a:solidFill>
-                  <a:srgbClr val="F2A93B"/>
-                </a:solidFill>
-                <a:latin typeface="Roboto"/>
-              </a:rPr>
-              <a:t>▸ </a:t>
-            </a:r>
-            <a:r>
-              <a:rPr sz="880" b="1">
-                <a:solidFill>
-                  <a:srgbClr val="111827"/>
-                </a:solidFill>
-                <a:latin typeface="Roboto SemiBold"/>
-              </a:rPr>
-              <a:t>System Design Evaluator: </a:t>
-            </a:r>
-            <a:r>
-              <a:rPr sz="840">
-                <a:solidFill>
-                  <a:srgbClr val="475569"/>
-                </a:solidFill>
-                <a:latin typeface="Roboto"/>
-              </a:rPr>
-              <a:t>Submit architecture designs for automated scaling &amp; tradeoff evaluation</a:t>
-            </a:r>
-          </a:p>
-          <a:p>
-            <a:pPr algn="l">
-              <a:spcBef>
-                <a:spcPts val="450"/>
-              </a:spcBef>
-            </a:pPr>
-            <a:r>
-              <a:rPr sz="880" b="1">
-                <a:solidFill>
-                  <a:srgbClr val="F2A93B"/>
-                </a:solidFill>
-                <a:latin typeface="Roboto"/>
-              </a:rPr>
-              <a:t>▸ </a:t>
-            </a:r>
-            <a:r>
-              <a:rPr sz="880" b="1">
-                <a:solidFill>
-                  <a:srgbClr val="111827"/>
-                </a:solidFill>
-                <a:latin typeface="Roboto SemiBold"/>
-              </a:rPr>
               <a:t>Full Progress Analytics: </a:t>
             </a:r>
             <a:r>
-              <a:rPr sz="840">
+              <a:rPr sz="819">
                 <a:solidFill>
                   <a:srgbClr val="475569"/>
                 </a:solidFill>
@@ -11847,7 +12292,7 @@
           <a:lstStyle/>
           <a:p>
             <a:r>
-              <a:rPr sz="1050" b="1">
+              <a:rPr sz="1080" b="1">
                 <a:solidFill>
                   <a:srgbClr val="FFFFFF"/>
                 </a:solidFill>
@@ -11881,7 +12326,7 @@
           <a:lstStyle/>
           <a:p>
             <a:r>
-              <a:rPr sz="800" b="1">
+              <a:rPr sz="819" b="1">
                 <a:solidFill>
                   <a:srgbClr val="F2A93B"/>
                 </a:solidFill>
@@ -11915,8 +12360,45 @@
           <a:lstStyle/>
           <a:p>
             <a:r>
+              <a:rPr sz="860" b="1">
+                <a:solidFill>
+                  <a:srgbClr val="F2A93B"/>
+                </a:solidFill>
+                <a:latin typeface="Roboto"/>
+              </a:rPr>
+              <a:t>▸ </a:t>
+            </a:r>
+            <a:r>
               <a:rPr sz="880" b="1">
                 <a:solidFill>
+                  <a:srgbClr val="FF0000"/>
+                </a:solidFill>
+                <a:latin typeface="Lexend"/>
+              </a:rPr>
+              <a:t>400+ Seeded DSA Problems: </a:t>
+            </a:r>
+            <a:r>
+              <a:rPr sz="819">
+                <a:solidFill>
+                  <a:srgbClr val="475569"/>
+                </a:solidFill>
+                <a:latin typeface="Roboto"/>
+              </a:rPr>
+              <a:t>Complete LeetCode problem dataset loaded with test suites &amp; solutions</a:t>
+            </a:r>
+          </a:p>
+          <a:p>
+            <a:pPr algn="l">
+              <a:lnSpc>
+                <a:spcPts val="1060"/>
+              </a:lnSpc>
+              <a:spcBef>
+                <a:spcPts val="400"/>
+              </a:spcBef>
+            </a:pPr>
+            <a:r>
+              <a:rPr sz="860" b="1">
+                <a:solidFill>
                   <a:srgbClr val="F2A93B"/>
                 </a:solidFill>
                 <a:latin typeface="Roboto"/>
@@ -11924,32 +12406,35 @@
               <a:t>▸ </a:t>
             </a:r>
             <a:r>
-              <a:rPr sz="880" b="1">
+              <a:rPr sz="860" b="1">
                 <a:solidFill>
                   <a:srgbClr val="111827"/>
                 </a:solidFill>
                 <a:latin typeface="Roboto SemiBold"/>
               </a:rPr>
-              <a:t>52+ Seeded Problems: </a:t>
-            </a:r>
-            <a:r>
-              <a:rPr sz="840">
-                <a:solidFill>
-                  <a:srgbClr val="475569"/>
-                </a:solidFill>
-                <a:latin typeface="Roboto"/>
-              </a:rPr>
-              <a:t>Complete DSA problem bank populated with edge-case test suites &amp; solutions</a:t>
-            </a:r>
-          </a:p>
-          <a:p>
-            <a:pPr algn="l">
-              <a:spcBef>
-                <a:spcPts val="450"/>
-              </a:spcBef>
-            </a:pPr>
-            <a:r>
-              <a:rPr sz="880" b="1">
+              <a:t>Full REST API Architecture: </a:t>
+            </a:r>
+            <a:r>
+              <a:rPr sz="819">
+                <a:solidFill>
+                  <a:srgbClr val="475569"/>
+                </a:solidFill>
+                <a:latin typeface="Roboto"/>
+              </a:rPr>
+              <a:t>Comprehensive API endpoints built with Next.js 14 App Router &amp; TypeScript</a:t>
+            </a:r>
+          </a:p>
+          <a:p>
+            <a:pPr algn="l">
+              <a:lnSpc>
+                <a:spcPts val="1060"/>
+              </a:lnSpc>
+              <a:spcBef>
+                <a:spcPts val="400"/>
+              </a:spcBef>
+            </a:pPr>
+            <a:r>
+              <a:rPr sz="860" b="1">
                 <a:solidFill>
                   <a:srgbClr val="F2A93B"/>
                 </a:solidFill>
@@ -11958,32 +12443,35 @@
               <a:t>▸ </a:t>
             </a:r>
             <a:r>
-              <a:rPr sz="880" b="1">
+              <a:rPr sz="860" b="1">
                 <a:solidFill>
                   <a:srgbClr val="111827"/>
                 </a:solidFill>
                 <a:latin typeface="Roboto SemiBold"/>
               </a:rPr>
-              <a:t>Full REST API Architecture: </a:t>
-            </a:r>
-            <a:r>
-              <a:rPr sz="840">
-                <a:solidFill>
-                  <a:srgbClr val="475569"/>
-                </a:solidFill>
-                <a:latin typeface="Roboto"/>
-              </a:rPr>
-              <a:t>Comprehensive API endpoints built with Next.js 14 App Router &amp; TypeScript</a:t>
-            </a:r>
-          </a:p>
-          <a:p>
-            <a:pPr algn="l">
-              <a:spcBef>
-                <a:spcPts val="450"/>
-              </a:spcBef>
-            </a:pPr>
-            <a:r>
-              <a:rPr sz="880" b="1">
+              <a:t>Prisma Schema &amp; Migrations: </a:t>
+            </a:r>
+            <a:r>
+              <a:rPr sz="819">
+                <a:solidFill>
+                  <a:srgbClr val="475569"/>
+                </a:solidFill>
+                <a:latin typeface="Roboto"/>
+              </a:rPr>
+              <a:t>Fully modeled relational database schema ready for SQLite or PostgreSQL</a:t>
+            </a:r>
+          </a:p>
+          <a:p>
+            <a:pPr algn="l">
+              <a:lnSpc>
+                <a:spcPts val="1060"/>
+              </a:lnSpc>
+              <a:spcBef>
+                <a:spcPts val="400"/>
+              </a:spcBef>
+            </a:pPr>
+            <a:r>
+              <a:rPr sz="860" b="1">
                 <a:solidFill>
                   <a:srgbClr val="F2A93B"/>
                 </a:solidFill>
@@ -11992,32 +12480,35 @@
               <a:t>▸ </a:t>
             </a:r>
             <a:r>
-              <a:rPr sz="880" b="1">
+              <a:rPr sz="860" b="1">
                 <a:solidFill>
                   <a:srgbClr val="111827"/>
                 </a:solidFill>
                 <a:latin typeface="Roboto SemiBold"/>
               </a:rPr>
-              <a:t>Prisma Schema &amp; Migrations: </a:t>
-            </a:r>
-            <a:r>
-              <a:rPr sz="840">
-                <a:solidFill>
-                  <a:srgbClr val="475569"/>
-                </a:solidFill>
-                <a:latin typeface="Roboto"/>
-              </a:rPr>
-              <a:t>Fully modeled relational database schema ready for SQLite or PostgreSQL</a:t>
-            </a:r>
-          </a:p>
-          <a:p>
-            <a:pPr algn="l">
-              <a:spcBef>
-                <a:spcPts val="450"/>
-              </a:spcBef>
-            </a:pPr>
-            <a:r>
-              <a:rPr sz="880" b="1">
+              <a:t>Automated Database Seeding: </a:t>
+            </a:r>
+            <a:r>
+              <a:rPr sz="819">
+                <a:solidFill>
+                  <a:srgbClr val="475569"/>
+                </a:solidFill>
+                <a:latin typeface="Roboto"/>
+              </a:rPr>
+              <a:t>One-command seed scripts loading all 400+ problems, company tags &amp; test cases</a:t>
+            </a:r>
+          </a:p>
+          <a:p>
+            <a:pPr algn="l">
+              <a:lnSpc>
+                <a:spcPts val="1060"/>
+              </a:lnSpc>
+              <a:spcBef>
+                <a:spcPts val="400"/>
+              </a:spcBef>
+            </a:pPr>
+            <a:r>
+              <a:rPr sz="860" b="1">
                 <a:solidFill>
                   <a:srgbClr val="F2A93B"/>
                 </a:solidFill>
@@ -12026,32 +12517,35 @@
               <a:t>▸ </a:t>
             </a:r>
             <a:r>
-              <a:rPr sz="880" b="1">
+              <a:rPr sz="860" b="1">
                 <a:solidFill>
                   <a:srgbClr val="111827"/>
                 </a:solidFill>
                 <a:latin typeface="Roboto SemiBold"/>
               </a:rPr>
-              <a:t>Automated Database Seeding: </a:t>
-            </a:r>
-            <a:r>
-              <a:rPr sz="840">
-                <a:solidFill>
-                  <a:srgbClr val="475569"/>
-                </a:solidFill>
-                <a:latin typeface="Roboto"/>
-              </a:rPr>
-              <a:t>One-command seed scripts loading all problems, company tags &amp; test cases</a:t>
-            </a:r>
-          </a:p>
-          <a:p>
-            <a:pPr algn="l">
-              <a:spcBef>
-                <a:spcPts val="450"/>
-              </a:spcBef>
-            </a:pPr>
-            <a:r>
-              <a:rPr sz="880" b="1">
+              <a:t>End-to-End Test Suite: </a:t>
+            </a:r>
+            <a:r>
+              <a:rPr sz="819">
+                <a:solidFill>
+                  <a:srgbClr val="475569"/>
+                </a:solidFill>
+                <a:latin typeface="Roboto"/>
+              </a:rPr>
+              <a:t>Integration tests validating authentication, code execution &amp; contest scoring</a:t>
+            </a:r>
+          </a:p>
+          <a:p>
+            <a:pPr algn="l">
+              <a:lnSpc>
+                <a:spcPts val="1060"/>
+              </a:lnSpc>
+              <a:spcBef>
+                <a:spcPts val="400"/>
+              </a:spcBef>
+            </a:pPr>
+            <a:r>
+              <a:rPr sz="860" b="1">
                 <a:solidFill>
                   <a:srgbClr val="F2A93B"/>
                 </a:solidFill>
@@ -12060,32 +12554,35 @@
               <a:t>▸ </a:t>
             </a:r>
             <a:r>
-              <a:rPr sz="880" b="1">
+              <a:rPr sz="860" b="1">
                 <a:solidFill>
                   <a:srgbClr val="111827"/>
                 </a:solidFill>
                 <a:latin typeface="Roboto SemiBold"/>
               </a:rPr>
-              <a:t>End-to-End Test Suite: </a:t>
-            </a:r>
-            <a:r>
-              <a:rPr sz="840">
-                <a:solidFill>
-                  <a:srgbClr val="475569"/>
-                </a:solidFill>
-                <a:latin typeface="Roboto"/>
-              </a:rPr>
-              <a:t>Integration tests validating authentication, code execution &amp; contest scoring</a:t>
-            </a:r>
-          </a:p>
-          <a:p>
-            <a:pPr algn="l">
-              <a:spcBef>
-                <a:spcPts val="450"/>
-              </a:spcBef>
-            </a:pPr>
-            <a:r>
-              <a:rPr sz="880" b="1">
+              <a:t>100% Open Source (MIT): </a:t>
+            </a:r>
+            <a:r>
+              <a:rPr sz="819">
+                <a:solidFill>
+                  <a:srgbClr val="475569"/>
+                </a:solidFill>
+                <a:latin typeface="Roboto"/>
+              </a:rPr>
+              <a:t>Fork the repo, contribute new features, or deploy your own custom instance</a:t>
+            </a:r>
+          </a:p>
+          <a:p>
+            <a:pPr algn="l">
+              <a:lnSpc>
+                <a:spcPts val="1060"/>
+              </a:lnSpc>
+              <a:spcBef>
+                <a:spcPts val="400"/>
+              </a:spcBef>
+            </a:pPr>
+            <a:r>
+              <a:rPr sz="860" b="1">
                 <a:solidFill>
                   <a:srgbClr val="F2A93B"/>
                 </a:solidFill>
@@ -12094,50 +12591,16 @@
               <a:t>▸ </a:t>
             </a:r>
             <a:r>
-              <a:rPr sz="880" b="1">
+              <a:rPr sz="860" b="1">
                 <a:solidFill>
                   <a:srgbClr val="111827"/>
                 </a:solidFill>
                 <a:latin typeface="Roboto SemiBold"/>
               </a:rPr>
-              <a:t>100% Open Source (MIT): </a:t>
-            </a:r>
-            <a:r>
-              <a:rPr sz="840">
-                <a:solidFill>
-                  <a:srgbClr val="475569"/>
-                </a:solidFill>
-                <a:latin typeface="Roboto"/>
-              </a:rPr>
-              <a:t>Fork the repo, contribute new features, or deploy your own custom instance</a:t>
-            </a:r>
-          </a:p>
-          <a:p>
-            <a:pPr algn="l">
-              <a:spcBef>
-                <a:spcPts val="450"/>
-              </a:spcBef>
-            </a:pPr>
-            <a:r>
-              <a:rPr sz="880" b="1">
-                <a:solidFill>
-                  <a:srgbClr val="F2A93B"/>
-                </a:solidFill>
-                <a:latin typeface="Roboto"/>
-              </a:rPr>
-              <a:t>▸ </a:t>
-            </a:r>
-            <a:r>
-              <a:rPr sz="880" b="1">
-                <a:solidFill>
-                  <a:srgbClr val="111827"/>
-                </a:solidFill>
-                <a:latin typeface="Roboto SemiBold"/>
-              </a:rPr>
               <a:t>Clean Modular Codebase: </a:t>
             </a:r>
             <a:r>
-              <a:rPr sz="840">
+              <a:rPr sz="819">
                 <a:solidFill>
                   <a:srgbClr val="475569"/>
                 </a:solidFill>
@@ -12259,7 +12722,7 @@
           <a:lstStyle/>
           <a:p>
             <a:r>
-              <a:rPr sz="1050" b="1">
+              <a:rPr sz="1080" b="1">
                 <a:solidFill>
                   <a:srgbClr val="FFFFFF"/>
                 </a:solidFill>
@@ -12293,7 +12756,7 @@
           <a:lstStyle/>
           <a:p>
             <a:r>
-              <a:rPr sz="800" b="1">
+              <a:rPr sz="819" b="1">
                 <a:solidFill>
                   <a:srgbClr val="F2A93B"/>
                 </a:solidFill>
@@ -12327,7 +12790,7 @@
           <a:lstStyle/>
           <a:p>
             <a:r>
-              <a:rPr sz="880" b="1">
+              <a:rPr sz="860" b="1">
                 <a:solidFill>
                   <a:srgbClr val="F2A93B"/>
                 </a:solidFill>
@@ -12336,7 +12799,7 @@
               <a:t>▸ </a:t>
             </a:r>
             <a:r>
-              <a:rPr sz="880" b="1">
+              <a:rPr sz="860" b="1">
                 <a:solidFill>
                   <a:srgbClr val="111827"/>
                 </a:solidFill>
@@ -12345,7 +12808,7 @@
               <a:t>vs LeetCode &amp; HackerRank: </a:t>
             </a:r>
             <a:r>
-              <a:rPr sz="840">
+              <a:rPr sz="819">
                 <a:solidFill>
                   <a:srgbClr val="475569"/>
                 </a:solidFill>
@@ -12356,12 +12819,15 @@
           </a:p>
           <a:p>
             <a:pPr algn="l">
-              <a:spcBef>
-                <a:spcPts val="450"/>
-              </a:spcBef>
-            </a:pPr>
-            <a:r>
-              <a:rPr sz="880" b="1">
+              <a:lnSpc>
+                <a:spcPts val="1060"/>
+              </a:lnSpc>
+              <a:spcBef>
+                <a:spcPts val="400"/>
+              </a:spcBef>
+            </a:pPr>
+            <a:r>
+              <a:rPr sz="860" b="1">
                 <a:solidFill>
                   <a:srgbClr val="F2A93B"/>
                 </a:solidFill>
@@ -12370,7 +12836,7 @@
               <a:t>▸ </a:t>
             </a:r>
             <a:r>
-              <a:rPr sz="880" b="1">
+              <a:rPr sz="860" b="1">
                 <a:solidFill>
                   <a:srgbClr val="111827"/>
                 </a:solidFill>
@@ -12379,7 +12845,7 @@
               <a:t>vs ChatGPT &amp; Generic AI: </a:t>
             </a:r>
             <a:r>
-              <a:rPr sz="840">
+              <a:rPr sz="819">
                 <a:solidFill>
                   <a:srgbClr val="475569"/>
                 </a:solidFill>
@@ -12390,12 +12856,15 @@
           </a:p>
           <a:p>
             <a:pPr algn="l">
-              <a:spcBef>
-                <a:spcPts val="450"/>
-              </a:spcBef>
-            </a:pPr>
-            <a:r>
-              <a:rPr sz="880" b="1">
+              <a:lnSpc>
+                <a:spcPts val="1060"/>
+              </a:lnSpc>
+              <a:spcBef>
+                <a:spcPts val="400"/>
+              </a:spcBef>
+            </a:pPr>
+            <a:r>
+              <a:rPr sz="860" b="1">
                 <a:solidFill>
                   <a:srgbClr val="F2A93B"/>
                 </a:solidFill>
@@ -12404,7 +12873,7 @@
               <a:t>▸ </a:t>
             </a:r>
             <a:r>
-              <a:rPr sz="880" b="1">
+              <a:rPr sz="860" b="1">
                 <a:solidFill>
                   <a:srgbClr val="111827"/>
                 </a:solidFill>
@@ -12413,7 +12882,7 @@
               <a:t>vs Expensive Bootcamps: </a:t>
             </a:r>
             <a:r>
-              <a:rPr sz="840">
+              <a:rPr sz="819">
                 <a:solidFill>
                   <a:srgbClr val="475569"/>
                 </a:solidFill>
@@ -12424,12 +12893,15 @@
           </a:p>
           <a:p>
             <a:pPr algn="l">
-              <a:spcBef>
-                <a:spcPts val="450"/>
-              </a:spcBef>
-            </a:pPr>
-            <a:r>
-              <a:rPr sz="880" b="1">
+              <a:lnSpc>
+                <a:spcPts val="1060"/>
+              </a:lnSpc>
+              <a:spcBef>
+                <a:spcPts val="400"/>
+              </a:spcBef>
+            </a:pPr>
+            <a:r>
+              <a:rPr sz="860" b="1">
                 <a:solidFill>
                   <a:srgbClr val="F2A93B"/>
                 </a:solidFill>
@@ -12438,7 +12910,7 @@
               <a:t>▸ </a:t>
             </a:r>
             <a:r>
-              <a:rPr sz="880" b="1">
+              <a:rPr sz="860" b="1">
                 <a:solidFill>
                   <a:srgbClr val="111827"/>
                 </a:solidFill>
@@ -12447,7 +12919,7 @@
               <a:t>vs Codeforces &amp; AtCoder: </a:t>
             </a:r>
             <a:r>
-              <a:rPr sz="840">
+              <a:rPr sz="819">
                 <a:solidFill>
                   <a:srgbClr val="475569"/>
                 </a:solidFill>
@@ -12458,12 +12930,15 @@
           </a:p>
           <a:p>
             <a:pPr algn="l">
-              <a:spcBef>
-                <a:spcPts val="450"/>
-              </a:spcBef>
-            </a:pPr>
-            <a:r>
-              <a:rPr sz="880" b="1">
+              <a:lnSpc>
+                <a:spcPts val="1060"/>
+              </a:lnSpc>
+              <a:spcBef>
+                <a:spcPts val="400"/>
+              </a:spcBef>
+            </a:pPr>
+            <a:r>
+              <a:rPr sz="860" b="1">
                 <a:solidFill>
                   <a:srgbClr val="F2A93B"/>
                 </a:solidFill>
@@ -12472,7 +12947,7 @@
               <a:t>▸ </a:t>
             </a:r>
             <a:r>
-              <a:rPr sz="880" b="1">
+              <a:rPr sz="860" b="1">
                 <a:solidFill>
                   <a:srgbClr val="111827"/>
                 </a:solidFill>
@@ -12481,23 +12956,26 @@
               <a:t>Unique Market Position: </a:t>
             </a:r>
             <a:r>
-              <a:rPr sz="840">
-                <a:solidFill>
-                  <a:srgbClr val="475569"/>
-                </a:solidFill>
-                <a:latin typeface="Roboto"/>
-              </a:rPr>
-              <a:t>The ONLY platform integrating DSA + Code Execution + AI Coaching + Contests</a:t>
-            </a:r>
-          </a:p>
-          <a:p>
-            <a:pPr algn="l">
-              <a:spcBef>
-                <a:spcPts val="450"/>
-              </a:spcBef>
-            </a:pPr>
-            <a:r>
-              <a:rPr sz="880" b="1">
+              <a:rPr sz="819">
+                <a:solidFill>
+                  <a:srgbClr val="475569"/>
+                </a:solidFill>
+                <a:latin typeface="Roboto"/>
+              </a:rPr>
+              <a:t>The ONLY platform integrating 400+ DSA + Code Execution + AI Coaching + Contests</a:t>
+            </a:r>
+          </a:p>
+          <a:p>
+            <a:pPr algn="l">
+              <a:lnSpc>
+                <a:spcPts val="1060"/>
+              </a:lnSpc>
+              <a:spcBef>
+                <a:spcPts val="400"/>
+              </a:spcBef>
+            </a:pPr>
+            <a:r>
+              <a:rPr sz="860" b="1">
                 <a:solidFill>
                   <a:srgbClr val="F2A93B"/>
                 </a:solidFill>
@@ -12506,7 +12984,7 @@
               <a:t>▸ </a:t>
             </a:r>
             <a:r>
-              <a:rPr sz="880" b="1">
+              <a:rPr sz="860" b="1">
                 <a:solidFill>
                   <a:srgbClr val="111827"/>
                 </a:solidFill>
@@ -12515,7 +12993,7 @@
               <a:t>Production Deployment: </a:t>
             </a:r>
             <a:r>
-              <a:rPr sz="840">
+              <a:rPr sz="819">
                 <a:solidFill>
                   <a:srgbClr val="475569"/>
                 </a:solidFill>
@@ -12526,12 +13004,15 @@
           </a:p>
           <a:p>
             <a:pPr algn="l">
-              <a:spcBef>
-                <a:spcPts val="450"/>
-              </a:spcBef>
-            </a:pPr>
-            <a:r>
-              <a:rPr sz="880" b="1">
+              <a:lnSpc>
+                <a:spcPts val="1060"/>
+              </a:lnSpc>
+              <a:spcBef>
+                <a:spcPts val="400"/>
+              </a:spcBef>
+            </a:pPr>
+            <a:r>
+              <a:rPr sz="860" b="1">
                 <a:solidFill>
                   <a:srgbClr val="F2A93B"/>
                 </a:solidFill>
@@ -12540,7 +13021,7 @@
               <a:t>▸ </a:t>
             </a:r>
             <a:r>
-              <a:rPr sz="880" b="1">
+              <a:rPr sz="860" b="1">
                 <a:solidFill>
                   <a:srgbClr val="111827"/>
                 </a:solidFill>
@@ -12549,7 +13030,7 @@
               <a:t>Scalable Impact: </a:t>
             </a:r>
             <a:r>
-              <a:rPr sz="840">
+              <a:rPr sz="819">
                 <a:solidFill>
                   <a:srgbClr val="475569"/>
                 </a:solidFill>
@@ -12627,7 +13108,7 @@
           <a:p>
             <a:pPr algn="ctr"/>
             <a:r>
-              <a:rPr sz="880" b="1">
+              <a:rPr sz="900" b="1">
                 <a:solidFill>
                   <a:srgbClr val="F2A93B"/>
                 </a:solidFill>
